--- a/outputs/pptx/productive_finance_policy_draft.pptx
+++ b/outputs/pptx/productive_finance_policy_draft.pptx
@@ -535,6 +535,26 @@
           </a:p>
           <a:p>
             <a:r>
+              <a:t>style_profile_loaded: False</a:t>
+            </a:r>
+          </a:p>
+          <a:p>
+            <a:r>
+              <a:t>style_profile_path: None</a:t>
+            </a:r>
+          </a:p>
+          <a:p>
+            <a:r>
+              <a:t>applied_font_family: Malgun Gothic</a:t>
+            </a:r>
+          </a:p>
+          <a:p>
+            <a:r>
+              <a:t>applied_fallback_font: Malgun Gothic</a:t>
+            </a:r>
+          </a:p>
+          <a:p>
+            <a:r>
               <a:t>source_slide_refs: [</a:t>
             </a:r>
           </a:p>
@@ -725,6 +745,26 @@
           </a:p>
           <a:p>
             <a:r>
+              <a:t>style_profile_loaded: False</a:t>
+            </a:r>
+          </a:p>
+          <a:p>
+            <a:r>
+              <a:t>style_profile_path: None</a:t>
+            </a:r>
+          </a:p>
+          <a:p>
+            <a:r>
+              <a:t>applied_font_family: Malgun Gothic</a:t>
+            </a:r>
+          </a:p>
+          <a:p>
+            <a:r>
+              <a:t>applied_fallback_font: Malgun Gothic</a:t>
+            </a:r>
+          </a:p>
+          <a:p>
+            <a:r>
               <a:t>source_slide_refs: [</a:t>
             </a:r>
           </a:p>
@@ -940,6 +980,26 @@
           </a:p>
           <a:p>
             <a:r>
+              <a:t>style_profile_loaded: False</a:t>
+            </a:r>
+          </a:p>
+          <a:p>
+            <a:r>
+              <a:t>style_profile_path: None</a:t>
+            </a:r>
+          </a:p>
+          <a:p>
+            <a:r>
+              <a:t>applied_font_family: Malgun Gothic</a:t>
+            </a:r>
+          </a:p>
+          <a:p>
+            <a:r>
+              <a:t>applied_fallback_font: Malgun Gothic</a:t>
+            </a:r>
+          </a:p>
+          <a:p>
+            <a:r>
               <a:t>source_slide_refs: [</a:t>
             </a:r>
           </a:p>
@@ -1140,6 +1200,26 @@
           </a:p>
           <a:p>
             <a:r>
+              <a:t>style_profile_loaded: False</a:t>
+            </a:r>
+          </a:p>
+          <a:p>
+            <a:r>
+              <a:t>style_profile_path: None</a:t>
+            </a:r>
+          </a:p>
+          <a:p>
+            <a:r>
+              <a:t>applied_font_family: Malgun Gothic</a:t>
+            </a:r>
+          </a:p>
+          <a:p>
+            <a:r>
+              <a:t>applied_fallback_font: Malgun Gothic</a:t>
+            </a:r>
+          </a:p>
+          <a:p>
+            <a:r>
               <a:t>source_slide_refs: [</a:t>
             </a:r>
           </a:p>
@@ -1330,6 +1410,26 @@
           </a:p>
           <a:p>
             <a:r>
+              <a:t>style_profile_loaded: False</a:t>
+            </a:r>
+          </a:p>
+          <a:p>
+            <a:r>
+              <a:t>style_profile_path: None</a:t>
+            </a:r>
+          </a:p>
+          <a:p>
+            <a:r>
+              <a:t>applied_font_family: Malgun Gothic</a:t>
+            </a:r>
+          </a:p>
+          <a:p>
+            <a:r>
+              <a:t>applied_fallback_font: Malgun Gothic</a:t>
+            </a:r>
+          </a:p>
+          <a:p>
+            <a:r>
               <a:t>source_slide_refs: [</a:t>
             </a:r>
           </a:p>
@@ -1555,6 +1655,26 @@
           </a:p>
           <a:p>
             <a:r>
+              <a:t>style_profile_loaded: False</a:t>
+            </a:r>
+          </a:p>
+          <a:p>
+            <a:r>
+              <a:t>style_profile_path: None</a:t>
+            </a:r>
+          </a:p>
+          <a:p>
+            <a:r>
+              <a:t>applied_font_family: Malgun Gothic</a:t>
+            </a:r>
+          </a:p>
+          <a:p>
+            <a:r>
+              <a:t>applied_fallback_font: Malgun Gothic</a:t>
+            </a:r>
+          </a:p>
+          <a:p>
+            <a:r>
               <a:t>source_slide_refs: [</a:t>
             </a:r>
           </a:p>
@@ -1770,6 +1890,26 @@
           </a:p>
           <a:p>
             <a:r>
+              <a:t>style_profile_loaded: False</a:t>
+            </a:r>
+          </a:p>
+          <a:p>
+            <a:r>
+              <a:t>style_profile_path: None</a:t>
+            </a:r>
+          </a:p>
+          <a:p>
+            <a:r>
+              <a:t>applied_font_family: Malgun Gothic</a:t>
+            </a:r>
+          </a:p>
+          <a:p>
+            <a:r>
+              <a:t>applied_fallback_font: Malgun Gothic</a:t>
+            </a:r>
+          </a:p>
+          <a:p>
+            <a:r>
               <a:t>source_slide_refs: [</a:t>
             </a:r>
           </a:p>
@@ -1995,6 +2135,26 @@
           </a:p>
           <a:p>
             <a:r>
+              <a:t>style_profile_loaded: False</a:t>
+            </a:r>
+          </a:p>
+          <a:p>
+            <a:r>
+              <a:t>style_profile_path: None</a:t>
+            </a:r>
+          </a:p>
+          <a:p>
+            <a:r>
+              <a:t>applied_font_family: Malgun Gothic</a:t>
+            </a:r>
+          </a:p>
+          <a:p>
+            <a:r>
+              <a:t>applied_fallback_font: Malgun Gothic</a:t>
+            </a:r>
+          </a:p>
+          <a:p>
+            <a:r>
               <a:t>source_slide_refs: [</a:t>
             </a:r>
           </a:p>
@@ -2220,6 +2380,26 @@
           </a:p>
           <a:p>
             <a:r>
+              <a:t>style_profile_loaded: False</a:t>
+            </a:r>
+          </a:p>
+          <a:p>
+            <a:r>
+              <a:t>style_profile_path: None</a:t>
+            </a:r>
+          </a:p>
+          <a:p>
+            <a:r>
+              <a:t>applied_font_family: Malgun Gothic</a:t>
+            </a:r>
+          </a:p>
+          <a:p>
+            <a:r>
+              <a:t>applied_fallback_font: Malgun Gothic</a:t>
+            </a:r>
+          </a:p>
+          <a:p>
+            <a:r>
               <a:t>source_slide_refs: [</a:t>
             </a:r>
           </a:p>
@@ -2445,6 +2625,26 @@
           </a:p>
           <a:p>
             <a:r>
+              <a:t>style_profile_loaded: False</a:t>
+            </a:r>
+          </a:p>
+          <a:p>
+            <a:r>
+              <a:t>style_profile_path: None</a:t>
+            </a:r>
+          </a:p>
+          <a:p>
+            <a:r>
+              <a:t>applied_font_family: Malgun Gothic</a:t>
+            </a:r>
+          </a:p>
+          <a:p>
+            <a:r>
+              <a:t>applied_fallback_font: Malgun Gothic</a:t>
+            </a:r>
+          </a:p>
+          <a:p>
+            <a:r>
               <a:t>source_slide_refs: [</a:t>
             </a:r>
           </a:p>
@@ -2670,6 +2870,26 @@
           </a:p>
           <a:p>
             <a:r>
+              <a:t>style_profile_loaded: False</a:t>
+            </a:r>
+          </a:p>
+          <a:p>
+            <a:r>
+              <a:t>style_profile_path: None</a:t>
+            </a:r>
+          </a:p>
+          <a:p>
+            <a:r>
+              <a:t>applied_font_family: Malgun Gothic</a:t>
+            </a:r>
+          </a:p>
+          <a:p>
+            <a:r>
+              <a:t>applied_fallback_font: Malgun Gothic</a:t>
+            </a:r>
+          </a:p>
+          <a:p>
+            <a:r>
               <a:t>source_slide_refs: [</a:t>
             </a:r>
           </a:p>
@@ -2860,6 +3080,26 @@
           </a:p>
           <a:p>
             <a:r>
+              <a:t>style_profile_loaded: False</a:t>
+            </a:r>
+          </a:p>
+          <a:p>
+            <a:r>
+              <a:t>style_profile_path: None</a:t>
+            </a:r>
+          </a:p>
+          <a:p>
+            <a:r>
+              <a:t>applied_font_family: Malgun Gothic</a:t>
+            </a:r>
+          </a:p>
+          <a:p>
+            <a:r>
+              <a:t>applied_fallback_font: Malgun Gothic</a:t>
+            </a:r>
+          </a:p>
+          <a:p>
+            <a:r>
               <a:t>source_slide_refs: [</a:t>
             </a:r>
           </a:p>
@@ -3075,6 +3315,26 @@
           </a:p>
           <a:p>
             <a:r>
+              <a:t>style_profile_loaded: False</a:t>
+            </a:r>
+          </a:p>
+          <a:p>
+            <a:r>
+              <a:t>style_profile_path: None</a:t>
+            </a:r>
+          </a:p>
+          <a:p>
+            <a:r>
+              <a:t>applied_font_family: Malgun Gothic</a:t>
+            </a:r>
+          </a:p>
+          <a:p>
+            <a:r>
+              <a:t>applied_fallback_font: Malgun Gothic</a:t>
+            </a:r>
+          </a:p>
+          <a:p>
+            <a:r>
               <a:t>source_slide_refs: [</a:t>
             </a:r>
           </a:p>
@@ -3290,6 +3550,26 @@
           </a:p>
           <a:p>
             <a:r>
+              <a:t>style_profile_loaded: False</a:t>
+            </a:r>
+          </a:p>
+          <a:p>
+            <a:r>
+              <a:t>style_profile_path: None</a:t>
+            </a:r>
+          </a:p>
+          <a:p>
+            <a:r>
+              <a:t>applied_font_family: Malgun Gothic</a:t>
+            </a:r>
+          </a:p>
+          <a:p>
+            <a:r>
+              <a:t>applied_fallback_font: Malgun Gothic</a:t>
+            </a:r>
+          </a:p>
+          <a:p>
+            <a:r>
               <a:t>source_slide_refs: [</a:t>
             </a:r>
           </a:p>
@@ -3480,6 +3760,26 @@
           </a:p>
           <a:p>
             <a:r>
+              <a:t>style_profile_loaded: False</a:t>
+            </a:r>
+          </a:p>
+          <a:p>
+            <a:r>
+              <a:t>style_profile_path: None</a:t>
+            </a:r>
+          </a:p>
+          <a:p>
+            <a:r>
+              <a:t>applied_font_family: Malgun Gothic</a:t>
+            </a:r>
+          </a:p>
+          <a:p>
+            <a:r>
+              <a:t>applied_fallback_font: Malgun Gothic</a:t>
+            </a:r>
+          </a:p>
+          <a:p>
+            <a:r>
               <a:t>source_slide_refs: [</a:t>
             </a:r>
           </a:p>
@@ -3705,6 +4005,26 @@
           </a:p>
           <a:p>
             <a:r>
+              <a:t>style_profile_loaded: False</a:t>
+            </a:r>
+          </a:p>
+          <a:p>
+            <a:r>
+              <a:t>style_profile_path: None</a:t>
+            </a:r>
+          </a:p>
+          <a:p>
+            <a:r>
+              <a:t>applied_font_family: Malgun Gothic</a:t>
+            </a:r>
+          </a:p>
+          <a:p>
+            <a:r>
+              <a:t>applied_fallback_font: Malgun Gothic</a:t>
+            </a:r>
+          </a:p>
+          <a:p>
+            <a:r>
               <a:t>source_slide_refs: [</a:t>
             </a:r>
           </a:p>
@@ -3966,6 +4286,26 @@
           </a:p>
           <a:p>
             <a:r>
+              <a:t>style_profile_loaded: False</a:t>
+            </a:r>
+          </a:p>
+          <a:p>
+            <a:r>
+              <a:t>style_profile_path: None</a:t>
+            </a:r>
+          </a:p>
+          <a:p>
+            <a:r>
+              <a:t>applied_font_family: Malgun Gothic</a:t>
+            </a:r>
+          </a:p>
+          <a:p>
+            <a:r>
+              <a:t>applied_fallback_font: Malgun Gothic</a:t>
+            </a:r>
+          </a:p>
+          <a:p>
+            <a:r>
               <a:t>source_slide_refs: [</a:t>
             </a:r>
           </a:p>
@@ -4242,6 +4582,26 @@
           </a:p>
           <a:p>
             <a:r>
+              <a:t>style_profile_loaded: False</a:t>
+            </a:r>
+          </a:p>
+          <a:p>
+            <a:r>
+              <a:t>style_profile_path: None</a:t>
+            </a:r>
+          </a:p>
+          <a:p>
+            <a:r>
+              <a:t>applied_font_family: Malgun Gothic</a:t>
+            </a:r>
+          </a:p>
+          <a:p>
+            <a:r>
+              <a:t>applied_fallback_font: Malgun Gothic</a:t>
+            </a:r>
+          </a:p>
+          <a:p>
+            <a:r>
               <a:t>source_slide_refs: [</a:t>
             </a:r>
           </a:p>
@@ -4457,6 +4817,26 @@
           </a:p>
           <a:p>
             <a:r>
+              <a:t>style_profile_loaded: False</a:t>
+            </a:r>
+          </a:p>
+          <a:p>
+            <a:r>
+              <a:t>style_profile_path: None</a:t>
+            </a:r>
+          </a:p>
+          <a:p>
+            <a:r>
+              <a:t>applied_font_family: Malgun Gothic</a:t>
+            </a:r>
+          </a:p>
+          <a:p>
+            <a:r>
+              <a:t>applied_fallback_font: Malgun Gothic</a:t>
+            </a:r>
+          </a:p>
+          <a:p>
+            <a:r>
               <a:t>source_slide_refs: [</a:t>
             </a:r>
           </a:p>
@@ -4682,6 +5062,26 @@
           </a:p>
           <a:p>
             <a:r>
+              <a:t>style_profile_loaded: False</a:t>
+            </a:r>
+          </a:p>
+          <a:p>
+            <a:r>
+              <a:t>style_profile_path: None</a:t>
+            </a:r>
+          </a:p>
+          <a:p>
+            <a:r>
+              <a:t>applied_font_family: Malgun Gothic</a:t>
+            </a:r>
+          </a:p>
+          <a:p>
+            <a:r>
+              <a:t>applied_fallback_font: Malgun Gothic</a:t>
+            </a:r>
+          </a:p>
+          <a:p>
+            <a:r>
               <a:t>source_slide_refs: [</a:t>
             </a:r>
           </a:p>
@@ -4872,6 +5272,26 @@
           </a:p>
           <a:p>
             <a:r>
+              <a:t>style_profile_loaded: False</a:t>
+            </a:r>
+          </a:p>
+          <a:p>
+            <a:r>
+              <a:t>style_profile_path: None</a:t>
+            </a:r>
+          </a:p>
+          <a:p>
+            <a:r>
+              <a:t>applied_font_family: Malgun Gothic</a:t>
+            </a:r>
+          </a:p>
+          <a:p>
+            <a:r>
+              <a:t>applied_fallback_font: Malgun Gothic</a:t>
+            </a:r>
+          </a:p>
+          <a:p>
+            <a:r>
               <a:t>source_slide_refs: [</a:t>
             </a:r>
           </a:p>
@@ -5062,6 +5482,26 @@
           </a:p>
           <a:p>
             <a:r>
+              <a:t>style_profile_loaded: False</a:t>
+            </a:r>
+          </a:p>
+          <a:p>
+            <a:r>
+              <a:t>style_profile_path: None</a:t>
+            </a:r>
+          </a:p>
+          <a:p>
+            <a:r>
+              <a:t>applied_font_family: Malgun Gothic</a:t>
+            </a:r>
+          </a:p>
+          <a:p>
+            <a:r>
+              <a:t>applied_fallback_font: Malgun Gothic</a:t>
+            </a:r>
+          </a:p>
+          <a:p>
+            <a:r>
               <a:t>source_slide_refs: [</a:t>
             </a:r>
           </a:p>
@@ -5277,6 +5717,26 @@
           </a:p>
           <a:p>
             <a:r>
+              <a:t>style_profile_loaded: False</a:t>
+            </a:r>
+          </a:p>
+          <a:p>
+            <a:r>
+              <a:t>style_profile_path: None</a:t>
+            </a:r>
+          </a:p>
+          <a:p>
+            <a:r>
+              <a:t>applied_font_family: Malgun Gothic</a:t>
+            </a:r>
+          </a:p>
+          <a:p>
+            <a:r>
+              <a:t>applied_fallback_font: Malgun Gothic</a:t>
+            </a:r>
+          </a:p>
+          <a:p>
+            <a:r>
               <a:t>source_slide_refs: [</a:t>
             </a:r>
           </a:p>
@@ -5488,6 +5948,26 @@
           <a:p>
             <a:r>
               <a:t>layout_type: comparison</a:t>
+            </a:r>
+          </a:p>
+          <a:p>
+            <a:r>
+              <a:t>style_profile_loaded: False</a:t>
+            </a:r>
+          </a:p>
+          <a:p>
+            <a:r>
+              <a:t>style_profile_path: None</a:t>
+            </a:r>
+          </a:p>
+          <a:p>
+            <a:r>
+              <a:t>applied_font_family: Malgun Gothic</a:t>
+            </a:r>
+          </a:p>
+          <a:p>
+            <a:r>
+              <a:t>applied_fallback_font: Malgun Gothic</a:t>
             </a:r>
           </a:p>
           <a:p>
@@ -8683,8 +9163,8 @@
         </p:nvSpPr>
         <p:spPr>
           <a:xfrm>
-            <a:off x="777240" y="3154680"/>
-            <a:ext cx="9875520" cy="1280160"/>
+            <a:off x="822960" y="3154680"/>
+            <a:ext cx="9875520" cy="914400"/>
           </a:xfrm>
           <a:prstGeom prst="rect">
             <a:avLst/>
@@ -9328,7 +9808,7 @@
         </p:nvSpPr>
         <p:spPr>
           <a:xfrm>
-            <a:off x="822960" y="3429000"/>
+            <a:off x="777240" y="3383280"/>
             <a:ext cx="9875520" cy="914400"/>
           </a:xfrm>
           <a:prstGeom prst="rect">
@@ -9561,7 +10041,7 @@
           <a:solidFill>
             <a:srgbClr val="EBF1F4"/>
           </a:solidFill>
-          <a:ln w="15875">
+          <a:ln w="12700">
             <a:solidFill>
               <a:srgbClr val="A0AEB8"/>
             </a:solidFill>
@@ -9745,8 +10225,8 @@
         </p:nvSpPr>
         <p:spPr>
           <a:xfrm>
-            <a:off x="685800" y="1600200"/>
-            <a:ext cx="6583680" cy="4297680"/>
+            <a:off x="594360" y="1600200"/>
+            <a:ext cx="7040880" cy="4297680"/>
           </a:xfrm>
           <a:prstGeom prst="rect">
             <a:avLst/>
@@ -9825,7 +10305,7 @@
           <a:solidFill>
             <a:srgbClr val="EBF1F4"/>
           </a:solidFill>
-          <a:ln w="15875">
+          <a:ln w="12700">
             <a:solidFill>
               <a:srgbClr val="A0AEB8"/>
             </a:solidFill>
@@ -9975,8 +10455,8 @@
         </p:nvSpPr>
         <p:spPr>
           <a:xfrm>
-            <a:off x="731520" y="914400"/>
-            <a:ext cx="10698480" cy="4480560"/>
+            <a:off x="731520" y="731520"/>
+            <a:ext cx="10698480" cy="6492240"/>
           </a:xfrm>
           <a:prstGeom prst="rect">
             <a:avLst/>
@@ -10020,8 +10500,8 @@
         </p:nvSpPr>
         <p:spPr>
           <a:xfrm>
-            <a:off x="1005840" y="1143000"/>
-            <a:ext cx="10058400" cy="914400"/>
+            <a:off x="731520" y="914400"/>
+            <a:ext cx="10058400" cy="868680"/>
           </a:xfrm>
           <a:prstGeom prst="rect">
             <a:avLst/>
@@ -10054,7 +10534,7 @@
         </p:nvSpPr>
         <p:spPr>
           <a:xfrm>
-            <a:off x="1078992" y="2331720"/>
+            <a:off x="731520" y="1645920"/>
             <a:ext cx="9692640" cy="2468880"/>
           </a:xfrm>
           <a:prstGeom prst="rect">
@@ -11124,7 +11604,7 @@
         </p:nvSpPr>
         <p:spPr>
           <a:xfrm>
-            <a:off x="822960" y="3429000"/>
+            <a:off x="777240" y="3383280"/>
             <a:ext cx="9875520" cy="914400"/>
           </a:xfrm>
           <a:prstGeom prst="rect">
@@ -11357,7 +11837,7 @@
           <a:solidFill>
             <a:srgbClr val="EBF1F4"/>
           </a:solidFill>
-          <a:ln w="15875">
+          <a:ln w="12700">
             <a:solidFill>
               <a:srgbClr val="A0AEB8"/>
             </a:solidFill>
@@ -11541,8 +12021,8 @@
         </p:nvSpPr>
         <p:spPr>
           <a:xfrm>
-            <a:off x="685800" y="1600200"/>
-            <a:ext cx="6583680" cy="4297680"/>
+            <a:off x="594360" y="1600200"/>
+            <a:ext cx="7040880" cy="4297680"/>
           </a:xfrm>
           <a:prstGeom prst="rect">
             <a:avLst/>
@@ -11621,7 +12101,7 @@
           <a:solidFill>
             <a:srgbClr val="EBF1F4"/>
           </a:solidFill>
-          <a:ln w="15875">
+          <a:ln w="12700">
             <a:solidFill>
               <a:srgbClr val="A0AEB8"/>
             </a:solidFill>
@@ -12703,8 +13183,8 @@
         </p:nvSpPr>
         <p:spPr>
           <a:xfrm>
-            <a:off x="685800" y="1600200"/>
-            <a:ext cx="6583680" cy="4297680"/>
+            <a:off x="594360" y="1600200"/>
+            <a:ext cx="7040880" cy="4297680"/>
           </a:xfrm>
           <a:prstGeom prst="rect">
             <a:avLst/>
@@ -12783,7 +13263,7 @@
           <a:solidFill>
             <a:srgbClr val="EBF1F4"/>
           </a:solidFill>
-          <a:ln w="15875">
+          <a:ln w="12700">
             <a:solidFill>
               <a:srgbClr val="A0AEB8"/>
             </a:solidFill>
@@ -13412,7 +13892,7 @@
         </p:nvSpPr>
         <p:spPr>
           <a:xfrm>
-            <a:off x="822960" y="3429000"/>
+            <a:off x="777240" y="3383280"/>
             <a:ext cx="9875520" cy="914400"/>
           </a:xfrm>
           <a:prstGeom prst="rect">
@@ -13565,8 +14045,8 @@
         </p:nvSpPr>
         <p:spPr>
           <a:xfrm>
-            <a:off x="685800" y="1600200"/>
-            <a:ext cx="6583680" cy="4297680"/>
+            <a:off x="594360" y="1600200"/>
+            <a:ext cx="7040880" cy="4297680"/>
           </a:xfrm>
           <a:prstGeom prst="rect">
             <a:avLst/>
@@ -13645,7 +14125,7 @@
           <a:solidFill>
             <a:srgbClr val="EBF1F4"/>
           </a:solidFill>
-          <a:ln w="15875">
+          <a:ln w="12700">
             <a:solidFill>
               <a:srgbClr val="A0AEB8"/>
             </a:solidFill>
@@ -13795,8 +14275,8 @@
         </p:nvSpPr>
         <p:spPr>
           <a:xfrm>
-            <a:off x="594360" y="457200"/>
-            <a:ext cx="10972800" cy="777240"/>
+            <a:off x="1051560" y="640080"/>
+            <a:ext cx="10058400" cy="777240"/>
           </a:xfrm>
           <a:prstGeom prst="rect">
             <a:avLst/>
@@ -13838,7 +14318,7 @@
           <a:solidFill>
             <a:srgbClr val="EBF1F4"/>
           </a:solidFill>
-          <a:ln w="15875">
+          <a:ln w="12700">
             <a:solidFill>
               <a:srgbClr val="A0AEB8"/>
             </a:solidFill>
@@ -13893,7 +14373,7 @@
         </p:nvSpPr>
         <p:spPr>
           <a:xfrm>
-            <a:off x="1051560" y="4526280"/>
+            <a:off x="1051560" y="4572000"/>
             <a:ext cx="10058400" cy="1234440"/>
           </a:xfrm>
           <a:prstGeom prst="rect">

--- a/outputs/pptx/productive_finance_policy_draft.pptx
+++ b/outputs/pptx/productive_finance_policy_draft.pptx
@@ -10032,8 +10032,8 @@
         </p:nvSpPr>
         <p:spPr>
           <a:xfrm>
-            <a:off x="8778240" y="4389120"/>
-            <a:ext cx="2377440" cy="1097280"/>
+            <a:off x="8458200" y="4389120"/>
+            <a:ext cx="2560320" cy="1097280"/>
           </a:xfrm>
           <a:prstGeom prst="rect">
             <a:avLst/>
@@ -10073,17 +10073,7 @@
                 </a:solidFill>
                 <a:latin typeface="Malgun Gothic"/>
               </a:rPr>
-              <a:t>[수동 삽입 필요]</a:t>
-            </a:r>
-            <a:br/>
-            <a:r>
-              <a:rPr sz="1600">
-                <a:solidFill>
-                  <a:srgbClr val="566070"/>
-                </a:solidFill>
-                <a:latin typeface="Malgun Gothic"/>
-              </a:rPr>
-              <a:t>Manual visual placeholder; choose asset during later Piti/PPT work.</a:t>
+              <a:t>[수동 삽입]</a:t>
             </a:r>
           </a:p>
         </p:txBody>
@@ -10337,17 +10327,7 @@
                 </a:solidFill>
                 <a:latin typeface="Malgun Gothic"/>
               </a:rPr>
-              <a:t>[수동 삽입 필요]</a:t>
-            </a:r>
-            <a:br/>
-            <a:r>
-              <a:rPr sz="1600">
-                <a:solidFill>
-                  <a:srgbClr val="566070"/>
-                </a:solidFill>
-                <a:latin typeface="Malgun Gothic"/>
-              </a:rPr>
-              <a:t>Manual visual placeholder; choose asset during later Piti/PPT work.</a:t>
+              <a:t>[수동 삽입]</a:t>
             </a:r>
           </a:p>
         </p:txBody>
@@ -11828,8 +11808,8 @@
         </p:nvSpPr>
         <p:spPr>
           <a:xfrm>
-            <a:off x="8778240" y="4389120"/>
-            <a:ext cx="2377440" cy="1097280"/>
+            <a:off x="8458200" y="4389120"/>
+            <a:ext cx="2560320" cy="1097280"/>
           </a:xfrm>
           <a:prstGeom prst="rect">
             <a:avLst/>
@@ -11869,17 +11849,7 @@
                 </a:solidFill>
                 <a:latin typeface="Malgun Gothic"/>
               </a:rPr>
-              <a:t>[수동 삽입 필요]</a:t>
-            </a:r>
-            <a:br/>
-            <a:r>
-              <a:rPr sz="1600">
-                <a:solidFill>
-                  <a:srgbClr val="566070"/>
-                </a:solidFill>
-                <a:latin typeface="Malgun Gothic"/>
-              </a:rPr>
-              <a:t>Manual visual placeholder; choose asset during later Piti/PPT work.</a:t>
+              <a:t>[수동 삽입]</a:t>
             </a:r>
           </a:p>
         </p:txBody>
@@ -12133,17 +12103,7 @@
                 </a:solidFill>
                 <a:latin typeface="Malgun Gothic"/>
               </a:rPr>
-              <a:t>[수동 삽입 필요]</a:t>
-            </a:r>
-            <a:br/>
-            <a:r>
-              <a:rPr sz="1600">
-                <a:solidFill>
-                  <a:srgbClr val="566070"/>
-                </a:solidFill>
-                <a:latin typeface="Malgun Gothic"/>
-              </a:rPr>
-              <a:t>Manual visual placeholder; choose asset during later Piti/PPT work.</a:t>
+              <a:t>[수동 삽입]</a:t>
             </a:r>
           </a:p>
         </p:txBody>
@@ -13295,17 +13255,7 @@
                 </a:solidFill>
                 <a:latin typeface="Malgun Gothic"/>
               </a:rPr>
-              <a:t>[수동 삽입 필요]</a:t>
-            </a:r>
-            <a:br/>
-            <a:r>
-              <a:rPr sz="1600">
-                <a:solidFill>
-                  <a:srgbClr val="566070"/>
-                </a:solidFill>
-                <a:latin typeface="Malgun Gothic"/>
-              </a:rPr>
-              <a:t>Manual visual placeholder; choose asset during later Piti/PPT work.</a:t>
+              <a:t>[수동 삽입]</a:t>
             </a:r>
           </a:p>
         </p:txBody>
@@ -14157,17 +14107,7 @@
                 </a:solidFill>
                 <a:latin typeface="Malgun Gothic"/>
               </a:rPr>
-              <a:t>[수동 삽입 필요]</a:t>
-            </a:r>
-            <a:br/>
-            <a:r>
-              <a:rPr sz="1600">
-                <a:solidFill>
-                  <a:srgbClr val="566070"/>
-                </a:solidFill>
-                <a:latin typeface="Malgun Gothic"/>
-              </a:rPr>
-              <a:t>Manual visual placeholder; choose asset during later Piti/PPT work.</a:t>
+              <a:t>[수동 삽입]</a:t>
             </a:r>
           </a:p>
         </p:txBody>
@@ -14351,16 +14291,6 @@
                 <a:latin typeface="Malgun Gothic"/>
               </a:rPr>
               <a:t>[차트 후보]</a:t>
-            </a:r>
-            <a:br/>
-            <a:r>
-              <a:rPr sz="1600">
-                <a:solidFill>
-                  <a:srgbClr val="566070"/>
-                </a:solidFill>
-                <a:latin typeface="Malgun Gothic"/>
-              </a:rPr>
-              <a:t>Chart or simple number card candidate; no chart is rendered yet.</a:t>
             </a:r>
           </a:p>
         </p:txBody>

--- a/outputs/pptx/productive_finance_policy_draft.pptx
+++ b/outputs/pptx/productive_finance_policy_draft.pptx
@@ -568,6 +568,47 @@
               <a:t>]</a:t>
             </a:r>
           </a:p>
+          <a:p>
+            <a:r>
+              <a:t>manual_placeholder_hidden: False</a:t>
+            </a:r>
+          </a:p>
+          <a:p/>
+          <a:p>
+            <a:r>
+              <a:t>screen_body_lines:</a:t>
+            </a:r>
+          </a:p>
+          <a:p>
+            <a:r>
+              <a:t>[</a:t>
+            </a:r>
+          </a:p>
+          <a:p>
+            <a:r>
+              <a:t>  "금융은 안전하게 돈을 빌려주는 산업인가",</a:t>
+            </a:r>
+          </a:p>
+          <a:p>
+            <a:r>
+              <a:t>  "아니면 성장 위험을 나눠지는 산업인가"</a:t>
+            </a:r>
+          </a:p>
+          <a:p>
+            <a:r>
+              <a:t>]</a:t>
+            </a:r>
+          </a:p>
+          <a:p>
+            <a:r>
+              <a:t>overflow_body_lines:</a:t>
+            </a:r>
+          </a:p>
+          <a:p>
+            <a:r>
+              <a:t>[]</a:t>
+            </a:r>
+          </a:p>
           <a:p/>
           <a:p>
             <a:r>
@@ -778,6 +819,52 @@
               <a:t>]</a:t>
             </a:r>
           </a:p>
+          <a:p>
+            <a:r>
+              <a:t>manual_placeholder_hidden: False</a:t>
+            </a:r>
+          </a:p>
+          <a:p/>
+          <a:p>
+            <a:r>
+              <a:t>screen_body_lines:</a:t>
+            </a:r>
+          </a:p>
+          <a:p>
+            <a:r>
+              <a:t>[</a:t>
+            </a:r>
+          </a:p>
+          <a:p>
+            <a:r>
+              <a:t>  "정책금융의 명분은 민간이 감당하기 어려운 초기 위험을 나눠지는 것이다.",</a:t>
+            </a:r>
+          </a:p>
+          <a:p>
+            <a:r>
+              <a:t>  "하지만 정책자금이 늘 좋은 결과를 만든다고 단정할 수는 없다.",</a:t>
+            </a:r>
+          </a:p>
+          <a:p>
+            <a:r>
+              <a:t>  "정책금융은 성장의 마중물일 수도, 손실의 통로일 수도 있다."</a:t>
+            </a:r>
+          </a:p>
+          <a:p>
+            <a:r>
+              <a:t>]</a:t>
+            </a:r>
+          </a:p>
+          <a:p>
+            <a:r>
+              <a:t>overflow_body_lines:</a:t>
+            </a:r>
+          </a:p>
+          <a:p>
+            <a:r>
+              <a:t>[]</a:t>
+            </a:r>
+          </a:p>
           <a:p/>
           <a:p>
             <a:r>
@@ -1013,6 +1100,62 @@
               <a:t>]</a:t>
             </a:r>
           </a:p>
+          <a:p>
+            <a:r>
+              <a:t>manual_placeholder_hidden: False</a:t>
+            </a:r>
+          </a:p>
+          <a:p/>
+          <a:p>
+            <a:r>
+              <a:t>screen_body_lines:</a:t>
+            </a:r>
+          </a:p>
+          <a:p>
+            <a:r>
+              <a:t>[</a:t>
+            </a:r>
+          </a:p>
+          <a:p>
+            <a:r>
+              <a:t>  "은행은 예금자의 돈을 지켜야 한다.",</a:t>
+            </a:r>
+          </a:p>
+          <a:p>
+            <a:r>
+              <a:t>  "기업은 긴 투자금을 원한다.",</a:t>
+            </a:r>
+          </a:p>
+          <a:p>
+            <a:r>
+              <a:t>  "국가는 전략산업을 키우고 싶다."</a:t>
+            </a:r>
+          </a:p>
+          <a:p>
+            <a:r>
+              <a:t>]</a:t>
+            </a:r>
+          </a:p>
+          <a:p>
+            <a:r>
+              <a:t>overflow_body_lines:</a:t>
+            </a:r>
+          </a:p>
+          <a:p>
+            <a:r>
+              <a:t>[</a:t>
+            </a:r>
+          </a:p>
+          <a:p>
+            <a:r>
+              <a:t>  "세 이해관계가 한 지점에서 충돌한다."</a:t>
+            </a:r>
+          </a:p>
+          <a:p>
+            <a:r>
+              <a:t>]</a:t>
+            </a:r>
+          </a:p>
           <a:p/>
           <a:p>
             <a:r>
@@ -1233,6 +1376,32 @@
               <a:t>]</a:t>
             </a:r>
           </a:p>
+          <a:p>
+            <a:r>
+              <a:t>manual_placeholder_hidden: False</a:t>
+            </a:r>
+          </a:p>
+          <a:p/>
+          <a:p>
+            <a:r>
+              <a:t>screen_body_lines:</a:t>
+            </a:r>
+          </a:p>
+          <a:p>
+            <a:r>
+              <a:t>[]</a:t>
+            </a:r>
+          </a:p>
+          <a:p>
+            <a:r>
+              <a:t>overflow_body_lines:</a:t>
+            </a:r>
+          </a:p>
+          <a:p>
+            <a:r>
+              <a:t>[]</a:t>
+            </a:r>
+          </a:p>
           <a:p/>
           <a:p>
             <a:r>
@@ -1443,6 +1612,52 @@
               <a:t>]</a:t>
             </a:r>
           </a:p>
+          <a:p>
+            <a:r>
+              <a:t>manual_placeholder_hidden: False</a:t>
+            </a:r>
+          </a:p>
+          <a:p/>
+          <a:p>
+            <a:r>
+              <a:t>screen_body_lines:</a:t>
+            </a:r>
+          </a:p>
+          <a:p>
+            <a:r>
+              <a:t>[</a:t>
+            </a:r>
+          </a:p>
+          <a:p>
+            <a:r>
+              <a:t>  "국민성장펀드는 민관합동 150조 원 규모로 첨단전략산업 생태계를 지원하겠다는 정책 틀이다.",</a:t>
+            </a:r>
+          </a:p>
+          <a:p>
+            <a:r>
+              <a:t>  "국민참여형 펀드는 일반 국민 자금도 일부 모아 자펀드에 투자하는 구조로 설계됐다.",</a:t>
+            </a:r>
+          </a:p>
+          <a:p>
+            <a:r>
+              <a:t>  "그래서 이름은 성장 이야기지만, 실제 방송에서는 투자자 리스크와 정책 책임을 함께 봐야 한다."</a:t>
+            </a:r>
+          </a:p>
+          <a:p>
+            <a:r>
+              <a:t>]</a:t>
+            </a:r>
+          </a:p>
+          <a:p>
+            <a:r>
+              <a:t>overflow_body_lines:</a:t>
+            </a:r>
+          </a:p>
+          <a:p>
+            <a:r>
+              <a:t>[]</a:t>
+            </a:r>
+          </a:p>
           <a:p/>
           <a:p>
             <a:r>
@@ -1688,6 +1903,52 @@
               <a:t>]</a:t>
             </a:r>
           </a:p>
+          <a:p>
+            <a:r>
+              <a:t>manual_placeholder_hidden: False</a:t>
+            </a:r>
+          </a:p>
+          <a:p/>
+          <a:p>
+            <a:r>
+              <a:t>screen_body_lines:</a:t>
+            </a:r>
+          </a:p>
+          <a:p>
+            <a:r>
+              <a:t>[</a:t>
+            </a:r>
+          </a:p>
+          <a:p>
+            <a:r>
+              <a:t>  "국민참여형 펀드 자료는 재정이 각 자펀드에서 20% 범위의 손실을 우선 부담하는 구조를 설명한다.",</a:t>
+            </a:r>
+          </a:p>
+          <a:p>
+            <a:r>
+              <a:t>  "이 장치는 투자자의 위험을 낮추려는 설계지만, 원금 손실 가능성이 사라진다는 뜻은 아니다.",</a:t>
+            </a:r>
+          </a:p>
+          <a:p>
+            <a:r>
+              <a:t>  "손실을 누가, 어떤 순서로, 어디까지 부담하는지가 핵심 질문이다."</a:t>
+            </a:r>
+          </a:p>
+          <a:p>
+            <a:r>
+              <a:t>]</a:t>
+            </a:r>
+          </a:p>
+          <a:p>
+            <a:r>
+              <a:t>overflow_body_lines:</a:t>
+            </a:r>
+          </a:p>
+          <a:p>
+            <a:r>
+              <a:t>[]</a:t>
+            </a:r>
+          </a:p>
           <a:p/>
           <a:p>
             <a:r>
@@ -1923,6 +2184,52 @@
               <a:t>]</a:t>
             </a:r>
           </a:p>
+          <a:p>
+            <a:r>
+              <a:t>manual_placeholder_hidden: False</a:t>
+            </a:r>
+          </a:p>
+          <a:p/>
+          <a:p>
+            <a:r>
+              <a:t>screen_body_lines:</a:t>
+            </a:r>
+          </a:p>
+          <a:p>
+            <a:r>
+              <a:t>[</a:t>
+            </a:r>
+          </a:p>
+          <a:p>
+            <a:r>
+              <a:t>  "정책금융의 어려움은 “돈을 넣을 것인가”보다 “손실이 나면 누가 먼저 감당할 것인가”다.",</a:t>
+            </a:r>
+          </a:p>
+          <a:p>
+            <a:r>
+              <a:t>  "공식자료는 후순위 재정 보강을 설명하지만, 반대 관점은 손실 보전과 관제상품화 논란을 제기한다.",</a:t>
+            </a:r>
+          </a:p>
+          <a:p>
+            <a:r>
+              <a:t>  "이 둘을 같이 봐야 정책금융 논쟁이 단순 찬반으로 흐르지 않는다."</a:t>
+            </a:r>
+          </a:p>
+          <a:p>
+            <a:r>
+              <a:t>]</a:t>
+            </a:r>
+          </a:p>
+          <a:p>
+            <a:r>
+              <a:t>overflow_body_lines:</a:t>
+            </a:r>
+          </a:p>
+          <a:p>
+            <a:r>
+              <a:t>[]</a:t>
+            </a:r>
+          </a:p>
           <a:p/>
           <a:p>
             <a:r>
@@ -2168,6 +2475,52 @@
               <a:t>]</a:t>
             </a:r>
           </a:p>
+          <a:p>
+            <a:r>
+              <a:t>manual_placeholder_hidden: False</a:t>
+            </a:r>
+          </a:p>
+          <a:p/>
+          <a:p>
+            <a:r>
+              <a:t>screen_body_lines:</a:t>
+            </a:r>
+          </a:p>
+          <a:p>
+            <a:r>
+              <a:t>[</a:t>
+            </a:r>
+          </a:p>
+          <a:p>
+            <a:r>
+              <a:t>  "공식자료는 AI, 반도체, 이차전지 등 첨단전략산업을 넓은 지원 대상으로 제시한다.",</a:t>
+            </a:r>
+          </a:p>
+          <a:p>
+            <a:r>
+              <a:t>  "하지만 방송에서는 이것이 특정 기업 성공 보장이나 특정 상품 추천처럼 들리면 안 된다.",</a:t>
+            </a:r>
+          </a:p>
+          <a:p>
+            <a:r>
+              <a:t>  "성장산업 지원과 특정 기업 밀어주기는 구분해서 다뤄야 한다."</a:t>
+            </a:r>
+          </a:p>
+          <a:p>
+            <a:r>
+              <a:t>]</a:t>
+            </a:r>
+          </a:p>
+          <a:p>
+            <a:r>
+              <a:t>overflow_body_lines:</a:t>
+            </a:r>
+          </a:p>
+          <a:p>
+            <a:r>
+              <a:t>[]</a:t>
+            </a:r>
+          </a:p>
           <a:p/>
           <a:p>
             <a:r>
@@ -2413,6 +2766,52 @@
               <a:t>]</a:t>
             </a:r>
           </a:p>
+          <a:p>
+            <a:r>
+              <a:t>manual_placeholder_hidden: False</a:t>
+            </a:r>
+          </a:p>
+          <a:p/>
+          <a:p>
+            <a:r>
+              <a:t>screen_body_lines:</a:t>
+            </a:r>
+          </a:p>
+          <a:p>
+            <a:r>
+              <a:t>[</a:t>
+            </a:r>
+          </a:p>
+          <a:p>
+            <a:r>
+              <a:t>  "반대쪽 질문도 있다. 재정이 위험을 먼저 떠안으면 민간은 얼마나 책임 있게 투자할까.",</a:t>
+            </a:r>
+          </a:p>
+          <a:p>
+            <a:r>
+              <a:t>  "또 은행과 금융회사는 건전성 규제, 위험가중자산, 예금자 보호 논리 안에서 움직인다.",</a:t>
+            </a:r>
+          </a:p>
+          <a:p>
+            <a:r>
+              <a:t>  "그래서 아무도 위험을 안 지는 문제와, 누군가에게 위험을 떠넘기는 문제를 동시에 봐야 한다."</a:t>
+            </a:r>
+          </a:p>
+          <a:p>
+            <a:r>
+              <a:t>]</a:t>
+            </a:r>
+          </a:p>
+          <a:p>
+            <a:r>
+              <a:t>overflow_body_lines:</a:t>
+            </a:r>
+          </a:p>
+          <a:p>
+            <a:r>
+              <a:t>[]</a:t>
+            </a:r>
+          </a:p>
           <a:p/>
           <a:p>
             <a:r>
@@ -2658,6 +3057,52 @@
               <a:t>]</a:t>
             </a:r>
           </a:p>
+          <a:p>
+            <a:r>
+              <a:t>manual_placeholder_hidden: False</a:t>
+            </a:r>
+          </a:p>
+          <a:p/>
+          <a:p>
+            <a:r>
+              <a:t>screen_body_lines:</a:t>
+            </a:r>
+          </a:p>
+          <a:p>
+            <a:r>
+              <a:t>[</a:t>
+            </a:r>
+          </a:p>
+          <a:p>
+            <a:r>
+              <a:t>  "성장의 과실을 함께 나누자는 말은 듣기 좋다.",</a:t>
+            </a:r>
+          </a:p>
+          <a:p>
+            <a:r>
+              <a:t>  "하지만 위험도 함께 나눠야 한다면, 손실이 발생했을 때 재정·운용사·투자자·금융권의 책임선이 중요해진다.",</a:t>
+            </a:r>
+          </a:p>
+          <a:p>
+            <a:r>
+              <a:t>  "국민성장펀드 이야기는 결국 수익보다 위험 배분의 설계로 읽어야 한다."</a:t>
+            </a:r>
+          </a:p>
+          <a:p>
+            <a:r>
+              <a:t>]</a:t>
+            </a:r>
+          </a:p>
+          <a:p>
+            <a:r>
+              <a:t>overflow_body_lines:</a:t>
+            </a:r>
+          </a:p>
+          <a:p>
+            <a:r>
+              <a:t>[]</a:t>
+            </a:r>
+          </a:p>
           <a:p/>
           <a:p>
             <a:r>
@@ -2903,6 +3348,32 @@
               <a:t>]</a:t>
             </a:r>
           </a:p>
+          <a:p>
+            <a:r>
+              <a:t>manual_placeholder_hidden: False</a:t>
+            </a:r>
+          </a:p>
+          <a:p/>
+          <a:p>
+            <a:r>
+              <a:t>screen_body_lines:</a:t>
+            </a:r>
+          </a:p>
+          <a:p>
+            <a:r>
+              <a:t>[]</a:t>
+            </a:r>
+          </a:p>
+          <a:p>
+            <a:r>
+              <a:t>overflow_body_lines:</a:t>
+            </a:r>
+          </a:p>
+          <a:p>
+            <a:r>
+              <a:t>[]</a:t>
+            </a:r>
+          </a:p>
           <a:p/>
           <a:p>
             <a:r>
@@ -3113,6 +3584,52 @@
               <a:t>]</a:t>
             </a:r>
           </a:p>
+          <a:p>
+            <a:r>
+              <a:t>manual_placeholder_hidden: False</a:t>
+            </a:r>
+          </a:p>
+          <a:p/>
+          <a:p>
+            <a:r>
+              <a:t>screen_body_lines:</a:t>
+            </a:r>
+          </a:p>
+          <a:p>
+            <a:r>
+              <a:t>[</a:t>
+            </a:r>
+          </a:p>
+          <a:p>
+            <a:r>
+              <a:t>  "“담보 및 단기수익 중심 금융 경쟁은 앞서가기 어렵다”는 문제 제기가 나왔다.",</a:t>
+            </a:r>
+          </a:p>
+          <a:p>
+            <a:r>
+              <a:t>  "금융위원회 공식자료는 국민성장펀드가 5년간 150조 원, 2026년 30조 원 규모로 첨단산업 생태계에 자금을 공급하는 틀이라고 설명한다.",</a:t>
+            </a:r>
+          </a:p>
+          <a:p>
+            <a:r>
+              <a:t>  "다만 이 발언과 정책 숫자가 곧 정책 성공을 뜻하는 것은 아니다."</a:t>
+            </a:r>
+          </a:p>
+          <a:p>
+            <a:r>
+              <a:t>]</a:t>
+            </a:r>
+          </a:p>
+          <a:p>
+            <a:r>
+              <a:t>overflow_body_lines:</a:t>
+            </a:r>
+          </a:p>
+          <a:p>
+            <a:r>
+              <a:t>[]</a:t>
+            </a:r>
+          </a:p>
           <a:p/>
           <a:p>
             <a:r>
@@ -3348,6 +3865,52 @@
               <a:t>]</a:t>
             </a:r>
           </a:p>
+          <a:p>
+            <a:r>
+              <a:t>manual_placeholder_hidden: False</a:t>
+            </a:r>
+          </a:p>
+          <a:p/>
+          <a:p>
+            <a:r>
+              <a:t>screen_body_lines:</a:t>
+            </a:r>
+          </a:p>
+          <a:p>
+            <a:r>
+              <a:t>[</a:t>
+            </a:r>
+          </a:p>
+          <a:p>
+            <a:r>
+              <a:t>  "금융권에 성장산업 투자를 요구하면 곧바로 건전성 문제가 따라온다.",</a:t>
+            </a:r>
+          </a:p>
+          <a:p>
+            <a:r>
+              <a:t>  "위험가중자산이 커지면 자본 부담도 커질 수 있고, 예금자 보호 논리와도 충돌할 수 있다.",</a:t>
+            </a:r>
+          </a:p>
+          <a:p>
+            <a:r>
+              <a:t>  "따라서 생산적 금융은 구호가 아니라 자본규제와 위험분담 설계의 문제다."</a:t>
+            </a:r>
+          </a:p>
+          <a:p>
+            <a:r>
+              <a:t>]</a:t>
+            </a:r>
+          </a:p>
+          <a:p>
+            <a:r>
+              <a:t>overflow_body_lines:</a:t>
+            </a:r>
+          </a:p>
+          <a:p>
+            <a:r>
+              <a:t>[]</a:t>
+            </a:r>
+          </a:p>
           <a:p/>
           <a:p>
             <a:r>
@@ -3583,6 +4146,52 @@
               <a:t>]</a:t>
             </a:r>
           </a:p>
+          <a:p>
+            <a:r>
+              <a:t>manual_placeholder_hidden: False</a:t>
+            </a:r>
+          </a:p>
+          <a:p/>
+          <a:p>
+            <a:r>
+              <a:t>screen_body_lines:</a:t>
+            </a:r>
+          </a:p>
+          <a:p>
+            <a:r>
+              <a:t>[</a:t>
+            </a:r>
+          </a:p>
+          <a:p>
+            <a:r>
+              <a:t>  "이 주제는 곧바로 특정 산업·기업·펀드 투자 판단처럼 보일 수 있다.",</a:t>
+            </a:r>
+          </a:p>
+          <a:p>
+            <a:r>
+              <a:t>  "그래서 수익률, 주가, 매수·매도, 유망종목식 표현은 피해야 한다.",</a:t>
+            </a:r>
+          </a:p>
+          <a:p>
+            <a:r>
+              <a:t>  "핵심은 투자 추천이 아니라 위험을 누가 나누느냐는 제도 설계다."</a:t>
+            </a:r>
+          </a:p>
+          <a:p>
+            <a:r>
+              <a:t>]</a:t>
+            </a:r>
+          </a:p>
+          <a:p>
+            <a:r>
+              <a:t>overflow_body_lines:</a:t>
+            </a:r>
+          </a:p>
+          <a:p>
+            <a:r>
+              <a:t>[]</a:t>
+            </a:r>
+          </a:p>
           <a:p/>
           <a:p>
             <a:r>
@@ -3793,6 +4402,52 @@
               <a:t>]</a:t>
             </a:r>
           </a:p>
+          <a:p>
+            <a:r>
+              <a:t>manual_placeholder_hidden: False</a:t>
+            </a:r>
+          </a:p>
+          <a:p/>
+          <a:p>
+            <a:r>
+              <a:t>screen_body_lines:</a:t>
+            </a:r>
+          </a:p>
+          <a:p>
+            <a:r>
+              <a:t>[</a:t>
+            </a:r>
+          </a:p>
+          <a:p>
+            <a:r>
+              <a:t>  "생산적 금융의 질문은 “정부 정책이 맞다/틀리다”가 아니다.",</a:t>
+            </a:r>
+          </a:p>
+          <a:p>
+            <a:r>
+              <a:t>  "좋은 위험을 고르는 능력, 손실을 나누는 규칙, 금융권 건전성을 함께 설계할 수 있느냐는 질문이다.",</a:t>
+            </a:r>
+          </a:p>
+          <a:p>
+            <a:r>
+              <a:t>  "국민성장펀드는 그 질문을 보여주는 한 사례일 뿐, 성공을 단정할 수는 없다."</a:t>
+            </a:r>
+          </a:p>
+          <a:p>
+            <a:r>
+              <a:t>]</a:t>
+            </a:r>
+          </a:p>
+          <a:p>
+            <a:r>
+              <a:t>overflow_body_lines:</a:t>
+            </a:r>
+          </a:p>
+          <a:p>
+            <a:r>
+              <a:t>[]</a:t>
+            </a:r>
+          </a:p>
           <a:p/>
           <a:p>
             <a:r>
@@ -4038,6 +4693,52 @@
               <a:t>]</a:t>
             </a:r>
           </a:p>
+          <a:p>
+            <a:r>
+              <a:t>manual_placeholder_hidden: False</a:t>
+            </a:r>
+          </a:p>
+          <a:p/>
+          <a:p>
+            <a:r>
+              <a:t>screen_body_lines:</a:t>
+            </a:r>
+          </a:p>
+          <a:p>
+            <a:r>
+              <a:t>[</a:t>
+            </a:r>
+          </a:p>
+          <a:p>
+            <a:r>
+              <a:t>  "방송 전 숫자 체크리스트: 150조 원 전체 규모, 2026년 30조 원 운용, 국민참여형 6000억 원, 재정 1200억 원, 손실 우선 부담 20% 범위.",</a:t>
+            </a:r>
+          </a:p>
+          <a:p>
+            <a:r>
+              <a:t>  "정책 효과가 아니라 구조를 설명하는 숫자로만 사용한다.",</a:t>
+            </a:r>
+          </a:p>
+          <a:p>
+            <a:r>
+              <a:t>  "추가로 정책금융 실패 사례와 은행 건전성 자료를 더 확인하면 완성도가 올라간다."</a:t>
+            </a:r>
+          </a:p>
+          <a:p>
+            <a:r>
+              <a:t>]</a:t>
+            </a:r>
+          </a:p>
+          <a:p>
+            <a:r>
+              <a:t>overflow_body_lines:</a:t>
+            </a:r>
+          </a:p>
+          <a:p>
+            <a:r>
+              <a:t>[]</a:t>
+            </a:r>
+          </a:p>
           <a:p/>
           <a:p>
             <a:r>
@@ -4319,6 +5020,47 @@
               <a:t>]</a:t>
             </a:r>
           </a:p>
+          <a:p>
+            <a:r>
+              <a:t>manual_placeholder_hidden: False</a:t>
+            </a:r>
+          </a:p>
+          <a:p/>
+          <a:p>
+            <a:r>
+              <a:t>screen_body_lines:</a:t>
+            </a:r>
+          </a:p>
+          <a:p>
+            <a:r>
+              <a:t>[</a:t>
+            </a:r>
+          </a:p>
+          <a:p>
+            <a:r>
+              <a:t>  "방송 전 꼭 채워야 할 자료: 금융위/산은 공식 원문, 국민참여형 펀드 손실분담 구조, AI·반도체 장기 투자 규모, 관치금융/정책금융 실패 반론, 은행 건전성·위험가중자산 자료.",</a:t>
+            </a:r>
+          </a:p>
+          <a:p>
+            <a:r>
+              <a:t>  "지금 evidence pack은 enriched dry run에는 충분하지만, 방송용 완성본에는 추가 counterpoint가 필요하다."</a:t>
+            </a:r>
+          </a:p>
+          <a:p>
+            <a:r>
+              <a:t>]</a:t>
+            </a:r>
+          </a:p>
+          <a:p>
+            <a:r>
+              <a:t>overflow_body_lines:</a:t>
+            </a:r>
+          </a:p>
+          <a:p>
+            <a:r>
+              <a:t>[]</a:t>
+            </a:r>
+          </a:p>
           <a:p/>
           <a:p>
             <a:r>
@@ -4615,6 +5357,52 @@
               <a:t>]</a:t>
             </a:r>
           </a:p>
+          <a:p>
+            <a:r>
+              <a:t>manual_placeholder_hidden: False</a:t>
+            </a:r>
+          </a:p>
+          <a:p/>
+          <a:p>
+            <a:r>
+              <a:t>screen_body_lines:</a:t>
+            </a:r>
+          </a:p>
+          <a:p>
+            <a:r>
+              <a:t>[</a:t>
+            </a:r>
+          </a:p>
+          <a:p>
+            <a:r>
+              <a:t>  "돈을 빌려줄 때 가장 쉬운 질문은 “담보가 있나?”다.",</a:t>
+            </a:r>
+          </a:p>
+          <a:p>
+            <a:r>
+              <a:t>  "은행은 자본규제와 위험가중자산을 고려해야 하므로, 위험한 자산을 무한정 늘릴 수 없다.",</a:t>
+            </a:r>
+          </a:p>
+          <a:p>
+            <a:r>
+              <a:t>  "그래서 장기 위험자본 논의는 은행의 본능을 비난하는 문제가 아니라 금융 시스템의 설계 문제에 가깝다."</a:t>
+            </a:r>
+          </a:p>
+          <a:p>
+            <a:r>
+              <a:t>]</a:t>
+            </a:r>
+          </a:p>
+          <a:p>
+            <a:r>
+              <a:t>overflow_body_lines:</a:t>
+            </a:r>
+          </a:p>
+          <a:p>
+            <a:r>
+              <a:t>[]</a:t>
+            </a:r>
+          </a:p>
           <a:p/>
           <a:p>
             <a:r>
@@ -4850,6 +5638,52 @@
               <a:t>]</a:t>
             </a:r>
           </a:p>
+          <a:p>
+            <a:r>
+              <a:t>manual_placeholder_hidden: False</a:t>
+            </a:r>
+          </a:p>
+          <a:p/>
+          <a:p>
+            <a:r>
+              <a:t>screen_body_lines:</a:t>
+            </a:r>
+          </a:p>
+          <a:p>
+            <a:r>
+              <a:t>[</a:t>
+            </a:r>
+          </a:p>
+          <a:p>
+            <a:r>
+              <a:t>  "AI와 반도체는 소프트웨어 개발비만의 문제가 아니라 설비, 전력, 공정, 인력, 공급망이 함께 필요한 산업이다.",</a:t>
+            </a:r>
+          </a:p>
+          <a:p>
+            <a:r>
+              <a:t>  "정책자료는 국민성장펀드가 AI·반도체 같은 첨단전략산업에 장기 자금을 공급하려는 틀이라고 설명한다.",</a:t>
+            </a:r>
+          </a:p>
+          <a:p>
+            <a:r>
+              <a:t>  "그래서 이 이야기는 “대출을 늘리자”보다 “누가 긴 위험을 나눌 것인가”에 가깝다."</a:t>
+            </a:r>
+          </a:p>
+          <a:p>
+            <a:r>
+              <a:t>]</a:t>
+            </a:r>
+          </a:p>
+          <a:p>
+            <a:r>
+              <a:t>overflow_body_lines:</a:t>
+            </a:r>
+          </a:p>
+          <a:p>
+            <a:r>
+              <a:t>[]</a:t>
+            </a:r>
+          </a:p>
           <a:p/>
           <a:p>
             <a:r>
@@ -5095,6 +5929,52 @@
               <a:t>]</a:t>
             </a:r>
           </a:p>
+          <a:p>
+            <a:r>
+              <a:t>manual_placeholder_hidden: False</a:t>
+            </a:r>
+          </a:p>
+          <a:p/>
+          <a:p>
+            <a:r>
+              <a:t>screen_body_lines:</a:t>
+            </a:r>
+          </a:p>
+          <a:p>
+            <a:r>
+              <a:t>[</a:t>
+            </a:r>
+          </a:p>
+          <a:p>
+            <a:r>
+              <a:t>  "너무 안전하면 성장산업이 돈을 못 받는다.",</a:t>
+            </a:r>
+          </a:p>
+          <a:p>
+            <a:r>
+              <a:t>  "너무 위험하면 결국 손실을 누가 떠안느냐는 문제가 생긴다.",</a:t>
+            </a:r>
+          </a:p>
+          <a:p>
+            <a:r>
+              <a:t>  "이 사이의 균형이 정책금융 논쟁의 본론이다."</a:t>
+            </a:r>
+          </a:p>
+          <a:p>
+            <a:r>
+              <a:t>]</a:t>
+            </a:r>
+          </a:p>
+          <a:p>
+            <a:r>
+              <a:t>overflow_body_lines:</a:t>
+            </a:r>
+          </a:p>
+          <a:p>
+            <a:r>
+              <a:t>[]</a:t>
+            </a:r>
+          </a:p>
           <a:p/>
           <a:p>
             <a:r>
@@ -5305,6 +6185,32 @@
               <a:t>]</a:t>
             </a:r>
           </a:p>
+          <a:p>
+            <a:r>
+              <a:t>manual_placeholder_hidden: False</a:t>
+            </a:r>
+          </a:p>
+          <a:p/>
+          <a:p>
+            <a:r>
+              <a:t>screen_body_lines:</a:t>
+            </a:r>
+          </a:p>
+          <a:p>
+            <a:r>
+              <a:t>[]</a:t>
+            </a:r>
+          </a:p>
+          <a:p>
+            <a:r>
+              <a:t>overflow_body_lines:</a:t>
+            </a:r>
+          </a:p>
+          <a:p>
+            <a:r>
+              <a:t>[]</a:t>
+            </a:r>
+          </a:p>
           <a:p/>
           <a:p>
             <a:r>
@@ -5515,6 +6421,52 @@
               <a:t>]</a:t>
             </a:r>
           </a:p>
+          <a:p>
+            <a:r>
+              <a:t>manual_placeholder_hidden: False</a:t>
+            </a:r>
+          </a:p>
+          <a:p/>
+          <a:p>
+            <a:r>
+              <a:t>screen_body_lines:</a:t>
+            </a:r>
+          </a:p>
+          <a:p>
+            <a:r>
+              <a:t>[</a:t>
+            </a:r>
+          </a:p>
+          <a:p>
+            <a:r>
+              <a:t>  "AI는 모델만으로 돌아가지 않는다.",</a:t>
+            </a:r>
+          </a:p>
+          <a:p>
+            <a:r>
+              <a:t>  "반도체, 전력망, 데이터센터, 장비, 소재가 함께 필요하다.",</a:t>
+            </a:r>
+          </a:p>
+          <a:p>
+            <a:r>
+              <a:t>  "공식자료가 “인내자본”을 말하는 이유도 이 산업이 긴 회수 기간과 대규모 선투자를 요구하기 때문이다."</a:t>
+            </a:r>
+          </a:p>
+          <a:p>
+            <a:r>
+              <a:t>]</a:t>
+            </a:r>
+          </a:p>
+          <a:p>
+            <a:r>
+              <a:t>overflow_body_lines:</a:t>
+            </a:r>
+          </a:p>
+          <a:p>
+            <a:r>
+              <a:t>[]</a:t>
+            </a:r>
+          </a:p>
           <a:p/>
           <a:p>
             <a:r>
@@ -5750,6 +6702,52 @@
               <a:t>]</a:t>
             </a:r>
           </a:p>
+          <a:p>
+            <a:r>
+              <a:t>manual_placeholder_hidden: False</a:t>
+            </a:r>
+          </a:p>
+          <a:p/>
+          <a:p>
+            <a:r>
+              <a:t>screen_body_lines:</a:t>
+            </a:r>
+          </a:p>
+          <a:p>
+            <a:r>
+              <a:t>[</a:t>
+            </a:r>
+          </a:p>
+          <a:p>
+            <a:r>
+              <a:t>  "첨단산업 투자는 회수 기간이 길고 실패 가능성도 크다.",</a:t>
+            </a:r>
+          </a:p>
+          <a:p>
+            <a:r>
+              <a:t>  "정부는 국민성장펀드를 통해 장기 자금을 공급하겠다고 설명하지만, 그 자체가 수익을 보장한다는 말은 아니다.",</a:t>
+            </a:r>
+          </a:p>
+          <a:p>
+            <a:r>
+              <a:t>  "여기서 “장기 위험자본”이라는 말은 가능성과 손실 가능성을 함께 본다는 뜻이다."</a:t>
+            </a:r>
+          </a:p>
+          <a:p>
+            <a:r>
+              <a:t>]</a:t>
+            </a:r>
+          </a:p>
+          <a:p>
+            <a:r>
+              <a:t>overflow_body_lines:</a:t>
+            </a:r>
+          </a:p>
+          <a:p>
+            <a:r>
+              <a:t>[]</a:t>
+            </a:r>
+          </a:p>
           <a:p/>
           <a:p>
             <a:r>
@@ -5983,6 +6981,52 @@
           <a:p>
             <a:r>
               <a:t>]</a:t>
+            </a:r>
+          </a:p>
+          <a:p>
+            <a:r>
+              <a:t>manual_placeholder_hidden: False</a:t>
+            </a:r>
+          </a:p>
+          <a:p/>
+          <a:p>
+            <a:r>
+              <a:t>screen_body_lines:</a:t>
+            </a:r>
+          </a:p>
+          <a:p>
+            <a:r>
+              <a:t>[</a:t>
+            </a:r>
+          </a:p>
+          <a:p>
+            <a:r>
+              <a:t>  "공장, 토지, 건물은 담보로 잡기 쉽다.",</a:t>
+            </a:r>
+          </a:p>
+          <a:p>
+            <a:r>
+              <a:t>  "하지만 초기 기술, 인력, 데이터, 공정 노하우는 평가하기 어렵다.",</a:t>
+            </a:r>
+          </a:p>
+          <a:p>
+            <a:r>
+              <a:t>  "위험가중자산과 자본규제가 있는 은행 입장에서는 이런 불확실성이 비용이 된다."</a:t>
+            </a:r>
+          </a:p>
+          <a:p>
+            <a:r>
+              <a:t>]</a:t>
+            </a:r>
+          </a:p>
+          <a:p>
+            <a:r>
+              <a:t>overflow_body_lines:</a:t>
+            </a:r>
+          </a:p>
+          <a:p>
+            <a:r>
+              <a:t>[]</a:t>
             </a:r>
           </a:p>
           <a:p/>
@@ -9144,7 +10188,7 @@
           <a:lstStyle/>
           <a:p>
             <a:r>
-              <a:rPr sz="3800" b="1">
+              <a:rPr sz="3800" b="1" u="none">
                 <a:solidFill>
                   <a:srgbClr val="FFFFFF"/>
                 </a:solidFill>
@@ -9163,8 +10207,8 @@
         </p:nvSpPr>
         <p:spPr>
           <a:xfrm>
-            <a:off x="822960" y="3154680"/>
-            <a:ext cx="9875520" cy="914400"/>
+            <a:off x="731520" y="2240280"/>
+            <a:ext cx="9875520" cy="1280160"/>
           </a:xfrm>
           <a:prstGeom prst="rect">
             <a:avLst/>
@@ -9183,7 +10227,7 @@
               </a:spcAft>
             </a:pPr>
             <a:r>
-              <a:rPr sz="2200">
+              <a:rPr sz="2200" b="0" u="none">
                 <a:solidFill>
                   <a:srgbClr val="E1E9EE"/>
                 </a:solidFill>
@@ -9199,7 +10243,7 @@
               </a:spcAft>
             </a:pPr>
             <a:r>
-              <a:rPr sz="2200">
+              <a:rPr sz="2200" b="0" u="none">
                 <a:solidFill>
                   <a:srgbClr val="E1E9EE"/>
                 </a:solidFill>
@@ -9233,7 +10277,7 @@
           <a:lstStyle/>
           <a:p>
             <a:r>
-              <a:rPr sz="800" b="0">
+              <a:rPr sz="800" b="0" u="none">
                 <a:solidFill>
                   <a:srgbClr val="566070"/>
                 </a:solidFill>
@@ -9268,7 +10312,7 @@
           <a:p>
             <a:pPr algn="r"/>
             <a:r>
-              <a:rPr sz="800" b="0">
+              <a:rPr sz="800" b="0" u="none">
                 <a:solidFill>
                   <a:srgbClr val="566070"/>
                 </a:solidFill>
@@ -9329,7 +10373,7 @@
           <a:p>
             <a:pPr algn="ctr"/>
             <a:r>
-              <a:rPr sz="3200" b="1">
+              <a:rPr sz="3200" b="1" u="none">
                 <a:solidFill>
                   <a:srgbClr val="181C23"/>
                 </a:solidFill>
@@ -9368,7 +10412,7 @@
               </a:spcAft>
             </a:pPr>
             <a:r>
-              <a:rPr sz="2300">
+              <a:rPr sz="2300" b="0" u="none">
                 <a:solidFill>
                   <a:srgbClr val="181C23"/>
                 </a:solidFill>
@@ -9384,7 +10428,7 @@
               </a:spcAft>
             </a:pPr>
             <a:r>
-              <a:rPr sz="2300">
+              <a:rPr sz="2300" b="0" u="none">
                 <a:solidFill>
                   <a:srgbClr val="181C23"/>
                 </a:solidFill>
@@ -9400,7 +10444,7 @@
               </a:spcAft>
             </a:pPr>
             <a:r>
-              <a:rPr sz="2300">
+              <a:rPr sz="2300" b="0" u="none">
                 <a:solidFill>
                   <a:srgbClr val="181C23"/>
                 </a:solidFill>
@@ -9434,7 +10478,7 @@
           <a:lstStyle/>
           <a:p>
             <a:r>
-              <a:rPr sz="800" b="0">
+              <a:rPr sz="800" b="0" u="none">
                 <a:solidFill>
                   <a:srgbClr val="566070"/>
                 </a:solidFill>
@@ -9469,7 +10513,7 @@
           <a:p>
             <a:pPr algn="r"/>
             <a:r>
-              <a:rPr sz="800" b="0">
+              <a:rPr sz="800" b="0" u="none">
                 <a:solidFill>
                   <a:srgbClr val="566070"/>
                 </a:solidFill>
@@ -9530,7 +10574,7 @@
           <a:p>
             <a:pPr algn="ctr"/>
             <a:r>
-              <a:rPr sz="3200" b="1">
+              <a:rPr sz="3200" b="1" u="none">
                 <a:solidFill>
                   <a:srgbClr val="181C23"/>
                 </a:solidFill>
@@ -9569,7 +10613,7 @@
               </a:spcAft>
             </a:pPr>
             <a:r>
-              <a:rPr sz="2300">
+              <a:rPr sz="2300" b="0" u="none">
                 <a:solidFill>
                   <a:srgbClr val="181C23"/>
                 </a:solidFill>
@@ -9585,7 +10629,7 @@
               </a:spcAft>
             </a:pPr>
             <a:r>
-              <a:rPr sz="2300">
+              <a:rPr sz="2300" b="0" u="none">
                 <a:solidFill>
                   <a:srgbClr val="181C23"/>
                 </a:solidFill>
@@ -9601,29 +10645,13 @@
               </a:spcAft>
             </a:pPr>
             <a:r>
-              <a:rPr sz="2300">
+              <a:rPr sz="2300" b="0" u="none">
                 <a:solidFill>
                   <a:srgbClr val="181C23"/>
                 </a:solidFill>
                 <a:latin typeface="Malgun Gothic"/>
               </a:rPr>
               <a:t>국가는 전략산업을 키우고 싶다.</a:t>
-            </a:r>
-          </a:p>
-          <a:p>
-            <a:pPr>
-              <a:spcAft>
-                <a:spcPts val="800"/>
-              </a:spcAft>
-            </a:pPr>
-            <a:r>
-              <a:rPr sz="2300">
-                <a:solidFill>
-                  <a:srgbClr val="181C23"/>
-                </a:solidFill>
-                <a:latin typeface="Malgun Gothic"/>
-              </a:rPr>
-              <a:t>세 이해관계가 한 지점에서 충돌한다.</a:t>
             </a:r>
           </a:p>
         </p:txBody>
@@ -9651,7 +10679,7 @@
           <a:lstStyle/>
           <a:p>
             <a:r>
-              <a:rPr sz="800" b="0">
+              <a:rPr sz="800" b="0" u="none">
                 <a:solidFill>
                   <a:srgbClr val="566070"/>
                 </a:solidFill>
@@ -9686,7 +10714,7 @@
           <a:p>
             <a:pPr algn="r"/>
             <a:r>
-              <a:rPr sz="800" b="0">
+              <a:rPr sz="800" b="0" u="none">
                 <a:solidFill>
                   <a:srgbClr val="566070"/>
                 </a:solidFill>
@@ -9789,7 +10817,7 @@
           <a:lstStyle/>
           <a:p>
             <a:r>
-              <a:rPr sz="3400" b="1">
+              <a:rPr sz="3400" b="1" u="none">
                 <a:solidFill>
                   <a:srgbClr val="FFFFFF"/>
                 </a:solidFill>
@@ -9847,7 +10875,7 @@
           <a:lstStyle/>
           <a:p>
             <a:r>
-              <a:rPr sz="800" b="0">
+              <a:rPr sz="800" b="0" u="none">
                 <a:solidFill>
                   <a:srgbClr val="566070"/>
                 </a:solidFill>
@@ -9882,7 +10910,7 @@
           <a:p>
             <a:pPr algn="r"/>
             <a:r>
-              <a:rPr sz="800" b="0">
+              <a:rPr sz="800" b="0" u="none">
                 <a:solidFill>
                   <a:srgbClr val="566070"/>
                 </a:solidFill>
@@ -9942,7 +10970,7 @@
           <a:lstStyle/>
           <a:p>
             <a:r>
-              <a:rPr sz="3400" b="1">
+              <a:rPr sz="3400" b="1" u="none">
                 <a:solidFill>
                   <a:srgbClr val="181C23"/>
                 </a:solidFill>
@@ -9981,7 +11009,7 @@
               </a:spcAft>
             </a:pPr>
             <a:r>
-              <a:rPr sz="2400">
+              <a:rPr sz="2400" b="0" u="none">
                 <a:solidFill>
                   <a:srgbClr val="181C23"/>
                 </a:solidFill>
@@ -9997,7 +11025,7 @@
               </a:spcAft>
             </a:pPr>
             <a:r>
-              <a:rPr sz="2400">
+              <a:rPr sz="2400" b="0" u="none">
                 <a:solidFill>
                   <a:srgbClr val="181C23"/>
                 </a:solidFill>
@@ -10013,7 +11041,7 @@
               </a:spcAft>
             </a:pPr>
             <a:r>
-              <a:rPr sz="2400">
+              <a:rPr sz="2400" b="0" u="none">
                 <a:solidFill>
                   <a:srgbClr val="181C23"/>
                 </a:solidFill>
@@ -10101,7 +11129,7 @@
           <a:lstStyle/>
           <a:p>
             <a:r>
-              <a:rPr sz="800" b="0">
+              <a:rPr sz="800" b="0" u="none">
                 <a:solidFill>
                   <a:srgbClr val="566070"/>
                 </a:solidFill>
@@ -10136,7 +11164,7 @@
           <a:p>
             <a:pPr algn="r"/>
             <a:r>
-              <a:rPr sz="800" b="0">
+              <a:rPr sz="800" b="0" u="none">
                 <a:solidFill>
                   <a:srgbClr val="566070"/>
                 </a:solidFill>
@@ -10196,7 +11224,7 @@
           <a:lstStyle/>
           <a:p>
             <a:r>
-              <a:rPr sz="2800" b="1">
+              <a:rPr sz="2800" b="1" u="none">
                 <a:solidFill>
                   <a:srgbClr val="181C23"/>
                 </a:solidFill>
@@ -10235,7 +11263,7 @@
               </a:spcAft>
             </a:pPr>
             <a:r>
-              <a:rPr sz="2000">
+              <a:rPr sz="2000" b="0" u="none">
                 <a:solidFill>
                   <a:srgbClr val="181C23"/>
                 </a:solidFill>
@@ -10251,7 +11279,7 @@
               </a:spcAft>
             </a:pPr>
             <a:r>
-              <a:rPr sz="2000">
+              <a:rPr sz="2000" b="0" u="none">
                 <a:solidFill>
                   <a:srgbClr val="181C23"/>
                 </a:solidFill>
@@ -10267,7 +11295,7 @@
               </a:spcAft>
             </a:pPr>
             <a:r>
-              <a:rPr sz="2000">
+              <a:rPr sz="2000" b="0" u="none">
                 <a:solidFill>
                   <a:srgbClr val="181C23"/>
                 </a:solidFill>
@@ -10355,7 +11383,7 @@
           <a:lstStyle/>
           <a:p>
             <a:r>
-              <a:rPr sz="800" b="0">
+              <a:rPr sz="800" b="0" u="none">
                 <a:solidFill>
                   <a:srgbClr val="566070"/>
                 </a:solidFill>
@@ -10390,7 +11418,7 @@
           <a:p>
             <a:pPr algn="r"/>
             <a:r>
-              <a:rPr sz="800" b="0">
+              <a:rPr sz="800" b="0" u="none">
                 <a:solidFill>
                   <a:srgbClr val="566070"/>
                 </a:solidFill>
@@ -10495,7 +11523,7 @@
           <a:lstStyle/>
           <a:p>
             <a:r>
-              <a:rPr sz="2800" b="1">
+              <a:rPr sz="2800" b="1" u="none">
                 <a:solidFill>
                   <a:srgbClr val="181C23"/>
                 </a:solidFill>
@@ -10534,7 +11562,7 @@
               </a:spcAft>
             </a:pPr>
             <a:r>
-              <a:rPr sz="2000">
+              <a:rPr sz="2000" b="0" u="none">
                 <a:solidFill>
                   <a:srgbClr val="181C23"/>
                 </a:solidFill>
@@ -10550,7 +11578,7 @@
               </a:spcAft>
             </a:pPr>
             <a:r>
-              <a:rPr sz="2000">
+              <a:rPr sz="2000" b="0" u="none">
                 <a:solidFill>
                   <a:srgbClr val="181C23"/>
                 </a:solidFill>
@@ -10566,7 +11594,7 @@
               </a:spcAft>
             </a:pPr>
             <a:r>
-              <a:rPr sz="2000">
+              <a:rPr sz="2000" b="0" u="none">
                 <a:solidFill>
                   <a:srgbClr val="181C23"/>
                 </a:solidFill>
@@ -10600,7 +11628,7 @@
           <a:lstStyle/>
           <a:p>
             <a:r>
-              <a:rPr sz="800" b="0">
+              <a:rPr sz="800" b="0" u="none">
                 <a:solidFill>
                   <a:srgbClr val="566070"/>
                 </a:solidFill>
@@ -10635,7 +11663,7 @@
           <a:p>
             <a:pPr algn="r"/>
             <a:r>
-              <a:rPr sz="800" b="0">
+              <a:rPr sz="800" b="0" u="none">
                 <a:solidFill>
                   <a:srgbClr val="566070"/>
                 </a:solidFill>
@@ -10695,7 +11723,7 @@
           <a:lstStyle/>
           <a:p>
             <a:r>
-              <a:rPr sz="2700" b="1">
+              <a:rPr sz="2700" b="1" u="none">
                 <a:solidFill>
                   <a:srgbClr val="181C23"/>
                 </a:solidFill>
@@ -10824,7 +11852,7 @@
               </a:spcAft>
             </a:pPr>
             <a:r>
-              <a:rPr sz="1900">
+              <a:rPr sz="1900" b="0" u="none">
                 <a:solidFill>
                   <a:srgbClr val="181C23"/>
                 </a:solidFill>
@@ -10840,7 +11868,7 @@
               </a:spcAft>
             </a:pPr>
             <a:r>
-              <a:rPr sz="1900">
+              <a:rPr sz="1900" b="0" u="none">
                 <a:solidFill>
                   <a:srgbClr val="181C23"/>
                 </a:solidFill>
@@ -10879,7 +11907,7 @@
               </a:spcAft>
             </a:pPr>
             <a:r>
-              <a:rPr sz="1900">
+              <a:rPr sz="1900" b="0" u="none">
                 <a:solidFill>
                   <a:srgbClr val="181C23"/>
                 </a:solidFill>
@@ -10913,7 +11941,7 @@
           <a:lstStyle/>
           <a:p>
             <a:r>
-              <a:rPr sz="800" b="0">
+              <a:rPr sz="800" b="0" u="none">
                 <a:solidFill>
                   <a:srgbClr val="566070"/>
                 </a:solidFill>
@@ -10948,7 +11976,7 @@
           <a:p>
             <a:pPr algn="r"/>
             <a:r>
-              <a:rPr sz="800" b="0">
+              <a:rPr sz="800" b="0" u="none">
                 <a:solidFill>
                   <a:srgbClr val="566070"/>
                 </a:solidFill>
@@ -11008,7 +12036,7 @@
           <a:lstStyle/>
           <a:p>
             <a:r>
-              <a:rPr sz="2700" b="1">
+              <a:rPr sz="2700" b="1" u="none">
                 <a:solidFill>
                   <a:srgbClr val="181C23"/>
                 </a:solidFill>
@@ -11137,7 +12165,7 @@
               </a:spcAft>
             </a:pPr>
             <a:r>
-              <a:rPr sz="1900">
+              <a:rPr sz="1900" b="0" u="none">
                 <a:solidFill>
                   <a:srgbClr val="181C23"/>
                 </a:solidFill>
@@ -11153,7 +12181,7 @@
               </a:spcAft>
             </a:pPr>
             <a:r>
-              <a:rPr sz="1900">
+              <a:rPr sz="1900" b="0" u="none">
                 <a:solidFill>
                   <a:srgbClr val="181C23"/>
                 </a:solidFill>
@@ -11192,7 +12220,7 @@
               </a:spcAft>
             </a:pPr>
             <a:r>
-              <a:rPr sz="1900">
+              <a:rPr sz="1900" b="0" u="none">
                 <a:solidFill>
                   <a:srgbClr val="181C23"/>
                 </a:solidFill>
@@ -11226,7 +12254,7 @@
           <a:lstStyle/>
           <a:p>
             <a:r>
-              <a:rPr sz="800" b="0">
+              <a:rPr sz="800" b="0" u="none">
                 <a:solidFill>
                   <a:srgbClr val="566070"/>
                 </a:solidFill>
@@ -11261,7 +12289,7 @@
           <a:p>
             <a:pPr algn="r"/>
             <a:r>
-              <a:rPr sz="800" b="0">
+              <a:rPr sz="800" b="0" u="none">
                 <a:solidFill>
                   <a:srgbClr val="566070"/>
                 </a:solidFill>
@@ -11322,7 +12350,7 @@
           <a:p>
             <a:pPr algn="ctr"/>
             <a:r>
-              <a:rPr sz="3200" b="1">
+              <a:rPr sz="3200" b="1" u="none">
                 <a:solidFill>
                   <a:srgbClr val="181C23"/>
                 </a:solidFill>
@@ -11361,7 +12389,7 @@
               </a:spcAft>
             </a:pPr>
             <a:r>
-              <a:rPr sz="2300">
+              <a:rPr sz="2300" b="0" u="none">
                 <a:solidFill>
                   <a:srgbClr val="181C23"/>
                 </a:solidFill>
@@ -11377,7 +12405,7 @@
               </a:spcAft>
             </a:pPr>
             <a:r>
-              <a:rPr sz="2300">
+              <a:rPr sz="2300" b="0" u="none">
                 <a:solidFill>
                   <a:srgbClr val="181C23"/>
                 </a:solidFill>
@@ -11393,7 +12421,7 @@
               </a:spcAft>
             </a:pPr>
             <a:r>
-              <a:rPr sz="2300">
+              <a:rPr sz="2300" b="0" u="none">
                 <a:solidFill>
                   <a:srgbClr val="181C23"/>
                 </a:solidFill>
@@ -11427,7 +12455,7 @@
           <a:lstStyle/>
           <a:p>
             <a:r>
-              <a:rPr sz="800" b="0">
+              <a:rPr sz="800" b="0" u="none">
                 <a:solidFill>
                   <a:srgbClr val="566070"/>
                 </a:solidFill>
@@ -11462,7 +12490,7 @@
           <a:p>
             <a:pPr algn="r"/>
             <a:r>
-              <a:rPr sz="800" b="0">
+              <a:rPr sz="800" b="0" u="none">
                 <a:solidFill>
                   <a:srgbClr val="566070"/>
                 </a:solidFill>
@@ -11565,7 +12593,7 @@
           <a:lstStyle/>
           <a:p>
             <a:r>
-              <a:rPr sz="3400" b="1">
+              <a:rPr sz="3400" b="1" u="none">
                 <a:solidFill>
                   <a:srgbClr val="FFFFFF"/>
                 </a:solidFill>
@@ -11623,7 +12651,7 @@
           <a:lstStyle/>
           <a:p>
             <a:r>
-              <a:rPr sz="800" b="0">
+              <a:rPr sz="800" b="0" u="none">
                 <a:solidFill>
                   <a:srgbClr val="566070"/>
                 </a:solidFill>
@@ -11658,7 +12686,7 @@
           <a:p>
             <a:pPr algn="r"/>
             <a:r>
-              <a:rPr sz="800" b="0">
+              <a:rPr sz="800" b="0" u="none">
                 <a:solidFill>
                   <a:srgbClr val="566070"/>
                 </a:solidFill>
@@ -11718,7 +12746,7 @@
           <a:lstStyle/>
           <a:p>
             <a:r>
-              <a:rPr sz="3400" b="1">
+              <a:rPr sz="3400" b="1" u="none">
                 <a:solidFill>
                   <a:srgbClr val="181C23"/>
                 </a:solidFill>
@@ -11757,7 +12785,7 @@
               </a:spcAft>
             </a:pPr>
             <a:r>
-              <a:rPr sz="2400">
+              <a:rPr sz="2400" b="0" u="none">
                 <a:solidFill>
                   <a:srgbClr val="181C23"/>
                 </a:solidFill>
@@ -11773,7 +12801,7 @@
               </a:spcAft>
             </a:pPr>
             <a:r>
-              <a:rPr sz="2400">
+              <a:rPr sz="2400" b="0" u="none">
                 <a:solidFill>
                   <a:srgbClr val="181C23"/>
                 </a:solidFill>
@@ -11789,7 +12817,7 @@
               </a:spcAft>
             </a:pPr>
             <a:r>
-              <a:rPr sz="2400">
+              <a:rPr sz="2400" b="0" u="none">
                 <a:solidFill>
                   <a:srgbClr val="181C23"/>
                 </a:solidFill>
@@ -11877,7 +12905,7 @@
           <a:lstStyle/>
           <a:p>
             <a:r>
-              <a:rPr sz="800" b="0">
+              <a:rPr sz="800" b="0" u="none">
                 <a:solidFill>
                   <a:srgbClr val="566070"/>
                 </a:solidFill>
@@ -11912,7 +12940,7 @@
           <a:p>
             <a:pPr algn="r"/>
             <a:r>
-              <a:rPr sz="800" b="0">
+              <a:rPr sz="800" b="0" u="none">
                 <a:solidFill>
                   <a:srgbClr val="566070"/>
                 </a:solidFill>
@@ -11972,7 +13000,7 @@
           <a:lstStyle/>
           <a:p>
             <a:r>
-              <a:rPr sz="2800" b="1">
+              <a:rPr sz="2800" b="1" u="none">
                 <a:solidFill>
                   <a:srgbClr val="181C23"/>
                 </a:solidFill>
@@ -12011,7 +13039,7 @@
               </a:spcAft>
             </a:pPr>
             <a:r>
-              <a:rPr sz="2000">
+              <a:rPr sz="2000" b="0" u="none">
                 <a:solidFill>
                   <a:srgbClr val="181C23"/>
                 </a:solidFill>
@@ -12027,7 +13055,7 @@
               </a:spcAft>
             </a:pPr>
             <a:r>
-              <a:rPr sz="2000">
+              <a:rPr sz="2000" b="0" u="none">
                 <a:solidFill>
                   <a:srgbClr val="181C23"/>
                 </a:solidFill>
@@ -12043,7 +13071,7 @@
               </a:spcAft>
             </a:pPr>
             <a:r>
-              <a:rPr sz="2000">
+              <a:rPr sz="2000" b="0" u="none">
                 <a:solidFill>
                   <a:srgbClr val="181C23"/>
                 </a:solidFill>
@@ -12131,7 +13159,7 @@
           <a:lstStyle/>
           <a:p>
             <a:r>
-              <a:rPr sz="800" b="0">
+              <a:rPr sz="800" b="0" u="none">
                 <a:solidFill>
                   <a:srgbClr val="566070"/>
                 </a:solidFill>
@@ -12166,7 +13194,7 @@
           <a:p>
             <a:pPr algn="r"/>
             <a:r>
-              <a:rPr sz="800" b="0">
+              <a:rPr sz="800" b="0" u="none">
                 <a:solidFill>
                   <a:srgbClr val="566070"/>
                 </a:solidFill>
@@ -12226,7 +13254,7 @@
           <a:lstStyle/>
           <a:p>
             <a:r>
-              <a:rPr sz="2700" b="1">
+              <a:rPr sz="2700" b="1" u="none">
                 <a:solidFill>
                   <a:srgbClr val="181C23"/>
                 </a:solidFill>
@@ -12355,7 +13383,7 @@
               </a:spcAft>
             </a:pPr>
             <a:r>
-              <a:rPr sz="1900">
+              <a:rPr sz="1900" b="0" u="none">
                 <a:solidFill>
                   <a:srgbClr val="181C23"/>
                 </a:solidFill>
@@ -12371,7 +13399,7 @@
               </a:spcAft>
             </a:pPr>
             <a:r>
-              <a:rPr sz="1900">
+              <a:rPr sz="1900" b="0" u="none">
                 <a:solidFill>
                   <a:srgbClr val="181C23"/>
                 </a:solidFill>
@@ -12410,7 +13438,7 @@
               </a:spcAft>
             </a:pPr>
             <a:r>
-              <a:rPr sz="1900">
+              <a:rPr sz="1900" b="0" u="none">
                 <a:solidFill>
                   <a:srgbClr val="181C23"/>
                 </a:solidFill>
@@ -12444,7 +13472,7 @@
           <a:lstStyle/>
           <a:p>
             <a:r>
-              <a:rPr sz="800" b="0">
+              <a:rPr sz="800" b="0" u="none">
                 <a:solidFill>
                   <a:srgbClr val="566070"/>
                 </a:solidFill>
@@ -12479,7 +13507,7 @@
           <a:p>
             <a:pPr algn="r"/>
             <a:r>
-              <a:rPr sz="800" b="0">
+              <a:rPr sz="800" b="0" u="none">
                 <a:solidFill>
                   <a:srgbClr val="566070"/>
                 </a:solidFill>
@@ -12540,7 +13568,7 @@
           <a:p>
             <a:pPr algn="ctr"/>
             <a:r>
-              <a:rPr sz="3200" b="1">
+              <a:rPr sz="3200" b="1" u="none">
                 <a:solidFill>
                   <a:srgbClr val="181C23"/>
                 </a:solidFill>
@@ -12579,7 +13607,7 @@
               </a:spcAft>
             </a:pPr>
             <a:r>
-              <a:rPr sz="2300">
+              <a:rPr sz="2300" b="0" u="none">
                 <a:solidFill>
                   <a:srgbClr val="181C23"/>
                 </a:solidFill>
@@ -12595,7 +13623,7 @@
               </a:spcAft>
             </a:pPr>
             <a:r>
-              <a:rPr sz="2300">
+              <a:rPr sz="2300" b="0" u="none">
                 <a:solidFill>
                   <a:srgbClr val="181C23"/>
                 </a:solidFill>
@@ -12611,7 +13639,7 @@
               </a:spcAft>
             </a:pPr>
             <a:r>
-              <a:rPr sz="2300">
+              <a:rPr sz="2300" b="0" u="none">
                 <a:solidFill>
                   <a:srgbClr val="181C23"/>
                 </a:solidFill>
@@ -12645,7 +13673,7 @@
           <a:lstStyle/>
           <a:p>
             <a:r>
-              <a:rPr sz="800" b="0">
+              <a:rPr sz="800" b="0" u="none">
                 <a:solidFill>
                   <a:srgbClr val="566070"/>
                 </a:solidFill>
@@ -12680,7 +13708,7 @@
           <a:p>
             <a:pPr algn="r"/>
             <a:r>
-              <a:rPr sz="800" b="0">
+              <a:rPr sz="800" b="0" u="none">
                 <a:solidFill>
                   <a:srgbClr val="566070"/>
                 </a:solidFill>
@@ -12740,7 +13768,7 @@
           <a:lstStyle/>
           <a:p>
             <a:r>
-              <a:rPr sz="2600" b="1">
+              <a:rPr sz="2600" b="1" u="none">
                 <a:solidFill>
                   <a:srgbClr val="BF6F24"/>
                 </a:solidFill>
@@ -12779,7 +13807,7 @@
               </a:spcAft>
             </a:pPr>
             <a:r>
-              <a:rPr sz="1800">
+              <a:rPr sz="1800" b="0" u="none">
                 <a:solidFill>
                   <a:srgbClr val="181C23"/>
                 </a:solidFill>
@@ -12795,7 +13823,7 @@
               </a:spcAft>
             </a:pPr>
             <a:r>
-              <a:rPr sz="1800">
+              <a:rPr sz="1800" b="0" u="none">
                 <a:solidFill>
                   <a:srgbClr val="181C23"/>
                 </a:solidFill>
@@ -12811,7 +13839,7 @@
               </a:spcAft>
             </a:pPr>
             <a:r>
-              <a:rPr sz="1800">
+              <a:rPr sz="1800" b="0" u="none">
                 <a:solidFill>
                   <a:srgbClr val="181C23"/>
                 </a:solidFill>
@@ -12845,7 +13873,7 @@
           <a:lstStyle/>
           <a:p>
             <a:r>
-              <a:rPr sz="800" b="0">
+              <a:rPr sz="800" b="0" u="none">
                 <a:solidFill>
                   <a:srgbClr val="566070"/>
                 </a:solidFill>
@@ -12880,7 +13908,7 @@
           <a:p>
             <a:pPr algn="r"/>
             <a:r>
-              <a:rPr sz="800" b="0">
+              <a:rPr sz="800" b="0" u="none">
                 <a:solidFill>
                   <a:srgbClr val="566070"/>
                 </a:solidFill>
@@ -12940,7 +13968,7 @@
           <a:lstStyle/>
           <a:p>
             <a:r>
-              <a:rPr sz="2600" b="1">
+              <a:rPr sz="2600" b="1" u="none">
                 <a:solidFill>
                   <a:srgbClr val="BF6F24"/>
                 </a:solidFill>
@@ -12979,7 +14007,7 @@
               </a:spcAft>
             </a:pPr>
             <a:r>
-              <a:rPr sz="1800">
+              <a:rPr sz="1800" b="0" u="none">
                 <a:solidFill>
                   <a:srgbClr val="181C23"/>
                 </a:solidFill>
@@ -12995,7 +14023,7 @@
               </a:spcAft>
             </a:pPr>
             <a:r>
-              <a:rPr sz="1800">
+              <a:rPr sz="1800" b="0" u="none">
                 <a:solidFill>
                   <a:srgbClr val="181C23"/>
                 </a:solidFill>
@@ -13029,7 +14057,7 @@
           <a:lstStyle/>
           <a:p>
             <a:r>
-              <a:rPr sz="800" b="0">
+              <a:rPr sz="800" b="0" u="none">
                 <a:solidFill>
                   <a:srgbClr val="566070"/>
                 </a:solidFill>
@@ -13064,7 +14092,7 @@
           <a:p>
             <a:pPr algn="r"/>
             <a:r>
-              <a:rPr sz="800" b="0">
+              <a:rPr sz="800" b="0" u="none">
                 <a:solidFill>
                   <a:srgbClr val="566070"/>
                 </a:solidFill>
@@ -13124,7 +14152,7 @@
           <a:lstStyle/>
           <a:p>
             <a:r>
-              <a:rPr sz="2800" b="1">
+              <a:rPr sz="2800" b="1" u="none">
                 <a:solidFill>
                   <a:srgbClr val="181C23"/>
                 </a:solidFill>
@@ -13163,7 +14191,7 @@
               </a:spcAft>
             </a:pPr>
             <a:r>
-              <a:rPr sz="2000">
+              <a:rPr sz="2000" b="0" u="none">
                 <a:solidFill>
                   <a:srgbClr val="181C23"/>
                 </a:solidFill>
@@ -13179,7 +14207,7 @@
               </a:spcAft>
             </a:pPr>
             <a:r>
-              <a:rPr sz="2000">
+              <a:rPr sz="2000" b="0" u="none">
                 <a:solidFill>
                   <a:srgbClr val="181C23"/>
                 </a:solidFill>
@@ -13195,7 +14223,7 @@
               </a:spcAft>
             </a:pPr>
             <a:r>
-              <a:rPr sz="2000">
+              <a:rPr sz="2000" b="0" u="none">
                 <a:solidFill>
                   <a:srgbClr val="181C23"/>
                 </a:solidFill>
@@ -13283,7 +14311,7 @@
           <a:lstStyle/>
           <a:p>
             <a:r>
-              <a:rPr sz="800" b="0">
+              <a:rPr sz="800" b="0" u="none">
                 <a:solidFill>
                   <a:srgbClr val="566070"/>
                 </a:solidFill>
@@ -13318,7 +14346,7 @@
           <a:p>
             <a:pPr algn="r"/>
             <a:r>
-              <a:rPr sz="800" b="0">
+              <a:rPr sz="800" b="0" u="none">
                 <a:solidFill>
                   <a:srgbClr val="566070"/>
                 </a:solidFill>
@@ -13379,7 +14407,7 @@
           <a:p>
             <a:pPr algn="ctr"/>
             <a:r>
-              <a:rPr sz="3200" b="1">
+              <a:rPr sz="3200" b="1" u="none">
                 <a:solidFill>
                   <a:srgbClr val="181C23"/>
                 </a:solidFill>
@@ -13418,7 +14446,7 @@
               </a:spcAft>
             </a:pPr>
             <a:r>
-              <a:rPr sz="2300">
+              <a:rPr sz="2300" b="0" u="none">
                 <a:solidFill>
                   <a:srgbClr val="181C23"/>
                 </a:solidFill>
@@ -13434,7 +14462,7 @@
               </a:spcAft>
             </a:pPr>
             <a:r>
-              <a:rPr sz="2300">
+              <a:rPr sz="2300" b="0" u="none">
                 <a:solidFill>
                   <a:srgbClr val="181C23"/>
                 </a:solidFill>
@@ -13450,7 +14478,7 @@
               </a:spcAft>
             </a:pPr>
             <a:r>
-              <a:rPr sz="2300">
+              <a:rPr sz="2300" b="0" u="none">
                 <a:solidFill>
                   <a:srgbClr val="181C23"/>
                 </a:solidFill>
@@ -13484,7 +14512,7 @@
           <a:lstStyle/>
           <a:p>
             <a:r>
-              <a:rPr sz="800" b="0">
+              <a:rPr sz="800" b="0" u="none">
                 <a:solidFill>
                   <a:srgbClr val="566070"/>
                 </a:solidFill>
@@ -13519,7 +14547,7 @@
           <a:p>
             <a:pPr algn="r"/>
             <a:r>
-              <a:rPr sz="800" b="0">
+              <a:rPr sz="800" b="0" u="none">
                 <a:solidFill>
                   <a:srgbClr val="566070"/>
                 </a:solidFill>
@@ -13580,7 +14608,7 @@
           <a:p>
             <a:pPr algn="ctr"/>
             <a:r>
-              <a:rPr sz="3200" b="1">
+              <a:rPr sz="3200" b="1" u="none">
                 <a:solidFill>
                   <a:srgbClr val="181C23"/>
                 </a:solidFill>
@@ -13619,7 +14647,7 @@
               </a:spcAft>
             </a:pPr>
             <a:r>
-              <a:rPr sz="2300">
+              <a:rPr sz="2300" b="0" u="none">
                 <a:solidFill>
                   <a:srgbClr val="181C23"/>
                 </a:solidFill>
@@ -13635,7 +14663,7 @@
               </a:spcAft>
             </a:pPr>
             <a:r>
-              <a:rPr sz="2300">
+              <a:rPr sz="2300" b="0" u="none">
                 <a:solidFill>
                   <a:srgbClr val="181C23"/>
                 </a:solidFill>
@@ -13651,7 +14679,7 @@
               </a:spcAft>
             </a:pPr>
             <a:r>
-              <a:rPr sz="2300">
+              <a:rPr sz="2300" b="0" u="none">
                 <a:solidFill>
                   <a:srgbClr val="181C23"/>
                 </a:solidFill>
@@ -13685,7 +14713,7 @@
           <a:lstStyle/>
           <a:p>
             <a:r>
-              <a:rPr sz="800" b="0">
+              <a:rPr sz="800" b="0" u="none">
                 <a:solidFill>
                   <a:srgbClr val="566070"/>
                 </a:solidFill>
@@ -13720,7 +14748,7 @@
           <a:p>
             <a:pPr algn="r"/>
             <a:r>
-              <a:rPr sz="800" b="0">
+              <a:rPr sz="800" b="0" u="none">
                 <a:solidFill>
                   <a:srgbClr val="566070"/>
                 </a:solidFill>
@@ -13823,7 +14851,7 @@
           <a:lstStyle/>
           <a:p>
             <a:r>
-              <a:rPr sz="3400" b="1">
+              <a:rPr sz="3400" b="1" u="none">
                 <a:solidFill>
                   <a:srgbClr val="FFFFFF"/>
                 </a:solidFill>
@@ -13881,7 +14909,7 @@
           <a:lstStyle/>
           <a:p>
             <a:r>
-              <a:rPr sz="800" b="0">
+              <a:rPr sz="800" b="0" u="none">
                 <a:solidFill>
                   <a:srgbClr val="566070"/>
                 </a:solidFill>
@@ -13916,7 +14944,7 @@
           <a:p>
             <a:pPr algn="r"/>
             <a:r>
-              <a:rPr sz="800" b="0">
+              <a:rPr sz="800" b="0" u="none">
                 <a:solidFill>
                   <a:srgbClr val="566070"/>
                 </a:solidFill>
@@ -13976,7 +15004,7 @@
           <a:lstStyle/>
           <a:p>
             <a:r>
-              <a:rPr sz="2800" b="1">
+              <a:rPr sz="2800" b="1" u="none">
                 <a:solidFill>
                   <a:srgbClr val="181C23"/>
                 </a:solidFill>
@@ -14015,7 +15043,7 @@
               </a:spcAft>
             </a:pPr>
             <a:r>
-              <a:rPr sz="2000">
+              <a:rPr sz="2000" b="0" u="none">
                 <a:solidFill>
                   <a:srgbClr val="181C23"/>
                 </a:solidFill>
@@ -14031,7 +15059,7 @@
               </a:spcAft>
             </a:pPr>
             <a:r>
-              <a:rPr sz="2000">
+              <a:rPr sz="2000" b="0" u="none">
                 <a:solidFill>
                   <a:srgbClr val="181C23"/>
                 </a:solidFill>
@@ -14047,7 +15075,7 @@
               </a:spcAft>
             </a:pPr>
             <a:r>
-              <a:rPr sz="2000">
+              <a:rPr sz="2000" b="0" u="none">
                 <a:solidFill>
                   <a:srgbClr val="181C23"/>
                 </a:solidFill>
@@ -14135,7 +15163,7 @@
           <a:lstStyle/>
           <a:p>
             <a:r>
-              <a:rPr sz="800" b="0">
+              <a:rPr sz="800" b="0" u="none">
                 <a:solidFill>
                   <a:srgbClr val="566070"/>
                 </a:solidFill>
@@ -14170,7 +15198,7 @@
           <a:p>
             <a:pPr algn="r"/>
             <a:r>
-              <a:rPr sz="800" b="0">
+              <a:rPr sz="800" b="0" u="none">
                 <a:solidFill>
                   <a:srgbClr val="566070"/>
                 </a:solidFill>
@@ -14230,7 +15258,7 @@
           <a:lstStyle/>
           <a:p>
             <a:r>
-              <a:rPr sz="2700" b="1">
+              <a:rPr sz="2700" b="1" u="none">
                 <a:solidFill>
                   <a:srgbClr val="181C23"/>
                 </a:solidFill>
@@ -14323,7 +15351,7 @@
               </a:spcAft>
             </a:pPr>
             <a:r>
-              <a:rPr sz="1700">
+              <a:rPr sz="1700" b="0" u="none">
                 <a:solidFill>
                   <a:srgbClr val="181C23"/>
                 </a:solidFill>
@@ -14339,7 +15367,7 @@
               </a:spcAft>
             </a:pPr>
             <a:r>
-              <a:rPr sz="1700">
+              <a:rPr sz="1700" b="0" u="none">
                 <a:solidFill>
                   <a:srgbClr val="181C23"/>
                 </a:solidFill>
@@ -14355,7 +15383,7 @@
               </a:spcAft>
             </a:pPr>
             <a:r>
-              <a:rPr sz="1700">
+              <a:rPr sz="1700" b="0" u="none">
                 <a:solidFill>
                   <a:srgbClr val="181C23"/>
                 </a:solidFill>
@@ -14389,7 +15417,7 @@
           <a:lstStyle/>
           <a:p>
             <a:r>
-              <a:rPr sz="800" b="0">
+              <a:rPr sz="800" b="0" u="none">
                 <a:solidFill>
                   <a:srgbClr val="566070"/>
                 </a:solidFill>
@@ -14424,7 +15452,7 @@
           <a:p>
             <a:pPr algn="r"/>
             <a:r>
-              <a:rPr sz="800" b="0">
+              <a:rPr sz="800" b="0" u="none">
                 <a:solidFill>
                   <a:srgbClr val="566070"/>
                 </a:solidFill>
@@ -14484,7 +15512,7 @@
           <a:lstStyle/>
           <a:p>
             <a:r>
-              <a:rPr sz="2700" b="1">
+              <a:rPr sz="2700" b="1" u="none">
                 <a:solidFill>
                   <a:srgbClr val="181C23"/>
                 </a:solidFill>
@@ -14613,7 +15641,7 @@
               </a:spcAft>
             </a:pPr>
             <a:r>
-              <a:rPr sz="1900">
+              <a:rPr sz="1900" b="0" u="none">
                 <a:solidFill>
                   <a:srgbClr val="181C23"/>
                 </a:solidFill>
@@ -14629,7 +15657,7 @@
               </a:spcAft>
             </a:pPr>
             <a:r>
-              <a:rPr sz="1900">
+              <a:rPr sz="1900" b="0" u="none">
                 <a:solidFill>
                   <a:srgbClr val="181C23"/>
                 </a:solidFill>
@@ -14668,7 +15696,7 @@
               </a:spcAft>
             </a:pPr>
             <a:r>
-              <a:rPr sz="1900">
+              <a:rPr sz="1900" b="0" u="none">
                 <a:solidFill>
                   <a:srgbClr val="181C23"/>
                 </a:solidFill>
@@ -14702,7 +15730,7 @@
           <a:lstStyle/>
           <a:p>
             <a:r>
-              <a:rPr sz="800" b="0">
+              <a:rPr sz="800" b="0" u="none">
                 <a:solidFill>
                   <a:srgbClr val="566070"/>
                 </a:solidFill>
@@ -14737,7 +15765,7 @@
           <a:p>
             <a:pPr algn="r"/>
             <a:r>
-              <a:rPr sz="800" b="0">
+              <a:rPr sz="800" b="0" u="none">
                 <a:solidFill>
                   <a:srgbClr val="566070"/>
                 </a:solidFill>

--- a/outputs/pptx/productive_finance_policy_draft.pptx
+++ b/outputs/pptx/productive_finance_policy_draft.pptx
@@ -10207,8 +10207,8 @@
         </p:nvSpPr>
         <p:spPr>
           <a:xfrm>
-            <a:off x="731520" y="2240280"/>
-            <a:ext cx="9875520" cy="1280160"/>
+            <a:off x="822960" y="3154680"/>
+            <a:ext cx="9875520" cy="914400"/>
           </a:xfrm>
           <a:prstGeom prst="rect">
             <a:avLst/>
@@ -10371,7 +10371,6 @@
           </a:bodyPr>
           <a:lstStyle/>
           <a:p>
-            <a:pPr algn="ctr"/>
             <a:r>
               <a:rPr sz="3200" b="1" u="none">
                 <a:solidFill>
@@ -10572,7 +10571,6 @@
           </a:bodyPr>
           <a:lstStyle/>
           <a:p>
-            <a:pPr algn="ctr"/>
             <a:r>
               <a:rPr sz="3200" b="1" u="none">
                 <a:solidFill>
@@ -12348,7 +12346,6 @@
           </a:bodyPr>
           <a:lstStyle/>
           <a:p>
-            <a:pPr algn="ctr"/>
             <a:r>
               <a:rPr sz="3200" b="1" u="none">
                 <a:solidFill>
@@ -13566,7 +13563,6 @@
           </a:bodyPr>
           <a:lstStyle/>
           <a:p>
-            <a:pPr algn="ctr"/>
             <a:r>
               <a:rPr sz="3200" b="1" u="none">
                 <a:solidFill>
@@ -14405,7 +14401,6 @@
           </a:bodyPr>
           <a:lstStyle/>
           <a:p>
-            <a:pPr algn="ctr"/>
             <a:r>
               <a:rPr sz="3200" b="1" u="none">
                 <a:solidFill>
@@ -14606,7 +14601,6 @@
           </a:bodyPr>
           <a:lstStyle/>
           <a:p>
-            <a:pPr algn="ctr"/>
             <a:r>
               <a:rPr sz="3200" b="1" u="none">
                 <a:solidFill>

--- a/outputs/pptx/productive_finance_policy_draft.pptx
+++ b/outputs/pptx/productive_finance_policy_draft.pptx
@@ -570,6 +570,21 @@
           </a:p>
           <a:p>
             <a:r>
+              <a:t>proof_object_type: none</a:t>
+            </a:r>
+          </a:p>
+          <a:p>
+            <a:r>
+              <a:t>proof_object_required: False</a:t>
+            </a:r>
+          </a:p>
+          <a:p>
+            <a:r>
+              <a:t>proof_object_screen_position: none</a:t>
+            </a:r>
+          </a:p>
+          <a:p>
+            <a:r>
               <a:t>manual_placeholder_hidden: False</a:t>
             </a:r>
           </a:p>
@@ -685,6 +700,62 @@
           <a:p>
             <a:r>
               <a:t>  "prompt_if_ai_image": null</a:t>
+            </a:r>
+          </a:p>
+          <a:p>
+            <a:r>
+              <a:t>}</a:t>
+            </a:r>
+          </a:p>
+          <a:p/>
+          <a:p>
+            <a:r>
+              <a:t>proof_object:</a:t>
+            </a:r>
+          </a:p>
+          <a:p>
+            <a:r>
+              <a:t>{</a:t>
+            </a:r>
+          </a:p>
+          <a:p>
+            <a:r>
+              <a:t>  "type": "none",</a:t>
+            </a:r>
+          </a:p>
+          <a:p>
+            <a:r>
+              <a:t>  "required": false,</a:t>
+            </a:r>
+          </a:p>
+          <a:p>
+            <a:r>
+              <a:t>  "screen_position": "none",</a:t>
+            </a:r>
+          </a:p>
+          <a:p>
+            <a:r>
+              <a:t>  "display_label": "",</a:t>
+            </a:r>
+          </a:p>
+          <a:p>
+            <a:r>
+              <a:t>  "source_url": null,</a:t>
+            </a:r>
+          </a:p>
+          <a:p>
+            <a:r>
+              <a:t>  "image_url": null,</a:t>
+            </a:r>
+          </a:p>
+          <a:p>
+            <a:r>
+              <a:t>  "copyright_risk": false,</a:t>
+            </a:r>
+          </a:p>
+          <a:p>
+            <a:r>
+              <a:t>  "manual_insert_required": false</a:t>
             </a:r>
           </a:p>
           <a:p>
@@ -821,6 +892,21 @@
           </a:p>
           <a:p>
             <a:r>
+              <a:t>proof_object_type: diagram</a:t>
+            </a:r>
+          </a:p>
+          <a:p>
+            <a:r>
+              <a:t>proof_object_required: True</a:t>
+            </a:r>
+          </a:p>
+          <a:p>
+            <a:r>
+              <a:t>proof_object_screen_position: left_half</a:t>
+            </a:r>
+          </a:p>
+          <a:p>
+            <a:r>
               <a:t>manual_placeholder_hidden: False</a:t>
             </a:r>
           </a:p>
@@ -951,6 +1037,62 @@
           <a:p>
             <a:r>
               <a:t>  "prompt_if_ai_image": null</a:t>
+            </a:r>
+          </a:p>
+          <a:p>
+            <a:r>
+              <a:t>}</a:t>
+            </a:r>
+          </a:p>
+          <a:p/>
+          <a:p>
+            <a:r>
+              <a:t>proof_object:</a:t>
+            </a:r>
+          </a:p>
+          <a:p>
+            <a:r>
+              <a:t>{</a:t>
+            </a:r>
+          </a:p>
+          <a:p>
+            <a:r>
+              <a:t>  "type": "diagram",</a:t>
+            </a:r>
+          </a:p>
+          <a:p>
+            <a:r>
+              <a:t>  "required": true,</a:t>
+            </a:r>
+          </a:p>
+          <a:p>
+            <a:r>
+              <a:t>  "screen_position": "left_half",</a:t>
+            </a:r>
+          </a:p>
+          <a:p>
+            <a:r>
+              <a:t>  "display_label": "[도식]",</a:t>
+            </a:r>
+          </a:p>
+          <a:p>
+            <a:r>
+              <a:t>  "source_url": "https://www.fsc.go.kr/no010101/86834?curPage=2&amp;srchBeginDt=&amp;srchCtgry=&amp;srchEndDt=&amp;srchKey=&amp;srchText=",</a:t>
+            </a:r>
+          </a:p>
+          <a:p>
+            <a:r>
+              <a:t>  "image_url": null,</a:t>
+            </a:r>
+          </a:p>
+          <a:p>
+            <a:r>
+              <a:t>  "copyright_risk": false,</a:t>
+            </a:r>
+          </a:p>
+          <a:p>
+            <a:r>
+              <a:t>  "manual_insert_required": true</a:t>
             </a:r>
           </a:p>
           <a:p>
@@ -1102,6 +1244,21 @@
           </a:p>
           <a:p>
             <a:r>
+              <a:t>proof_object_type: diagram</a:t>
+            </a:r>
+          </a:p>
+          <a:p>
+            <a:r>
+              <a:t>proof_object_required: True</a:t>
+            </a:r>
+          </a:p>
+          <a:p>
+            <a:r>
+              <a:t>proof_object_screen_position: left_half</a:t>
+            </a:r>
+          </a:p>
+          <a:p>
+            <a:r>
               <a:t>manual_placeholder_hidden: False</a:t>
             </a:r>
           </a:p>
@@ -1232,6 +1389,62 @@
           <a:p>
             <a:r>
               <a:t>  "prompt_if_ai_image": null</a:t>
+            </a:r>
+          </a:p>
+          <a:p>
+            <a:r>
+              <a:t>}</a:t>
+            </a:r>
+          </a:p>
+          <a:p/>
+          <a:p>
+            <a:r>
+              <a:t>proof_object:</a:t>
+            </a:r>
+          </a:p>
+          <a:p>
+            <a:r>
+              <a:t>{</a:t>
+            </a:r>
+          </a:p>
+          <a:p>
+            <a:r>
+              <a:t>  "type": "diagram",</a:t>
+            </a:r>
+          </a:p>
+          <a:p>
+            <a:r>
+              <a:t>  "required": true,</a:t>
+            </a:r>
+          </a:p>
+          <a:p>
+            <a:r>
+              <a:t>  "screen_position": "left_half",</a:t>
+            </a:r>
+          </a:p>
+          <a:p>
+            <a:r>
+              <a:t>  "display_label": "[도식]",</a:t>
+            </a:r>
+          </a:p>
+          <a:p>
+            <a:r>
+              <a:t>  "source_url": null,</a:t>
+            </a:r>
+          </a:p>
+          <a:p>
+            <a:r>
+              <a:t>  "image_url": null,</a:t>
+            </a:r>
+          </a:p>
+          <a:p>
+            <a:r>
+              <a:t>  "copyright_risk": false,</a:t>
+            </a:r>
+          </a:p>
+          <a:p>
+            <a:r>
+              <a:t>  "manual_insert_required": true</a:t>
             </a:r>
           </a:p>
           <a:p>
@@ -1378,6 +1591,21 @@
           </a:p>
           <a:p>
             <a:r>
+              <a:t>proof_object_type: none</a:t>
+            </a:r>
+          </a:p>
+          <a:p>
+            <a:r>
+              <a:t>proof_object_required: False</a:t>
+            </a:r>
+          </a:p>
+          <a:p>
+            <a:r>
+              <a:t>proof_object_screen_position: none</a:t>
+            </a:r>
+          </a:p>
+          <a:p>
+            <a:r>
               <a:t>manual_placeholder_hidden: False</a:t>
             </a:r>
           </a:p>
@@ -1478,6 +1706,62 @@
           <a:p>
             <a:r>
               <a:t>  "prompt_if_ai_image": null</a:t>
+            </a:r>
+          </a:p>
+          <a:p>
+            <a:r>
+              <a:t>}</a:t>
+            </a:r>
+          </a:p>
+          <a:p/>
+          <a:p>
+            <a:r>
+              <a:t>proof_object:</a:t>
+            </a:r>
+          </a:p>
+          <a:p>
+            <a:r>
+              <a:t>{</a:t>
+            </a:r>
+          </a:p>
+          <a:p>
+            <a:r>
+              <a:t>  "type": "none",</a:t>
+            </a:r>
+          </a:p>
+          <a:p>
+            <a:r>
+              <a:t>  "required": false,</a:t>
+            </a:r>
+          </a:p>
+          <a:p>
+            <a:r>
+              <a:t>  "screen_position": "none",</a:t>
+            </a:r>
+          </a:p>
+          <a:p>
+            <a:r>
+              <a:t>  "display_label": "",</a:t>
+            </a:r>
+          </a:p>
+          <a:p>
+            <a:r>
+              <a:t>  "source_url": null,</a:t>
+            </a:r>
+          </a:p>
+          <a:p>
+            <a:r>
+              <a:t>  "image_url": null,</a:t>
+            </a:r>
+          </a:p>
+          <a:p>
+            <a:r>
+              <a:t>  "copyright_risk": false,</a:t>
+            </a:r>
+          </a:p>
+          <a:p>
+            <a:r>
+              <a:t>  "manual_insert_required": false</a:t>
             </a:r>
           </a:p>
           <a:p>
@@ -1614,6 +1898,21 @@
           </a:p>
           <a:p>
             <a:r>
+              <a:t>proof_object_type: none</a:t>
+            </a:r>
+          </a:p>
+          <a:p>
+            <a:r>
+              <a:t>proof_object_required: False</a:t>
+            </a:r>
+          </a:p>
+          <a:p>
+            <a:r>
+              <a:t>proof_object_screen_position: none</a:t>
+            </a:r>
+          </a:p>
+          <a:p>
+            <a:r>
               <a:t>manual_placeholder_hidden: False</a:t>
             </a:r>
           </a:p>
@@ -1749,6 +2048,62 @@
           <a:p>
             <a:r>
               <a:t>  "prompt_if_ai_image": null</a:t>
+            </a:r>
+          </a:p>
+          <a:p>
+            <a:r>
+              <a:t>}</a:t>
+            </a:r>
+          </a:p>
+          <a:p/>
+          <a:p>
+            <a:r>
+              <a:t>proof_object:</a:t>
+            </a:r>
+          </a:p>
+          <a:p>
+            <a:r>
+              <a:t>{</a:t>
+            </a:r>
+          </a:p>
+          <a:p>
+            <a:r>
+              <a:t>  "type": "none",</a:t>
+            </a:r>
+          </a:p>
+          <a:p>
+            <a:r>
+              <a:t>  "required": false,</a:t>
+            </a:r>
+          </a:p>
+          <a:p>
+            <a:r>
+              <a:t>  "screen_position": "none",</a:t>
+            </a:r>
+          </a:p>
+          <a:p>
+            <a:r>
+              <a:t>  "display_label": "",</a:t>
+            </a:r>
+          </a:p>
+          <a:p>
+            <a:r>
+              <a:t>  "source_url": "https://www.fsc.go.kr/no010101/86834?curPage=2&amp;srchBeginDt=&amp;srchCtgry=&amp;srchEndDt=&amp;srchKey=&amp;srchText=",</a:t>
+            </a:r>
+          </a:p>
+          <a:p>
+            <a:r>
+              <a:t>  "image_url": null,</a:t>
+            </a:r>
+          </a:p>
+          <a:p>
+            <a:r>
+              <a:t>  "copyright_risk": false,</a:t>
+            </a:r>
+          </a:p>
+          <a:p>
+            <a:r>
+              <a:t>  "manual_insert_required": false</a:t>
             </a:r>
           </a:p>
           <a:p>
@@ -1905,6 +2260,21 @@
           </a:p>
           <a:p>
             <a:r>
+              <a:t>proof_object_type: none</a:t>
+            </a:r>
+          </a:p>
+          <a:p>
+            <a:r>
+              <a:t>proof_object_required: False</a:t>
+            </a:r>
+          </a:p>
+          <a:p>
+            <a:r>
+              <a:t>proof_object_screen_position: none</a:t>
+            </a:r>
+          </a:p>
+          <a:p>
+            <a:r>
               <a:t>manual_placeholder_hidden: False</a:t>
             </a:r>
           </a:p>
@@ -2035,6 +2405,62 @@
           <a:p>
             <a:r>
               <a:t>  "prompt_if_ai_image": null</a:t>
+            </a:r>
+          </a:p>
+          <a:p>
+            <a:r>
+              <a:t>}</a:t>
+            </a:r>
+          </a:p>
+          <a:p/>
+          <a:p>
+            <a:r>
+              <a:t>proof_object:</a:t>
+            </a:r>
+          </a:p>
+          <a:p>
+            <a:r>
+              <a:t>{</a:t>
+            </a:r>
+          </a:p>
+          <a:p>
+            <a:r>
+              <a:t>  "type": "none",</a:t>
+            </a:r>
+          </a:p>
+          <a:p>
+            <a:r>
+              <a:t>  "required": false,</a:t>
+            </a:r>
+          </a:p>
+          <a:p>
+            <a:r>
+              <a:t>  "screen_position": "none",</a:t>
+            </a:r>
+          </a:p>
+          <a:p>
+            <a:r>
+              <a:t>  "display_label": "",</a:t>
+            </a:r>
+          </a:p>
+          <a:p>
+            <a:r>
+              <a:t>  "source_url": "https://www.korea.kr/news/policyNewsView.do?newsId=148963908&amp;pWise=main&amp;pWiseMain=R3",</a:t>
+            </a:r>
+          </a:p>
+          <a:p>
+            <a:r>
+              <a:t>  "image_url": null,</a:t>
+            </a:r>
+          </a:p>
+          <a:p>
+            <a:r>
+              <a:t>  "copyright_risk": false,</a:t>
+            </a:r>
+          </a:p>
+          <a:p>
+            <a:r>
+              <a:t>  "manual_insert_required": false</a:t>
             </a:r>
           </a:p>
           <a:p>
@@ -2186,6 +2612,21 @@
           </a:p>
           <a:p>
             <a:r>
+              <a:t>proof_object_type: article_quote</a:t>
+            </a:r>
+          </a:p>
+          <a:p>
+            <a:r>
+              <a:t>proof_object_required: True</a:t>
+            </a:r>
+          </a:p>
+          <a:p>
+            <a:r>
+              <a:t>proof_object_screen_position: left_half</a:t>
+            </a:r>
+          </a:p>
+          <a:p>
+            <a:r>
               <a:t>manual_placeholder_hidden: False</a:t>
             </a:r>
           </a:p>
@@ -2321,6 +2762,62 @@
           <a:p>
             <a:r>
               <a:t>  "prompt_if_ai_image": null</a:t>
+            </a:r>
+          </a:p>
+          <a:p>
+            <a:r>
+              <a:t>}</a:t>
+            </a:r>
+          </a:p>
+          <a:p/>
+          <a:p>
+            <a:r>
+              <a:t>proof_object:</a:t>
+            </a:r>
+          </a:p>
+          <a:p>
+            <a:r>
+              <a:t>{</a:t>
+            </a:r>
+          </a:p>
+          <a:p>
+            <a:r>
+              <a:t>  "type": "article_quote",</a:t>
+            </a:r>
+          </a:p>
+          <a:p>
+            <a:r>
+              <a:t>  "required": true,</a:t>
+            </a:r>
+          </a:p>
+          <a:p>
+            <a:r>
+              <a:t>  "screen_position": "left_half",</a:t>
+            </a:r>
+          </a:p>
+          <a:p>
+            <a:r>
+              <a:t>  "display_label": "[기사 인용]",</a:t>
+            </a:r>
+          </a:p>
+          <a:p>
+            <a:r>
+              <a:t>  "source_url": "https://www.korea.kr/news/policyNewsView.do?newsId=148963908&amp;pWise=main&amp;pWiseMain=R3",</a:t>
+            </a:r>
+          </a:p>
+          <a:p>
+            <a:r>
+              <a:t>  "image_url": null,</a:t>
+            </a:r>
+          </a:p>
+          <a:p>
+            <a:r>
+              <a:t>  "copyright_risk": false,</a:t>
+            </a:r>
+          </a:p>
+          <a:p>
+            <a:r>
+              <a:t>  "manual_insert_required": true</a:t>
             </a:r>
           </a:p>
           <a:p>
@@ -2477,6 +2974,21 @@
           </a:p>
           <a:p>
             <a:r>
+              <a:t>proof_object_type: diagram</a:t>
+            </a:r>
+          </a:p>
+          <a:p>
+            <a:r>
+              <a:t>proof_object_required: True</a:t>
+            </a:r>
+          </a:p>
+          <a:p>
+            <a:r>
+              <a:t>proof_object_screen_position: left_half</a:t>
+            </a:r>
+          </a:p>
+          <a:p>
+            <a:r>
               <a:t>manual_placeholder_hidden: False</a:t>
             </a:r>
           </a:p>
@@ -2612,6 +3124,62 @@
           <a:p>
             <a:r>
               <a:t>  "prompt_if_ai_image": null</a:t>
+            </a:r>
+          </a:p>
+          <a:p>
+            <a:r>
+              <a:t>}</a:t>
+            </a:r>
+          </a:p>
+          <a:p/>
+          <a:p>
+            <a:r>
+              <a:t>proof_object:</a:t>
+            </a:r>
+          </a:p>
+          <a:p>
+            <a:r>
+              <a:t>{</a:t>
+            </a:r>
+          </a:p>
+          <a:p>
+            <a:r>
+              <a:t>  "type": "diagram",</a:t>
+            </a:r>
+          </a:p>
+          <a:p>
+            <a:r>
+              <a:t>  "required": true,</a:t>
+            </a:r>
+          </a:p>
+          <a:p>
+            <a:r>
+              <a:t>  "screen_position": "left_half",</a:t>
+            </a:r>
+          </a:p>
+          <a:p>
+            <a:r>
+              <a:t>  "display_label": "[도식]",</a:t>
+            </a:r>
+          </a:p>
+          <a:p>
+            <a:r>
+              <a:t>  "source_url": "https://m.korea.kr/news/policyNewsView.do?newsId=148956795",</a:t>
+            </a:r>
+          </a:p>
+          <a:p>
+            <a:r>
+              <a:t>  "image_url": null,</a:t>
+            </a:r>
+          </a:p>
+          <a:p>
+            <a:r>
+              <a:t>  "copyright_risk": false,</a:t>
+            </a:r>
+          </a:p>
+          <a:p>
+            <a:r>
+              <a:t>  "manual_insert_required": true</a:t>
             </a:r>
           </a:p>
           <a:p>
@@ -2768,6 +3336,21 @@
           </a:p>
           <a:p>
             <a:r>
+              <a:t>proof_object_type: diagram</a:t>
+            </a:r>
+          </a:p>
+          <a:p>
+            <a:r>
+              <a:t>proof_object_required: True</a:t>
+            </a:r>
+          </a:p>
+          <a:p>
+            <a:r>
+              <a:t>proof_object_screen_position: left_half</a:t>
+            </a:r>
+          </a:p>
+          <a:p>
+            <a:r>
               <a:t>manual_placeholder_hidden: False</a:t>
             </a:r>
           </a:p>
@@ -2903,6 +3486,62 @@
           <a:p>
             <a:r>
               <a:t>  "prompt_if_ai_image": null</a:t>
+            </a:r>
+          </a:p>
+          <a:p>
+            <a:r>
+              <a:t>}</a:t>
+            </a:r>
+          </a:p>
+          <a:p/>
+          <a:p>
+            <a:r>
+              <a:t>proof_object:</a:t>
+            </a:r>
+          </a:p>
+          <a:p>
+            <a:r>
+              <a:t>{</a:t>
+            </a:r>
+          </a:p>
+          <a:p>
+            <a:r>
+              <a:t>  "type": "diagram",</a:t>
+            </a:r>
+          </a:p>
+          <a:p>
+            <a:r>
+              <a:t>  "required": true,</a:t>
+            </a:r>
+          </a:p>
+          <a:p>
+            <a:r>
+              <a:t>  "screen_position": "left_half",</a:t>
+            </a:r>
+          </a:p>
+          <a:p>
+            <a:r>
+              <a:t>  "display_label": "[도식]",</a:t>
+            </a:r>
+          </a:p>
+          <a:p>
+            <a:r>
+              <a:t>  "source_url": "https://www.investchosun.com/m/article.html?contid=2026042180102",</a:t>
+            </a:r>
+          </a:p>
+          <a:p>
+            <a:r>
+              <a:t>  "image_url": null,</a:t>
+            </a:r>
+          </a:p>
+          <a:p>
+            <a:r>
+              <a:t>  "copyright_risk": false,</a:t>
+            </a:r>
+          </a:p>
+          <a:p>
+            <a:r>
+              <a:t>  "manual_insert_required": true</a:t>
             </a:r>
           </a:p>
           <a:p>
@@ -3059,6 +3698,21 @@
           </a:p>
           <a:p>
             <a:r>
+              <a:t>proof_object_type: diagram</a:t>
+            </a:r>
+          </a:p>
+          <a:p>
+            <a:r>
+              <a:t>proof_object_required: True</a:t>
+            </a:r>
+          </a:p>
+          <a:p>
+            <a:r>
+              <a:t>proof_object_screen_position: left_half</a:t>
+            </a:r>
+          </a:p>
+          <a:p>
+            <a:r>
               <a:t>manual_placeholder_hidden: False</a:t>
             </a:r>
           </a:p>
@@ -3194,6 +3848,62 @@
           <a:p>
             <a:r>
               <a:t>  "prompt_if_ai_image": null</a:t>
+            </a:r>
+          </a:p>
+          <a:p>
+            <a:r>
+              <a:t>}</a:t>
+            </a:r>
+          </a:p>
+          <a:p/>
+          <a:p>
+            <a:r>
+              <a:t>proof_object:</a:t>
+            </a:r>
+          </a:p>
+          <a:p>
+            <a:r>
+              <a:t>{</a:t>
+            </a:r>
+          </a:p>
+          <a:p>
+            <a:r>
+              <a:t>  "type": "diagram",</a:t>
+            </a:r>
+          </a:p>
+          <a:p>
+            <a:r>
+              <a:t>  "required": true,</a:t>
+            </a:r>
+          </a:p>
+          <a:p>
+            <a:r>
+              <a:t>  "screen_position": "left_half",</a:t>
+            </a:r>
+          </a:p>
+          <a:p>
+            <a:r>
+              <a:t>  "display_label": "[도식]",</a:t>
+            </a:r>
+          </a:p>
+          <a:p>
+            <a:r>
+              <a:t>  "source_url": "https://www.korea.kr/news/policyNewsView.do?newsId=148963908&amp;pWise=main&amp;pWiseMain=R3",</a:t>
+            </a:r>
+          </a:p>
+          <a:p>
+            <a:r>
+              <a:t>  "image_url": null,</a:t>
+            </a:r>
+          </a:p>
+          <a:p>
+            <a:r>
+              <a:t>  "copyright_risk": false,</a:t>
+            </a:r>
+          </a:p>
+          <a:p>
+            <a:r>
+              <a:t>  "manual_insert_required": true</a:t>
             </a:r>
           </a:p>
           <a:p>
@@ -3350,6 +4060,21 @@
           </a:p>
           <a:p>
             <a:r>
+              <a:t>proof_object_type: none</a:t>
+            </a:r>
+          </a:p>
+          <a:p>
+            <a:r>
+              <a:t>proof_object_required: False</a:t>
+            </a:r>
+          </a:p>
+          <a:p>
+            <a:r>
+              <a:t>proof_object_screen_position: none</a:t>
+            </a:r>
+          </a:p>
+          <a:p>
+            <a:r>
               <a:t>manual_placeholder_hidden: False</a:t>
             </a:r>
           </a:p>
@@ -3450,6 +4175,62 @@
           <a:p>
             <a:r>
               <a:t>  "prompt_if_ai_image": null</a:t>
+            </a:r>
+          </a:p>
+          <a:p>
+            <a:r>
+              <a:t>}</a:t>
+            </a:r>
+          </a:p>
+          <a:p/>
+          <a:p>
+            <a:r>
+              <a:t>proof_object:</a:t>
+            </a:r>
+          </a:p>
+          <a:p>
+            <a:r>
+              <a:t>{</a:t>
+            </a:r>
+          </a:p>
+          <a:p>
+            <a:r>
+              <a:t>  "type": "none",</a:t>
+            </a:r>
+          </a:p>
+          <a:p>
+            <a:r>
+              <a:t>  "required": false,</a:t>
+            </a:r>
+          </a:p>
+          <a:p>
+            <a:r>
+              <a:t>  "screen_position": "none",</a:t>
+            </a:r>
+          </a:p>
+          <a:p>
+            <a:r>
+              <a:t>  "display_label": "",</a:t>
+            </a:r>
+          </a:p>
+          <a:p>
+            <a:r>
+              <a:t>  "source_url": null,</a:t>
+            </a:r>
+          </a:p>
+          <a:p>
+            <a:r>
+              <a:t>  "image_url": null,</a:t>
+            </a:r>
+          </a:p>
+          <a:p>
+            <a:r>
+              <a:t>  "copyright_risk": false,</a:t>
+            </a:r>
+          </a:p>
+          <a:p>
+            <a:r>
+              <a:t>  "manual_insert_required": false</a:t>
             </a:r>
           </a:p>
           <a:p>
@@ -3586,6 +4367,21 @@
           </a:p>
           <a:p>
             <a:r>
+              <a:t>proof_object_type: none</a:t>
+            </a:r>
+          </a:p>
+          <a:p>
+            <a:r>
+              <a:t>proof_object_required: False</a:t>
+            </a:r>
+          </a:p>
+          <a:p>
+            <a:r>
+              <a:t>proof_object_screen_position: none</a:t>
+            </a:r>
+          </a:p>
+          <a:p>
+            <a:r>
               <a:t>manual_placeholder_hidden: False</a:t>
             </a:r>
           </a:p>
@@ -3716,6 +4512,62 @@
           <a:p>
             <a:r>
               <a:t>  "prompt_if_ai_image": null</a:t>
+            </a:r>
+          </a:p>
+          <a:p>
+            <a:r>
+              <a:t>}</a:t>
+            </a:r>
+          </a:p>
+          <a:p/>
+          <a:p>
+            <a:r>
+              <a:t>proof_object:</a:t>
+            </a:r>
+          </a:p>
+          <a:p>
+            <a:r>
+              <a:t>{</a:t>
+            </a:r>
+          </a:p>
+          <a:p>
+            <a:r>
+              <a:t>  "type": "none",</a:t>
+            </a:r>
+          </a:p>
+          <a:p>
+            <a:r>
+              <a:t>  "required": false,</a:t>
+            </a:r>
+          </a:p>
+          <a:p>
+            <a:r>
+              <a:t>  "screen_position": "none",</a:t>
+            </a:r>
+          </a:p>
+          <a:p>
+            <a:r>
+              <a:t>  "display_label": "",</a:t>
+            </a:r>
+          </a:p>
+          <a:p>
+            <a:r>
+              <a:t>  "source_url": "https://news.einfomax.co.kr/news/articleView.html?idxno=4415444",</a:t>
+            </a:r>
+          </a:p>
+          <a:p>
+            <a:r>
+              <a:t>  "image_url": null,</a:t>
+            </a:r>
+          </a:p>
+          <a:p>
+            <a:r>
+              <a:t>  "copyright_risk": false,</a:t>
+            </a:r>
+          </a:p>
+          <a:p>
+            <a:r>
+              <a:t>  "manual_insert_required": false</a:t>
             </a:r>
           </a:p>
           <a:p>
@@ -3867,6 +4719,21 @@
           </a:p>
           <a:p>
             <a:r>
+              <a:t>proof_object_type: none</a:t>
+            </a:r>
+          </a:p>
+          <a:p>
+            <a:r>
+              <a:t>proof_object_required: False</a:t>
+            </a:r>
+          </a:p>
+          <a:p>
+            <a:r>
+              <a:t>proof_object_screen_position: none</a:t>
+            </a:r>
+          </a:p>
+          <a:p>
+            <a:r>
               <a:t>manual_placeholder_hidden: False</a:t>
             </a:r>
           </a:p>
@@ -3997,6 +4864,62 @@
           <a:p>
             <a:r>
               <a:t>  "prompt_if_ai_image": null</a:t>
+            </a:r>
+          </a:p>
+          <a:p>
+            <a:r>
+              <a:t>}</a:t>
+            </a:r>
+          </a:p>
+          <a:p/>
+          <a:p>
+            <a:r>
+              <a:t>proof_object:</a:t>
+            </a:r>
+          </a:p>
+          <a:p>
+            <a:r>
+              <a:t>{</a:t>
+            </a:r>
+          </a:p>
+          <a:p>
+            <a:r>
+              <a:t>  "type": "none",</a:t>
+            </a:r>
+          </a:p>
+          <a:p>
+            <a:r>
+              <a:t>  "required": false,</a:t>
+            </a:r>
+          </a:p>
+          <a:p>
+            <a:r>
+              <a:t>  "screen_position": "none",</a:t>
+            </a:r>
+          </a:p>
+          <a:p>
+            <a:r>
+              <a:t>  "display_label": "",</a:t>
+            </a:r>
+          </a:p>
+          <a:p>
+            <a:r>
+              <a:t>  "source_url": "https://www.bis.org/bcbs/basel3.htm",</a:t>
+            </a:r>
+          </a:p>
+          <a:p>
+            <a:r>
+              <a:t>  "image_url": null,</a:t>
+            </a:r>
+          </a:p>
+          <a:p>
+            <a:r>
+              <a:t>  "copyright_risk": false,</a:t>
+            </a:r>
+          </a:p>
+          <a:p>
+            <a:r>
+              <a:t>  "manual_insert_required": false</a:t>
             </a:r>
           </a:p>
           <a:p>
@@ -4148,6 +5071,21 @@
           </a:p>
           <a:p>
             <a:r>
+              <a:t>proof_object_type: diagram</a:t>
+            </a:r>
+          </a:p>
+          <a:p>
+            <a:r>
+              <a:t>proof_object_required: True</a:t>
+            </a:r>
+          </a:p>
+          <a:p>
+            <a:r>
+              <a:t>proof_object_screen_position: left_half</a:t>
+            </a:r>
+          </a:p>
+          <a:p>
+            <a:r>
               <a:t>manual_placeholder_hidden: False</a:t>
             </a:r>
           </a:p>
@@ -4268,6 +5206,62 @@
           <a:p>
             <a:r>
               <a:t>  "prompt_if_ai_image": null</a:t>
+            </a:r>
+          </a:p>
+          <a:p>
+            <a:r>
+              <a:t>}</a:t>
+            </a:r>
+          </a:p>
+          <a:p/>
+          <a:p>
+            <a:r>
+              <a:t>proof_object:</a:t>
+            </a:r>
+          </a:p>
+          <a:p>
+            <a:r>
+              <a:t>{</a:t>
+            </a:r>
+          </a:p>
+          <a:p>
+            <a:r>
+              <a:t>  "type": "diagram",</a:t>
+            </a:r>
+          </a:p>
+          <a:p>
+            <a:r>
+              <a:t>  "required": true,</a:t>
+            </a:r>
+          </a:p>
+          <a:p>
+            <a:r>
+              <a:t>  "screen_position": "left_half",</a:t>
+            </a:r>
+          </a:p>
+          <a:p>
+            <a:r>
+              <a:t>  "display_label": "[도식]",</a:t>
+            </a:r>
+          </a:p>
+          <a:p>
+            <a:r>
+              <a:t>  "source_url": null,</a:t>
+            </a:r>
+          </a:p>
+          <a:p>
+            <a:r>
+              <a:t>  "image_url": null,</a:t>
+            </a:r>
+          </a:p>
+          <a:p>
+            <a:r>
+              <a:t>  "copyright_risk": false,</a:t>
+            </a:r>
+          </a:p>
+          <a:p>
+            <a:r>
+              <a:t>  "manual_insert_required": true</a:t>
             </a:r>
           </a:p>
           <a:p>
@@ -4404,6 +5398,21 @@
           </a:p>
           <a:p>
             <a:r>
+              <a:t>proof_object_type: none</a:t>
+            </a:r>
+          </a:p>
+          <a:p>
+            <a:r>
+              <a:t>proof_object_required: False</a:t>
+            </a:r>
+          </a:p>
+          <a:p>
+            <a:r>
+              <a:t>proof_object_screen_position: none</a:t>
+            </a:r>
+          </a:p>
+          <a:p>
+            <a:r>
               <a:t>manual_placeholder_hidden: False</a:t>
             </a:r>
           </a:p>
@@ -4539,6 +5548,62 @@
           <a:p>
             <a:r>
               <a:t>  "prompt_if_ai_image": null</a:t>
+            </a:r>
+          </a:p>
+          <a:p>
+            <a:r>
+              <a:t>}</a:t>
+            </a:r>
+          </a:p>
+          <a:p/>
+          <a:p>
+            <a:r>
+              <a:t>proof_object:</a:t>
+            </a:r>
+          </a:p>
+          <a:p>
+            <a:r>
+              <a:t>{</a:t>
+            </a:r>
+          </a:p>
+          <a:p>
+            <a:r>
+              <a:t>  "type": "none",</a:t>
+            </a:r>
+          </a:p>
+          <a:p>
+            <a:r>
+              <a:t>  "required": false,</a:t>
+            </a:r>
+          </a:p>
+          <a:p>
+            <a:r>
+              <a:t>  "screen_position": "none",</a:t>
+            </a:r>
+          </a:p>
+          <a:p>
+            <a:r>
+              <a:t>  "display_label": "",</a:t>
+            </a:r>
+          </a:p>
+          <a:p>
+            <a:r>
+              <a:t>  "source_url": "https://www.fsc.go.kr/no010101/86834?curPage=2&amp;srchBeginDt=&amp;srchCtgry=&amp;srchEndDt=&amp;srchKey=&amp;srchText=",</a:t>
+            </a:r>
+          </a:p>
+          <a:p>
+            <a:r>
+              <a:t>  "image_url": null,</a:t>
+            </a:r>
+          </a:p>
+          <a:p>
+            <a:r>
+              <a:t>  "copyright_risk": false,</a:t>
+            </a:r>
+          </a:p>
+          <a:p>
+            <a:r>
+              <a:t>  "manual_insert_required": false</a:t>
             </a:r>
           </a:p>
           <a:p>
@@ -4695,6 +5760,21 @@
           </a:p>
           <a:p>
             <a:r>
+              <a:t>proof_object_type: none</a:t>
+            </a:r>
+          </a:p>
+          <a:p>
+            <a:r>
+              <a:t>proof_object_required: False</a:t>
+            </a:r>
+          </a:p>
+          <a:p>
+            <a:r>
+              <a:t>proof_object_screen_position: none</a:t>
+            </a:r>
+          </a:p>
+          <a:p>
+            <a:r>
               <a:t>manual_placeholder_hidden: False</a:t>
             </a:r>
           </a:p>
@@ -4840,6 +5920,62 @@
           <a:p>
             <a:r>
               <a:t>  "prompt_if_ai_image": null</a:t>
+            </a:r>
+          </a:p>
+          <a:p>
+            <a:r>
+              <a:t>}</a:t>
+            </a:r>
+          </a:p>
+          <a:p/>
+          <a:p>
+            <a:r>
+              <a:t>proof_object:</a:t>
+            </a:r>
+          </a:p>
+          <a:p>
+            <a:r>
+              <a:t>{</a:t>
+            </a:r>
+          </a:p>
+          <a:p>
+            <a:r>
+              <a:t>  "type": "none",</a:t>
+            </a:r>
+          </a:p>
+          <a:p>
+            <a:r>
+              <a:t>  "required": false,</a:t>
+            </a:r>
+          </a:p>
+          <a:p>
+            <a:r>
+              <a:t>  "screen_position": "none",</a:t>
+            </a:r>
+          </a:p>
+          <a:p>
+            <a:r>
+              <a:t>  "display_label": "",</a:t>
+            </a:r>
+          </a:p>
+          <a:p>
+            <a:r>
+              <a:t>  "source_url": "https://www.fsc.go.kr/no010101/86834?curPage=2&amp;srchBeginDt=&amp;srchCtgry=&amp;srchEndDt=&amp;srchKey=&amp;srchText=",</a:t>
+            </a:r>
+          </a:p>
+          <a:p>
+            <a:r>
+              <a:t>  "image_url": null,</a:t>
+            </a:r>
+          </a:p>
+          <a:p>
+            <a:r>
+              <a:t>  "copyright_risk": false,</a:t>
+            </a:r>
+          </a:p>
+          <a:p>
+            <a:r>
+              <a:t>  "manual_insert_required": false</a:t>
             </a:r>
           </a:p>
           <a:p>
@@ -5022,6 +6158,21 @@
           </a:p>
           <a:p>
             <a:r>
+              <a:t>proof_object_type: none</a:t>
+            </a:r>
+          </a:p>
+          <a:p>
+            <a:r>
+              <a:t>proof_object_required: False</a:t>
+            </a:r>
+          </a:p>
+          <a:p>
+            <a:r>
+              <a:t>proof_object_screen_position: none</a:t>
+            </a:r>
+          </a:p>
+          <a:p>
+            <a:r>
               <a:t>manual_placeholder_hidden: False</a:t>
             </a:r>
           </a:p>
@@ -5167,6 +6318,62 @@
           <a:p>
             <a:r>
               <a:t>  "prompt_if_ai_image": null</a:t>
+            </a:r>
+          </a:p>
+          <a:p>
+            <a:r>
+              <a:t>}</a:t>
+            </a:r>
+          </a:p>
+          <a:p/>
+          <a:p>
+            <a:r>
+              <a:t>proof_object:</a:t>
+            </a:r>
+          </a:p>
+          <a:p>
+            <a:r>
+              <a:t>{</a:t>
+            </a:r>
+          </a:p>
+          <a:p>
+            <a:r>
+              <a:t>  "type": "none",</a:t>
+            </a:r>
+          </a:p>
+          <a:p>
+            <a:r>
+              <a:t>  "required": false,</a:t>
+            </a:r>
+          </a:p>
+          <a:p>
+            <a:r>
+              <a:t>  "screen_position": "none",</a:t>
+            </a:r>
+          </a:p>
+          <a:p>
+            <a:r>
+              <a:t>  "display_label": "",</a:t>
+            </a:r>
+          </a:p>
+          <a:p>
+            <a:r>
+              <a:t>  "source_url": "https://www.fsc.go.kr/no010101/86834?curPage=2&amp;srchBeginDt=&amp;srchCtgry=&amp;srchEndDt=&amp;srchKey=&amp;srchText=",</a:t>
+            </a:r>
+          </a:p>
+          <a:p>
+            <a:r>
+              <a:t>  "image_url": null,</a:t>
+            </a:r>
+          </a:p>
+          <a:p>
+            <a:r>
+              <a:t>  "copyright_risk": false,</a:t>
+            </a:r>
+          </a:p>
+          <a:p>
+            <a:r>
+              <a:t>  "manual_insert_required": false</a:t>
             </a:r>
           </a:p>
           <a:p>
@@ -5359,6 +6566,21 @@
           </a:p>
           <a:p>
             <a:r>
+              <a:t>proof_object_type: none</a:t>
+            </a:r>
+          </a:p>
+          <a:p>
+            <a:r>
+              <a:t>proof_object_required: False</a:t>
+            </a:r>
+          </a:p>
+          <a:p>
+            <a:r>
+              <a:t>proof_object_screen_position: none</a:t>
+            </a:r>
+          </a:p>
+          <a:p>
+            <a:r>
               <a:t>manual_placeholder_hidden: False</a:t>
             </a:r>
           </a:p>
@@ -5489,6 +6711,62 @@
           <a:p>
             <a:r>
               <a:t>  "prompt_if_ai_image": null</a:t>
+            </a:r>
+          </a:p>
+          <a:p>
+            <a:r>
+              <a:t>}</a:t>
+            </a:r>
+          </a:p>
+          <a:p/>
+          <a:p>
+            <a:r>
+              <a:t>proof_object:</a:t>
+            </a:r>
+          </a:p>
+          <a:p>
+            <a:r>
+              <a:t>{</a:t>
+            </a:r>
+          </a:p>
+          <a:p>
+            <a:r>
+              <a:t>  "type": "none",</a:t>
+            </a:r>
+          </a:p>
+          <a:p>
+            <a:r>
+              <a:t>  "required": false,</a:t>
+            </a:r>
+          </a:p>
+          <a:p>
+            <a:r>
+              <a:t>  "screen_position": "none",</a:t>
+            </a:r>
+          </a:p>
+          <a:p>
+            <a:r>
+              <a:t>  "display_label": "",</a:t>
+            </a:r>
+          </a:p>
+          <a:p>
+            <a:r>
+              <a:t>  "source_url": "https://www.bis.org/bcbs/basel3.htm",</a:t>
+            </a:r>
+          </a:p>
+          <a:p>
+            <a:r>
+              <a:t>  "image_url": null,</a:t>
+            </a:r>
+          </a:p>
+          <a:p>
+            <a:r>
+              <a:t>  "copyright_risk": false,</a:t>
+            </a:r>
+          </a:p>
+          <a:p>
+            <a:r>
+              <a:t>  "manual_insert_required": false</a:t>
             </a:r>
           </a:p>
           <a:p>
@@ -5640,6 +6918,21 @@
           </a:p>
           <a:p>
             <a:r>
+              <a:t>proof_object_type: diagram</a:t>
+            </a:r>
+          </a:p>
+          <a:p>
+            <a:r>
+              <a:t>proof_object_required: True</a:t>
+            </a:r>
+          </a:p>
+          <a:p>
+            <a:r>
+              <a:t>proof_object_screen_position: left_half</a:t>
+            </a:r>
+          </a:p>
+          <a:p>
+            <a:r>
               <a:t>manual_placeholder_hidden: False</a:t>
             </a:r>
           </a:p>
@@ -5775,6 +7068,62 @@
           <a:p>
             <a:r>
               <a:t>  "prompt_if_ai_image": null</a:t>
+            </a:r>
+          </a:p>
+          <a:p>
+            <a:r>
+              <a:t>}</a:t>
+            </a:r>
+          </a:p>
+          <a:p/>
+          <a:p>
+            <a:r>
+              <a:t>proof_object:</a:t>
+            </a:r>
+          </a:p>
+          <a:p>
+            <a:r>
+              <a:t>{</a:t>
+            </a:r>
+          </a:p>
+          <a:p>
+            <a:r>
+              <a:t>  "type": "diagram",</a:t>
+            </a:r>
+          </a:p>
+          <a:p>
+            <a:r>
+              <a:t>  "required": true,</a:t>
+            </a:r>
+          </a:p>
+          <a:p>
+            <a:r>
+              <a:t>  "screen_position": "left_half",</a:t>
+            </a:r>
+          </a:p>
+          <a:p>
+            <a:r>
+              <a:t>  "display_label": "[도식]",</a:t>
+            </a:r>
+          </a:p>
+          <a:p>
+            <a:r>
+              <a:t>  "source_url": "https://www.korea.kr/news/policyNewsView.do?newsId=148961201&amp;pWise=main&amp;pWiseMain=A4",</a:t>
+            </a:r>
+          </a:p>
+          <a:p>
+            <a:r>
+              <a:t>  "image_url": null,</a:t>
+            </a:r>
+          </a:p>
+          <a:p>
+            <a:r>
+              <a:t>  "copyright_risk": false,</a:t>
+            </a:r>
+          </a:p>
+          <a:p>
+            <a:r>
+              <a:t>  "manual_insert_required": true</a:t>
             </a:r>
           </a:p>
           <a:p>
@@ -5931,6 +7280,21 @@
           </a:p>
           <a:p>
             <a:r>
+              <a:t>proof_object_type: diagram</a:t>
+            </a:r>
+          </a:p>
+          <a:p>
+            <a:r>
+              <a:t>proof_object_required: True</a:t>
+            </a:r>
+          </a:p>
+          <a:p>
+            <a:r>
+              <a:t>proof_object_screen_position: left_half</a:t>
+            </a:r>
+          </a:p>
+          <a:p>
+            <a:r>
               <a:t>manual_placeholder_hidden: False</a:t>
             </a:r>
           </a:p>
@@ -6051,6 +7415,62 @@
           <a:p>
             <a:r>
               <a:t>  "prompt_if_ai_image": null</a:t>
+            </a:r>
+          </a:p>
+          <a:p>
+            <a:r>
+              <a:t>}</a:t>
+            </a:r>
+          </a:p>
+          <a:p/>
+          <a:p>
+            <a:r>
+              <a:t>proof_object:</a:t>
+            </a:r>
+          </a:p>
+          <a:p>
+            <a:r>
+              <a:t>{</a:t>
+            </a:r>
+          </a:p>
+          <a:p>
+            <a:r>
+              <a:t>  "type": "diagram",</a:t>
+            </a:r>
+          </a:p>
+          <a:p>
+            <a:r>
+              <a:t>  "required": true,</a:t>
+            </a:r>
+          </a:p>
+          <a:p>
+            <a:r>
+              <a:t>  "screen_position": "left_half",</a:t>
+            </a:r>
+          </a:p>
+          <a:p>
+            <a:r>
+              <a:t>  "display_label": "[도식]",</a:t>
+            </a:r>
+          </a:p>
+          <a:p>
+            <a:r>
+              <a:t>  "source_url": null,</a:t>
+            </a:r>
+          </a:p>
+          <a:p>
+            <a:r>
+              <a:t>  "image_url": null,</a:t>
+            </a:r>
+          </a:p>
+          <a:p>
+            <a:r>
+              <a:t>  "copyright_risk": false,</a:t>
+            </a:r>
+          </a:p>
+          <a:p>
+            <a:r>
+              <a:t>  "manual_insert_required": true</a:t>
             </a:r>
           </a:p>
           <a:p>
@@ -6187,6 +7607,21 @@
           </a:p>
           <a:p>
             <a:r>
+              <a:t>proof_object_type: none</a:t>
+            </a:r>
+          </a:p>
+          <a:p>
+            <a:r>
+              <a:t>proof_object_required: False</a:t>
+            </a:r>
+          </a:p>
+          <a:p>
+            <a:r>
+              <a:t>proof_object_screen_position: none</a:t>
+            </a:r>
+          </a:p>
+          <a:p>
+            <a:r>
               <a:t>manual_placeholder_hidden: False</a:t>
             </a:r>
           </a:p>
@@ -6287,6 +7722,62 @@
           <a:p>
             <a:r>
               <a:t>  "prompt_if_ai_image": null</a:t>
+            </a:r>
+          </a:p>
+          <a:p>
+            <a:r>
+              <a:t>}</a:t>
+            </a:r>
+          </a:p>
+          <a:p/>
+          <a:p>
+            <a:r>
+              <a:t>proof_object:</a:t>
+            </a:r>
+          </a:p>
+          <a:p>
+            <a:r>
+              <a:t>{</a:t>
+            </a:r>
+          </a:p>
+          <a:p>
+            <a:r>
+              <a:t>  "type": "none",</a:t>
+            </a:r>
+          </a:p>
+          <a:p>
+            <a:r>
+              <a:t>  "required": false,</a:t>
+            </a:r>
+          </a:p>
+          <a:p>
+            <a:r>
+              <a:t>  "screen_position": "none",</a:t>
+            </a:r>
+          </a:p>
+          <a:p>
+            <a:r>
+              <a:t>  "display_label": "",</a:t>
+            </a:r>
+          </a:p>
+          <a:p>
+            <a:r>
+              <a:t>  "source_url": null,</a:t>
+            </a:r>
+          </a:p>
+          <a:p>
+            <a:r>
+              <a:t>  "image_url": null,</a:t>
+            </a:r>
+          </a:p>
+          <a:p>
+            <a:r>
+              <a:t>  "copyright_risk": false,</a:t>
+            </a:r>
+          </a:p>
+          <a:p>
+            <a:r>
+              <a:t>  "manual_insert_required": false</a:t>
             </a:r>
           </a:p>
           <a:p>
@@ -6423,6 +7914,21 @@
           </a:p>
           <a:p>
             <a:r>
+              <a:t>proof_object_type: none</a:t>
+            </a:r>
+          </a:p>
+          <a:p>
+            <a:r>
+              <a:t>proof_object_required: False</a:t>
+            </a:r>
+          </a:p>
+          <a:p>
+            <a:r>
+              <a:t>proof_object_screen_position: none</a:t>
+            </a:r>
+          </a:p>
+          <a:p>
+            <a:r>
               <a:t>manual_placeholder_hidden: False</a:t>
             </a:r>
           </a:p>
@@ -6553,6 +8059,62 @@
           <a:p>
             <a:r>
               <a:t>  "prompt_if_ai_image": null</a:t>
+            </a:r>
+          </a:p>
+          <a:p>
+            <a:r>
+              <a:t>}</a:t>
+            </a:r>
+          </a:p>
+          <a:p/>
+          <a:p>
+            <a:r>
+              <a:t>proof_object:</a:t>
+            </a:r>
+          </a:p>
+          <a:p>
+            <a:r>
+              <a:t>{</a:t>
+            </a:r>
+          </a:p>
+          <a:p>
+            <a:r>
+              <a:t>  "type": "none",</a:t>
+            </a:r>
+          </a:p>
+          <a:p>
+            <a:r>
+              <a:t>  "required": false,</a:t>
+            </a:r>
+          </a:p>
+          <a:p>
+            <a:r>
+              <a:t>  "screen_position": "none",</a:t>
+            </a:r>
+          </a:p>
+          <a:p>
+            <a:r>
+              <a:t>  "display_label": "",</a:t>
+            </a:r>
+          </a:p>
+          <a:p>
+            <a:r>
+              <a:t>  "source_url": "https://www.korea.kr/news/policyNewsView.do?newsId=148961201&amp;pWise=main&amp;pWiseMain=A4",</a:t>
+            </a:r>
+          </a:p>
+          <a:p>
+            <a:r>
+              <a:t>  "image_url": null,</a:t>
+            </a:r>
+          </a:p>
+          <a:p>
+            <a:r>
+              <a:t>  "copyright_risk": false,</a:t>
+            </a:r>
+          </a:p>
+          <a:p>
+            <a:r>
+              <a:t>  "manual_insert_required": false</a:t>
             </a:r>
           </a:p>
           <a:p>
@@ -6704,6 +8266,21 @@
           </a:p>
           <a:p>
             <a:r>
+              <a:t>proof_object_type: chart</a:t>
+            </a:r>
+          </a:p>
+          <a:p>
+            <a:r>
+              <a:t>proof_object_required: True</a:t>
+            </a:r>
+          </a:p>
+          <a:p>
+            <a:r>
+              <a:t>proof_object_screen_position: full_width_chart</a:t>
+            </a:r>
+          </a:p>
+          <a:p>
+            <a:r>
               <a:t>manual_placeholder_hidden: False</a:t>
             </a:r>
           </a:p>
@@ -6834,6 +8411,62 @@
           <a:p>
             <a:r>
               <a:t>  "prompt_if_ai_image": null</a:t>
+            </a:r>
+          </a:p>
+          <a:p>
+            <a:r>
+              <a:t>}</a:t>
+            </a:r>
+          </a:p>
+          <a:p/>
+          <a:p>
+            <a:r>
+              <a:t>proof_object:</a:t>
+            </a:r>
+          </a:p>
+          <a:p>
+            <a:r>
+              <a:t>{</a:t>
+            </a:r>
+          </a:p>
+          <a:p>
+            <a:r>
+              <a:t>  "type": "chart",</a:t>
+            </a:r>
+          </a:p>
+          <a:p>
+            <a:r>
+              <a:t>  "required": true,</a:t>
+            </a:r>
+          </a:p>
+          <a:p>
+            <a:r>
+              <a:t>  "screen_position": "full_width_chart",</a:t>
+            </a:r>
+          </a:p>
+          <a:p>
+            <a:r>
+              <a:t>  "display_label": "[차트]",</a:t>
+            </a:r>
+          </a:p>
+          <a:p>
+            <a:r>
+              <a:t>  "source_url": "https://www.korea.kr/news/policyNewsView.do?newsId=148961201&amp;pWise=main&amp;pWiseMain=A4",</a:t>
+            </a:r>
+          </a:p>
+          <a:p>
+            <a:r>
+              <a:t>  "image_url": null,</a:t>
+            </a:r>
+          </a:p>
+          <a:p>
+            <a:r>
+              <a:t>  "copyright_risk": false,</a:t>
+            </a:r>
+          </a:p>
+          <a:p>
+            <a:r>
+              <a:t>  "manual_insert_required": true</a:t>
             </a:r>
           </a:p>
           <a:p>
@@ -6985,6 +8618,21 @@
           </a:p>
           <a:p>
             <a:r>
+              <a:t>proof_object_type: diagram</a:t>
+            </a:r>
+          </a:p>
+          <a:p>
+            <a:r>
+              <a:t>proof_object_required: True</a:t>
+            </a:r>
+          </a:p>
+          <a:p>
+            <a:r>
+              <a:t>proof_object_screen_position: left_half</a:t>
+            </a:r>
+          </a:p>
+          <a:p>
+            <a:r>
               <a:t>manual_placeholder_hidden: False</a:t>
             </a:r>
           </a:p>
@@ -7115,6 +8763,62 @@
           <a:p>
             <a:r>
               <a:t>  "prompt_if_ai_image": null</a:t>
+            </a:r>
+          </a:p>
+          <a:p>
+            <a:r>
+              <a:t>}</a:t>
+            </a:r>
+          </a:p>
+          <a:p/>
+          <a:p>
+            <a:r>
+              <a:t>proof_object:</a:t>
+            </a:r>
+          </a:p>
+          <a:p>
+            <a:r>
+              <a:t>{</a:t>
+            </a:r>
+          </a:p>
+          <a:p>
+            <a:r>
+              <a:t>  "type": "diagram",</a:t>
+            </a:r>
+          </a:p>
+          <a:p>
+            <a:r>
+              <a:t>  "required": true,</a:t>
+            </a:r>
+          </a:p>
+          <a:p>
+            <a:r>
+              <a:t>  "screen_position": "left_half",</a:t>
+            </a:r>
+          </a:p>
+          <a:p>
+            <a:r>
+              <a:t>  "display_label": "[도식]",</a:t>
+            </a:r>
+          </a:p>
+          <a:p>
+            <a:r>
+              <a:t>  "source_url": "https://www.bis.org/bcbs/basel3.htm",</a:t>
+            </a:r>
+          </a:p>
+          <a:p>
+            <a:r>
+              <a:t>  "image_url": null,</a:t>
+            </a:r>
+          </a:p>
+          <a:p>
+            <a:r>
+              <a:t>  "copyright_risk": false,</a:t>
+            </a:r>
+          </a:p>
+          <a:p>
+            <a:r>
+              <a:t>  "manual_insert_required": true</a:t>
             </a:r>
           </a:p>
           <a:p>
@@ -11052,61 +12756,7 @@
       </p:sp>
       <p:sp>
         <p:nvSpPr>
-          <p:cNvPr id="4" name="Rectangle 3"/>
-          <p:cNvSpPr/>
-          <p:nvPr/>
-        </p:nvSpPr>
-        <p:spPr>
-          <a:xfrm>
-            <a:off x="8458200" y="4389120"/>
-            <a:ext cx="2560320" cy="1097280"/>
-          </a:xfrm>
-          <a:prstGeom prst="rect">
-            <a:avLst/>
-          </a:prstGeom>
-          <a:solidFill>
-            <a:srgbClr val="EBF1F4"/>
-          </a:solidFill>
-          <a:ln w="12700">
-            <a:solidFill>
-              <a:srgbClr val="A0AEB8"/>
-            </a:solidFill>
-          </a:ln>
-        </p:spPr>
-        <p:style>
-          <a:lnRef idx="1">
-            <a:schemeClr val="accent1"/>
-          </a:lnRef>
-          <a:fillRef idx="3">
-            <a:schemeClr val="accent1"/>
-          </a:fillRef>
-          <a:effectRef idx="2">
-            <a:schemeClr val="accent1"/>
-          </a:effectRef>
-          <a:fontRef idx="minor">
-            <a:schemeClr val="lt1"/>
-          </a:fontRef>
-        </p:style>
-        <p:txBody>
-          <a:bodyPr rtlCol="0" anchor="ctr" wrap="square"/>
-          <a:lstStyle/>
-          <a:p>
-            <a:pPr algn="ctr"/>
-            <a:r>
-              <a:rPr sz="1600">
-                <a:solidFill>
-                  <a:srgbClr val="566070"/>
-                </a:solidFill>
-                <a:latin typeface="Malgun Gothic"/>
-              </a:rPr>
-              <a:t>[수동 삽입]</a:t>
-            </a:r>
-          </a:p>
-        </p:txBody>
-      </p:sp>
-      <p:sp>
-        <p:nvSpPr>
-          <p:cNvPr id="5" name="TextBox 4"/>
+          <p:cNvPr id="4" name="TextBox 3"/>
           <p:cNvSpPr txBox="1"/>
           <p:nvPr/>
         </p:nvSpPr>
@@ -11140,7 +12790,7 @@
       </p:sp>
       <p:sp>
         <p:nvSpPr>
-          <p:cNvPr id="6" name="TextBox 5"/>
+          <p:cNvPr id="5" name="TextBox 4"/>
           <p:cNvSpPr txBox="1"/>
           <p:nvPr/>
         </p:nvSpPr>
@@ -11306,61 +12956,7 @@
       </p:sp>
       <p:sp>
         <p:nvSpPr>
-          <p:cNvPr id="4" name="Rectangle 3"/>
-          <p:cNvSpPr/>
-          <p:nvPr/>
-        </p:nvSpPr>
-        <p:spPr>
-          <a:xfrm>
-            <a:off x="7818120" y="1417320"/>
-            <a:ext cx="3703320" cy="4251960"/>
-          </a:xfrm>
-          <a:prstGeom prst="rect">
-            <a:avLst/>
-          </a:prstGeom>
-          <a:solidFill>
-            <a:srgbClr val="EBF1F4"/>
-          </a:solidFill>
-          <a:ln w="12700">
-            <a:solidFill>
-              <a:srgbClr val="A0AEB8"/>
-            </a:solidFill>
-          </a:ln>
-        </p:spPr>
-        <p:style>
-          <a:lnRef idx="1">
-            <a:schemeClr val="accent1"/>
-          </a:lnRef>
-          <a:fillRef idx="3">
-            <a:schemeClr val="accent1"/>
-          </a:fillRef>
-          <a:effectRef idx="2">
-            <a:schemeClr val="accent1"/>
-          </a:effectRef>
-          <a:fontRef idx="minor">
-            <a:schemeClr val="lt1"/>
-          </a:fontRef>
-        </p:style>
-        <p:txBody>
-          <a:bodyPr rtlCol="0" anchor="ctr" wrap="square"/>
-          <a:lstStyle/>
-          <a:p>
-            <a:pPr algn="ctr"/>
-            <a:r>
-              <a:rPr sz="1600">
-                <a:solidFill>
-                  <a:srgbClr val="566070"/>
-                </a:solidFill>
-                <a:latin typeface="Malgun Gothic"/>
-              </a:rPr>
-              <a:t>[수동 삽입]</a:t>
-            </a:r>
-          </a:p>
-        </p:txBody>
-      </p:sp>
-      <p:sp>
-        <p:nvSpPr>
-          <p:cNvPr id="5" name="TextBox 4"/>
+          <p:cNvPr id="4" name="TextBox 3"/>
           <p:cNvSpPr txBox="1"/>
           <p:nvPr/>
         </p:nvSpPr>
@@ -11394,7 +12990,7 @@
       </p:sp>
       <p:sp>
         <p:nvSpPr>
-          <p:cNvPr id="6" name="TextBox 5"/>
+          <p:cNvPr id="5" name="TextBox 4"/>
           <p:cNvSpPr txBox="1"/>
           <p:nvPr/>
         </p:nvSpPr>
@@ -12827,61 +14423,7 @@
       </p:sp>
       <p:sp>
         <p:nvSpPr>
-          <p:cNvPr id="4" name="Rectangle 3"/>
-          <p:cNvSpPr/>
-          <p:nvPr/>
-        </p:nvSpPr>
-        <p:spPr>
-          <a:xfrm>
-            <a:off x="8458200" y="4389120"/>
-            <a:ext cx="2560320" cy="1097280"/>
-          </a:xfrm>
-          <a:prstGeom prst="rect">
-            <a:avLst/>
-          </a:prstGeom>
-          <a:solidFill>
-            <a:srgbClr val="EBF1F4"/>
-          </a:solidFill>
-          <a:ln w="12700">
-            <a:solidFill>
-              <a:srgbClr val="A0AEB8"/>
-            </a:solidFill>
-          </a:ln>
-        </p:spPr>
-        <p:style>
-          <a:lnRef idx="1">
-            <a:schemeClr val="accent1"/>
-          </a:lnRef>
-          <a:fillRef idx="3">
-            <a:schemeClr val="accent1"/>
-          </a:fillRef>
-          <a:effectRef idx="2">
-            <a:schemeClr val="accent1"/>
-          </a:effectRef>
-          <a:fontRef idx="minor">
-            <a:schemeClr val="lt1"/>
-          </a:fontRef>
-        </p:style>
-        <p:txBody>
-          <a:bodyPr rtlCol="0" anchor="ctr" wrap="square"/>
-          <a:lstStyle/>
-          <a:p>
-            <a:pPr algn="ctr"/>
-            <a:r>
-              <a:rPr sz="1600">
-                <a:solidFill>
-                  <a:srgbClr val="566070"/>
-                </a:solidFill>
-                <a:latin typeface="Malgun Gothic"/>
-              </a:rPr>
-              <a:t>[수동 삽입]</a:t>
-            </a:r>
-          </a:p>
-        </p:txBody>
-      </p:sp>
-      <p:sp>
-        <p:nvSpPr>
-          <p:cNvPr id="5" name="TextBox 4"/>
+          <p:cNvPr id="4" name="TextBox 3"/>
           <p:cNvSpPr txBox="1"/>
           <p:nvPr/>
         </p:nvSpPr>
@@ -12915,7 +14457,7 @@
       </p:sp>
       <p:sp>
         <p:nvSpPr>
-          <p:cNvPr id="6" name="TextBox 5"/>
+          <p:cNvPr id="5" name="TextBox 4"/>
           <p:cNvSpPr txBox="1"/>
           <p:nvPr/>
         </p:nvSpPr>
@@ -13081,61 +14623,7 @@
       </p:sp>
       <p:sp>
         <p:nvSpPr>
-          <p:cNvPr id="4" name="Rectangle 3"/>
-          <p:cNvSpPr/>
-          <p:nvPr/>
-        </p:nvSpPr>
-        <p:spPr>
-          <a:xfrm>
-            <a:off x="7818120" y="1417320"/>
-            <a:ext cx="3703320" cy="4251960"/>
-          </a:xfrm>
-          <a:prstGeom prst="rect">
-            <a:avLst/>
-          </a:prstGeom>
-          <a:solidFill>
-            <a:srgbClr val="EBF1F4"/>
-          </a:solidFill>
-          <a:ln w="12700">
-            <a:solidFill>
-              <a:srgbClr val="A0AEB8"/>
-            </a:solidFill>
-          </a:ln>
-        </p:spPr>
-        <p:style>
-          <a:lnRef idx="1">
-            <a:schemeClr val="accent1"/>
-          </a:lnRef>
-          <a:fillRef idx="3">
-            <a:schemeClr val="accent1"/>
-          </a:fillRef>
-          <a:effectRef idx="2">
-            <a:schemeClr val="accent1"/>
-          </a:effectRef>
-          <a:fontRef idx="minor">
-            <a:schemeClr val="lt1"/>
-          </a:fontRef>
-        </p:style>
-        <p:txBody>
-          <a:bodyPr rtlCol="0" anchor="ctr" wrap="square"/>
-          <a:lstStyle/>
-          <a:p>
-            <a:pPr algn="ctr"/>
-            <a:r>
-              <a:rPr sz="1600">
-                <a:solidFill>
-                  <a:srgbClr val="566070"/>
-                </a:solidFill>
-                <a:latin typeface="Malgun Gothic"/>
-              </a:rPr>
-              <a:t>[수동 삽입]</a:t>
-            </a:r>
-          </a:p>
-        </p:txBody>
-      </p:sp>
-      <p:sp>
-        <p:nvSpPr>
-          <p:cNvPr id="5" name="TextBox 4"/>
+          <p:cNvPr id="4" name="TextBox 3"/>
           <p:cNvSpPr txBox="1"/>
           <p:nvPr/>
         </p:nvSpPr>
@@ -13169,7 +14657,7 @@
       </p:sp>
       <p:sp>
         <p:nvSpPr>
-          <p:cNvPr id="6" name="TextBox 5"/>
+          <p:cNvPr id="5" name="TextBox 4"/>
           <p:cNvSpPr txBox="1"/>
           <p:nvPr/>
         </p:nvSpPr>
@@ -14232,61 +15720,7 @@
       </p:sp>
       <p:sp>
         <p:nvSpPr>
-          <p:cNvPr id="4" name="Rectangle 3"/>
-          <p:cNvSpPr/>
-          <p:nvPr/>
-        </p:nvSpPr>
-        <p:spPr>
-          <a:xfrm>
-            <a:off x="7818120" y="1417320"/>
-            <a:ext cx="3703320" cy="4251960"/>
-          </a:xfrm>
-          <a:prstGeom prst="rect">
-            <a:avLst/>
-          </a:prstGeom>
-          <a:solidFill>
-            <a:srgbClr val="EBF1F4"/>
-          </a:solidFill>
-          <a:ln w="12700">
-            <a:solidFill>
-              <a:srgbClr val="A0AEB8"/>
-            </a:solidFill>
-          </a:ln>
-        </p:spPr>
-        <p:style>
-          <a:lnRef idx="1">
-            <a:schemeClr val="accent1"/>
-          </a:lnRef>
-          <a:fillRef idx="3">
-            <a:schemeClr val="accent1"/>
-          </a:fillRef>
-          <a:effectRef idx="2">
-            <a:schemeClr val="accent1"/>
-          </a:effectRef>
-          <a:fontRef idx="minor">
-            <a:schemeClr val="lt1"/>
-          </a:fontRef>
-        </p:style>
-        <p:txBody>
-          <a:bodyPr rtlCol="0" anchor="ctr" wrap="square"/>
-          <a:lstStyle/>
-          <a:p>
-            <a:pPr algn="ctr"/>
-            <a:r>
-              <a:rPr sz="1600">
-                <a:solidFill>
-                  <a:srgbClr val="566070"/>
-                </a:solidFill>
-                <a:latin typeface="Malgun Gothic"/>
-              </a:rPr>
-              <a:t>[수동 삽입]</a:t>
-            </a:r>
-          </a:p>
-        </p:txBody>
-      </p:sp>
-      <p:sp>
-        <p:nvSpPr>
-          <p:cNvPr id="5" name="TextBox 4"/>
+          <p:cNvPr id="4" name="TextBox 3"/>
           <p:cNvSpPr txBox="1"/>
           <p:nvPr/>
         </p:nvSpPr>
@@ -14320,7 +15754,7 @@
       </p:sp>
       <p:sp>
         <p:nvSpPr>
-          <p:cNvPr id="6" name="TextBox 5"/>
+          <p:cNvPr id="5" name="TextBox 4"/>
           <p:cNvSpPr txBox="1"/>
           <p:nvPr/>
         </p:nvSpPr>
@@ -15082,61 +16516,7 @@
       </p:sp>
       <p:sp>
         <p:nvSpPr>
-          <p:cNvPr id="4" name="Rectangle 3"/>
-          <p:cNvSpPr/>
-          <p:nvPr/>
-        </p:nvSpPr>
-        <p:spPr>
-          <a:xfrm>
-            <a:off x="7818120" y="1417320"/>
-            <a:ext cx="3703320" cy="4251960"/>
-          </a:xfrm>
-          <a:prstGeom prst="rect">
-            <a:avLst/>
-          </a:prstGeom>
-          <a:solidFill>
-            <a:srgbClr val="EBF1F4"/>
-          </a:solidFill>
-          <a:ln w="12700">
-            <a:solidFill>
-              <a:srgbClr val="A0AEB8"/>
-            </a:solidFill>
-          </a:ln>
-        </p:spPr>
-        <p:style>
-          <a:lnRef idx="1">
-            <a:schemeClr val="accent1"/>
-          </a:lnRef>
-          <a:fillRef idx="3">
-            <a:schemeClr val="accent1"/>
-          </a:fillRef>
-          <a:effectRef idx="2">
-            <a:schemeClr val="accent1"/>
-          </a:effectRef>
-          <a:fontRef idx="minor">
-            <a:schemeClr val="lt1"/>
-          </a:fontRef>
-        </p:style>
-        <p:txBody>
-          <a:bodyPr rtlCol="0" anchor="ctr" wrap="square"/>
-          <a:lstStyle/>
-          <a:p>
-            <a:pPr algn="ctr"/>
-            <a:r>
-              <a:rPr sz="1600">
-                <a:solidFill>
-                  <a:srgbClr val="566070"/>
-                </a:solidFill>
-                <a:latin typeface="Malgun Gothic"/>
-              </a:rPr>
-              <a:t>[수동 삽입]</a:t>
-            </a:r>
-          </a:p>
-        </p:txBody>
-      </p:sp>
-      <p:sp>
-        <p:nvSpPr>
-          <p:cNvPr id="5" name="TextBox 4"/>
+          <p:cNvPr id="4" name="TextBox 3"/>
           <p:cNvSpPr txBox="1"/>
           <p:nvPr/>
         </p:nvSpPr>
@@ -15170,7 +16550,7 @@
       </p:sp>
       <p:sp>
         <p:nvSpPr>
-          <p:cNvPr id="6" name="TextBox 5"/>
+          <p:cNvPr id="5" name="TextBox 4"/>
           <p:cNvSpPr txBox="1"/>
           <p:nvPr/>
         </p:nvSpPr>
@@ -15312,7 +16692,7 @@
                 </a:solidFill>
                 <a:latin typeface="Malgun Gothic"/>
               </a:rPr>
-              <a:t>[차트 후보]</a:t>
+              <a:t>[차트]</a:t>
             </a:r>
           </a:p>
         </p:txBody>

--- a/outputs/pptx/productive_finance_policy_draft.pptx
+++ b/outputs/pptx/productive_finance_policy_draft.pptx
@@ -928,7 +928,22 @@
           </a:p>
           <a:p>
             <a:r>
-              <a:t>  "하지만 정책자금이 늘 좋은 결과를 만든다고 단정할 수는 없다.",</a:t>
+              <a:t>  "하지만 정책자금이 늘 좋은 결과를 만든다고 단정할 수는 없다."</a:t>
+            </a:r>
+          </a:p>
+          <a:p>
+            <a:r>
+              <a:t>]</a:t>
+            </a:r>
+          </a:p>
+          <a:p>
+            <a:r>
+              <a:t>overflow_body_lines:</a:t>
+            </a:r>
+          </a:p>
+          <a:p>
+            <a:r>
+              <a:t>[</a:t>
             </a:r>
           </a:p>
           <a:p>
@@ -939,16 +954,6 @@
           <a:p>
             <a:r>
               <a:t>]</a:t>
-            </a:r>
-          </a:p>
-          <a:p>
-            <a:r>
-              <a:t>overflow_body_lines:</a:t>
-            </a:r>
-          </a:p>
-          <a:p>
-            <a:r>
-              <a:t>[]</a:t>
             </a:r>
           </a:p>
           <a:p/>
@@ -1280,12 +1285,7 @@
           </a:p>
           <a:p>
             <a:r>
-              <a:t>  "기업은 긴 투자금을 원한다.",</a:t>
-            </a:r>
-          </a:p>
-          <a:p>
-            <a:r>
-              <a:t>  "국가는 전략산업을 키우고 싶다."</a:t>
+              <a:t>  "기업은 긴 투자금을 원한다."</a:t>
             </a:r>
           </a:p>
           <a:p>
@@ -1301,6 +1301,11 @@
           <a:p>
             <a:r>
               <a:t>[</a:t>
+            </a:r>
+          </a:p>
+          <a:p>
+            <a:r>
+              <a:t>  "국가는 전략산업을 키우고 싶다.",</a:t>
             </a:r>
           </a:p>
           <a:p>
@@ -1898,17 +1903,17 @@
           </a:p>
           <a:p>
             <a:r>
-              <a:t>proof_object_type: none</a:t>
-            </a:r>
-          </a:p>
-          <a:p>
-            <a:r>
-              <a:t>proof_object_required: False</a:t>
-            </a:r>
-          </a:p>
-          <a:p>
-            <a:r>
-              <a:t>proof_object_screen_position: none</a:t>
+              <a:t>proof_object_type: article_quote</a:t>
+            </a:r>
+          </a:p>
+          <a:p>
+            <a:r>
+              <a:t>proof_object_required: True</a:t>
+            </a:r>
+          </a:p>
+          <a:p>
+            <a:r>
+              <a:t>proof_object_screen_position: left_half</a:t>
             </a:r>
           </a:p>
           <a:p>
@@ -1934,7 +1939,22 @@
           </a:p>
           <a:p>
             <a:r>
-              <a:t>  "국민참여형 펀드는 일반 국민 자금도 일부 모아 자펀드에 투자하는 구조로 설계됐다.",</a:t>
+              <a:t>  "국민참여형 펀드는 일반 국민 자금도 일부 모아 자펀드에 투자하는 구조로 설계됐다."</a:t>
+            </a:r>
+          </a:p>
+          <a:p>
+            <a:r>
+              <a:t>]</a:t>
+            </a:r>
+          </a:p>
+          <a:p>
+            <a:r>
+              <a:t>overflow_body_lines:</a:t>
+            </a:r>
+          </a:p>
+          <a:p>
+            <a:r>
+              <a:t>[</a:t>
             </a:r>
           </a:p>
           <a:p>
@@ -1947,16 +1967,6 @@
               <a:t>]</a:t>
             </a:r>
           </a:p>
-          <a:p>
-            <a:r>
-              <a:t>overflow_body_lines:</a:t>
-            </a:r>
-          </a:p>
-          <a:p>
-            <a:r>
-              <a:t>[]</a:t>
-            </a:r>
-          </a:p>
           <a:p/>
           <a:p>
             <a:r>
@@ -2068,22 +2078,22 @@
           </a:p>
           <a:p>
             <a:r>
-              <a:t>  "type": "none",</a:t>
-            </a:r>
-          </a:p>
-          <a:p>
-            <a:r>
-              <a:t>  "required": false,</a:t>
-            </a:r>
-          </a:p>
-          <a:p>
-            <a:r>
-              <a:t>  "screen_position": "none",</a:t>
-            </a:r>
-          </a:p>
-          <a:p>
-            <a:r>
-              <a:t>  "display_label": "",</a:t>
+              <a:t>  "type": "article_quote",</a:t>
+            </a:r>
+          </a:p>
+          <a:p>
+            <a:r>
+              <a:t>  "required": true,</a:t>
+            </a:r>
+          </a:p>
+          <a:p>
+            <a:r>
+              <a:t>  "screen_position": "left_half",</a:t>
+            </a:r>
+          </a:p>
+          <a:p>
+            <a:r>
+              <a:t>  "display_label": "[기사 인용]",</a:t>
             </a:r>
           </a:p>
           <a:p>
@@ -2103,7 +2113,7 @@
           </a:p>
           <a:p>
             <a:r>
-              <a:t>  "manual_insert_required": false</a:t>
+              <a:t>  "manual_insert_required": true</a:t>
             </a:r>
           </a:p>
           <a:p>
@@ -2260,17 +2270,17 @@
           </a:p>
           <a:p>
             <a:r>
-              <a:t>proof_object_type: none</a:t>
-            </a:r>
-          </a:p>
-          <a:p>
-            <a:r>
-              <a:t>proof_object_required: False</a:t>
-            </a:r>
-          </a:p>
-          <a:p>
-            <a:r>
-              <a:t>proof_object_screen_position: none</a:t>
+              <a:t>proof_object_type: article_quote</a:t>
+            </a:r>
+          </a:p>
+          <a:p>
+            <a:r>
+              <a:t>proof_object_required: True</a:t>
+            </a:r>
+          </a:p>
+          <a:p>
+            <a:r>
+              <a:t>proof_object_screen_position: left_half</a:t>
             </a:r>
           </a:p>
           <a:p>
@@ -2296,7 +2306,22 @@
           </a:p>
           <a:p>
             <a:r>
-              <a:t>  "이 장치는 투자자의 위험을 낮추려는 설계지만, 원금 손실 가능성이 사라진다는 뜻은 아니다.",</a:t>
+              <a:t>  "이 장치는 투자자의 위험을 낮추려는 설계지만, 원금 손실 가능성이 사라진다는 뜻은 아니다."</a:t>
+            </a:r>
+          </a:p>
+          <a:p>
+            <a:r>
+              <a:t>]</a:t>
+            </a:r>
+          </a:p>
+          <a:p>
+            <a:r>
+              <a:t>overflow_body_lines:</a:t>
+            </a:r>
+          </a:p>
+          <a:p>
+            <a:r>
+              <a:t>[</a:t>
             </a:r>
           </a:p>
           <a:p>
@@ -2309,16 +2334,6 @@
               <a:t>]</a:t>
             </a:r>
           </a:p>
-          <a:p>
-            <a:r>
-              <a:t>overflow_body_lines:</a:t>
-            </a:r>
-          </a:p>
-          <a:p>
-            <a:r>
-              <a:t>[]</a:t>
-            </a:r>
-          </a:p>
           <a:p/>
           <a:p>
             <a:r>
@@ -2425,22 +2440,22 @@
           </a:p>
           <a:p>
             <a:r>
-              <a:t>  "type": "none",</a:t>
-            </a:r>
-          </a:p>
-          <a:p>
-            <a:r>
-              <a:t>  "required": false,</a:t>
-            </a:r>
-          </a:p>
-          <a:p>
-            <a:r>
-              <a:t>  "screen_position": "none",</a:t>
-            </a:r>
-          </a:p>
-          <a:p>
-            <a:r>
-              <a:t>  "display_label": "",</a:t>
+              <a:t>  "type": "article_quote",</a:t>
+            </a:r>
+          </a:p>
+          <a:p>
+            <a:r>
+              <a:t>  "required": true,</a:t>
+            </a:r>
+          </a:p>
+          <a:p>
+            <a:r>
+              <a:t>  "screen_position": "left_half",</a:t>
+            </a:r>
+          </a:p>
+          <a:p>
+            <a:r>
+              <a:t>  "display_label": "[기사 인용]",</a:t>
             </a:r>
           </a:p>
           <a:p>
@@ -2460,7 +2475,7 @@
           </a:p>
           <a:p>
             <a:r>
-              <a:t>  "manual_insert_required": false</a:t>
+              <a:t>  "manual_insert_required": true</a:t>
             </a:r>
           </a:p>
           <a:p>
@@ -3010,7 +3025,22 @@
           </a:p>
           <a:p>
             <a:r>
-              <a:t>  "하지만 방송에서는 이것이 특정 기업 성공 보장이나 특정 상품 추천처럼 들리면 안 된다.",</a:t>
+              <a:t>  "하지만 방송에서는 이것이 특정 기업 성공 보장이나 특정 상품 추천처럼 들리면 안 된다."</a:t>
+            </a:r>
+          </a:p>
+          <a:p>
+            <a:r>
+              <a:t>]</a:t>
+            </a:r>
+          </a:p>
+          <a:p>
+            <a:r>
+              <a:t>overflow_body_lines:</a:t>
+            </a:r>
+          </a:p>
+          <a:p>
+            <a:r>
+              <a:t>[</a:t>
             </a:r>
           </a:p>
           <a:p>
@@ -3021,16 +3051,6 @@
           <a:p>
             <a:r>
               <a:t>]</a:t>
-            </a:r>
-          </a:p>
-          <a:p>
-            <a:r>
-              <a:t>overflow_body_lines:</a:t>
-            </a:r>
-          </a:p>
-          <a:p>
-            <a:r>
-              <a:t>[]</a:t>
             </a:r>
           </a:p>
           <a:p/>
@@ -3372,7 +3392,22 @@
           </a:p>
           <a:p>
             <a:r>
-              <a:t>  "또 은행과 금융회사는 건전성 규제, 위험가중자산, 예금자 보호 논리 안에서 움직인다.",</a:t>
+              <a:t>  "또 은행과 금융회사는 건전성 규제, 위험가중자산, 예금자 보호 논리 안에서 움직인다."</a:t>
+            </a:r>
+          </a:p>
+          <a:p>
+            <a:r>
+              <a:t>]</a:t>
+            </a:r>
+          </a:p>
+          <a:p>
+            <a:r>
+              <a:t>overflow_body_lines:</a:t>
+            </a:r>
+          </a:p>
+          <a:p>
+            <a:r>
+              <a:t>[</a:t>
             </a:r>
           </a:p>
           <a:p>
@@ -3383,16 +3418,6 @@
           <a:p>
             <a:r>
               <a:t>]</a:t>
-            </a:r>
-          </a:p>
-          <a:p>
-            <a:r>
-              <a:t>overflow_body_lines:</a:t>
-            </a:r>
-          </a:p>
-          <a:p>
-            <a:r>
-              <a:t>[]</a:t>
             </a:r>
           </a:p>
           <a:p/>
@@ -3734,7 +3759,22 @@
           </a:p>
           <a:p>
             <a:r>
-              <a:t>  "하지만 위험도 함께 나눠야 한다면, 손실이 발생했을 때 재정·운용사·투자자·금융권의 책임선이 중요해진다.",</a:t>
+              <a:t>  "하지만 위험도 함께 나눠야 한다면, 손실이 발생했을 때 재정·운용사·투자자·금융권의 책임선이 중요해진다."</a:t>
+            </a:r>
+          </a:p>
+          <a:p>
+            <a:r>
+              <a:t>]</a:t>
+            </a:r>
+          </a:p>
+          <a:p>
+            <a:r>
+              <a:t>overflow_body_lines:</a:t>
+            </a:r>
+          </a:p>
+          <a:p>
+            <a:r>
+              <a:t>[</a:t>
             </a:r>
           </a:p>
           <a:p>
@@ -3745,16 +3785,6 @@
           <a:p>
             <a:r>
               <a:t>]</a:t>
-            </a:r>
-          </a:p>
-          <a:p>
-            <a:r>
-              <a:t>overflow_body_lines:</a:t>
-            </a:r>
-          </a:p>
-          <a:p>
-            <a:r>
-              <a:t>[]</a:t>
             </a:r>
           </a:p>
           <a:p/>
@@ -4367,17 +4397,17 @@
           </a:p>
           <a:p>
             <a:r>
-              <a:t>proof_object_type: none</a:t>
-            </a:r>
-          </a:p>
-          <a:p>
-            <a:r>
-              <a:t>proof_object_required: False</a:t>
-            </a:r>
-          </a:p>
-          <a:p>
-            <a:r>
-              <a:t>proof_object_screen_position: none</a:t>
+              <a:t>proof_object_type: article_quote</a:t>
+            </a:r>
+          </a:p>
+          <a:p>
+            <a:r>
+              <a:t>proof_object_required: True</a:t>
+            </a:r>
+          </a:p>
+          <a:p>
+            <a:r>
+              <a:t>proof_object_screen_position: left_half</a:t>
             </a:r>
           </a:p>
           <a:p>
@@ -4403,7 +4433,22 @@
           </a:p>
           <a:p>
             <a:r>
-              <a:t>  "금융위원회 공식자료는 국민성장펀드가 5년간 150조 원, 2026년 30조 원 규모로 첨단산업 생태계에 자금을 공급하는 틀이라고 설명한다.",</a:t>
+              <a:t>  "금융위원회 공식자료는 국민성장펀드가 5년간 150조 원, 2026년 30조 원 규모로 첨단산업 생태계에 자금을 공급하는 틀이라고 설명한다."</a:t>
+            </a:r>
+          </a:p>
+          <a:p>
+            <a:r>
+              <a:t>]</a:t>
+            </a:r>
+          </a:p>
+          <a:p>
+            <a:r>
+              <a:t>overflow_body_lines:</a:t>
+            </a:r>
+          </a:p>
+          <a:p>
+            <a:r>
+              <a:t>[</a:t>
             </a:r>
           </a:p>
           <a:p>
@@ -4416,16 +4461,6 @@
               <a:t>]</a:t>
             </a:r>
           </a:p>
-          <a:p>
-            <a:r>
-              <a:t>overflow_body_lines:</a:t>
-            </a:r>
-          </a:p>
-          <a:p>
-            <a:r>
-              <a:t>[]</a:t>
-            </a:r>
-          </a:p>
           <a:p/>
           <a:p>
             <a:r>
@@ -4532,22 +4567,22 @@
           </a:p>
           <a:p>
             <a:r>
-              <a:t>  "type": "none",</a:t>
-            </a:r>
-          </a:p>
-          <a:p>
-            <a:r>
-              <a:t>  "required": false,</a:t>
-            </a:r>
-          </a:p>
-          <a:p>
-            <a:r>
-              <a:t>  "screen_position": "none",</a:t>
-            </a:r>
-          </a:p>
-          <a:p>
-            <a:r>
-              <a:t>  "display_label": "",</a:t>
+              <a:t>  "type": "article_quote",</a:t>
+            </a:r>
+          </a:p>
+          <a:p>
+            <a:r>
+              <a:t>  "required": true,</a:t>
+            </a:r>
+          </a:p>
+          <a:p>
+            <a:r>
+              <a:t>  "screen_position": "left_half",</a:t>
+            </a:r>
+          </a:p>
+          <a:p>
+            <a:r>
+              <a:t>  "display_label": "[기사 인용]",</a:t>
             </a:r>
           </a:p>
           <a:p>
@@ -4567,7 +4602,7 @@
           </a:p>
           <a:p>
             <a:r>
-              <a:t>  "manual_insert_required": false</a:t>
+              <a:t>  "manual_insert_required": true</a:t>
             </a:r>
           </a:p>
           <a:p>
@@ -4719,17 +4754,17 @@
           </a:p>
           <a:p>
             <a:r>
-              <a:t>proof_object_type: none</a:t>
-            </a:r>
-          </a:p>
-          <a:p>
-            <a:r>
-              <a:t>proof_object_required: False</a:t>
-            </a:r>
-          </a:p>
-          <a:p>
-            <a:r>
-              <a:t>proof_object_screen_position: none</a:t>
+              <a:t>proof_object_type: article_quote</a:t>
+            </a:r>
+          </a:p>
+          <a:p>
+            <a:r>
+              <a:t>proof_object_required: True</a:t>
+            </a:r>
+          </a:p>
+          <a:p>
+            <a:r>
+              <a:t>proof_object_screen_position: left_half</a:t>
             </a:r>
           </a:p>
           <a:p>
@@ -4755,7 +4790,22 @@
           </a:p>
           <a:p>
             <a:r>
-              <a:t>  "위험가중자산이 커지면 자본 부담도 커질 수 있고, 예금자 보호 논리와도 충돌할 수 있다.",</a:t>
+              <a:t>  "위험가중자산이 커지면 자본 부담도 커질 수 있고, 예금자 보호 논리와도 충돌할 수 있다."</a:t>
+            </a:r>
+          </a:p>
+          <a:p>
+            <a:r>
+              <a:t>]</a:t>
+            </a:r>
+          </a:p>
+          <a:p>
+            <a:r>
+              <a:t>overflow_body_lines:</a:t>
+            </a:r>
+          </a:p>
+          <a:p>
+            <a:r>
+              <a:t>[</a:t>
             </a:r>
           </a:p>
           <a:p>
@@ -4768,16 +4818,6 @@
               <a:t>]</a:t>
             </a:r>
           </a:p>
-          <a:p>
-            <a:r>
-              <a:t>overflow_body_lines:</a:t>
-            </a:r>
-          </a:p>
-          <a:p>
-            <a:r>
-              <a:t>[]</a:t>
-            </a:r>
-          </a:p>
           <a:p/>
           <a:p>
             <a:r>
@@ -4884,22 +4924,22 @@
           </a:p>
           <a:p>
             <a:r>
-              <a:t>  "type": "none",</a:t>
-            </a:r>
-          </a:p>
-          <a:p>
-            <a:r>
-              <a:t>  "required": false,</a:t>
-            </a:r>
-          </a:p>
-          <a:p>
-            <a:r>
-              <a:t>  "screen_position": "none",</a:t>
-            </a:r>
-          </a:p>
-          <a:p>
-            <a:r>
-              <a:t>  "display_label": "",</a:t>
+              <a:t>  "type": "article_quote",</a:t>
+            </a:r>
+          </a:p>
+          <a:p>
+            <a:r>
+              <a:t>  "required": true,</a:t>
+            </a:r>
+          </a:p>
+          <a:p>
+            <a:r>
+              <a:t>  "screen_position": "left_half",</a:t>
+            </a:r>
+          </a:p>
+          <a:p>
+            <a:r>
+              <a:t>  "display_label": "[기사 인용]",</a:t>
             </a:r>
           </a:p>
           <a:p>
@@ -4919,7 +4959,7 @@
           </a:p>
           <a:p>
             <a:r>
-              <a:t>  "manual_insert_required": false</a:t>
+              <a:t>  "manual_insert_required": true</a:t>
             </a:r>
           </a:p>
           <a:p>
@@ -5107,7 +5147,22 @@
           </a:p>
           <a:p>
             <a:r>
-              <a:t>  "그래서 수익률, 주가, 매수·매도, 유망종목식 표현은 피해야 한다.",</a:t>
+              <a:t>  "그래서 수익률, 주가, 매수·매도, 유망종목식 표현은 피해야 한다."</a:t>
+            </a:r>
+          </a:p>
+          <a:p>
+            <a:r>
+              <a:t>]</a:t>
+            </a:r>
+          </a:p>
+          <a:p>
+            <a:r>
+              <a:t>overflow_body_lines:</a:t>
+            </a:r>
+          </a:p>
+          <a:p>
+            <a:r>
+              <a:t>[</a:t>
             </a:r>
           </a:p>
           <a:p>
@@ -5118,16 +5173,6 @@
           <a:p>
             <a:r>
               <a:t>]</a:t>
-            </a:r>
-          </a:p>
-          <a:p>
-            <a:r>
-              <a:t>overflow_body_lines:</a:t>
-            </a:r>
-          </a:p>
-          <a:p>
-            <a:r>
-              <a:t>[]</a:t>
             </a:r>
           </a:p>
           <a:p/>
@@ -5398,17 +5443,17 @@
           </a:p>
           <a:p>
             <a:r>
-              <a:t>proof_object_type: none</a:t>
-            </a:r>
-          </a:p>
-          <a:p>
-            <a:r>
-              <a:t>proof_object_required: False</a:t>
-            </a:r>
-          </a:p>
-          <a:p>
-            <a:r>
-              <a:t>proof_object_screen_position: none</a:t>
+              <a:t>proof_object_type: article_quote</a:t>
+            </a:r>
+          </a:p>
+          <a:p>
+            <a:r>
+              <a:t>proof_object_required: True</a:t>
+            </a:r>
+          </a:p>
+          <a:p>
+            <a:r>
+              <a:t>proof_object_screen_position: left_half</a:t>
             </a:r>
           </a:p>
           <a:p>
@@ -5434,7 +5479,22 @@
           </a:p>
           <a:p>
             <a:r>
-              <a:t>  "좋은 위험을 고르는 능력, 손실을 나누는 규칙, 금융권 건전성을 함께 설계할 수 있느냐는 질문이다.",</a:t>
+              <a:t>  "좋은 위험을 고르는 능력, 손실을 나누는 규칙, 금융권 건전성을 함께 설계할 수 있느냐는 질문이다."</a:t>
+            </a:r>
+          </a:p>
+          <a:p>
+            <a:r>
+              <a:t>]</a:t>
+            </a:r>
+          </a:p>
+          <a:p>
+            <a:r>
+              <a:t>overflow_body_lines:</a:t>
+            </a:r>
+          </a:p>
+          <a:p>
+            <a:r>
+              <a:t>[</a:t>
             </a:r>
           </a:p>
           <a:p>
@@ -5447,16 +5507,6 @@
               <a:t>]</a:t>
             </a:r>
           </a:p>
-          <a:p>
-            <a:r>
-              <a:t>overflow_body_lines:</a:t>
-            </a:r>
-          </a:p>
-          <a:p>
-            <a:r>
-              <a:t>[]</a:t>
-            </a:r>
-          </a:p>
           <a:p/>
           <a:p>
             <a:r>
@@ -5568,22 +5618,22 @@
           </a:p>
           <a:p>
             <a:r>
-              <a:t>  "type": "none",</a:t>
-            </a:r>
-          </a:p>
-          <a:p>
-            <a:r>
-              <a:t>  "required": false,</a:t>
-            </a:r>
-          </a:p>
-          <a:p>
-            <a:r>
-              <a:t>  "screen_position": "none",</a:t>
-            </a:r>
-          </a:p>
-          <a:p>
-            <a:r>
-              <a:t>  "display_label": "",</a:t>
+              <a:t>  "type": "article_quote",</a:t>
+            </a:r>
+          </a:p>
+          <a:p>
+            <a:r>
+              <a:t>  "required": true,</a:t>
+            </a:r>
+          </a:p>
+          <a:p>
+            <a:r>
+              <a:t>  "screen_position": "left_half",</a:t>
+            </a:r>
+          </a:p>
+          <a:p>
+            <a:r>
+              <a:t>  "display_label": "[기사 인용]",</a:t>
             </a:r>
           </a:p>
           <a:p>
@@ -5603,7 +5653,7 @@
           </a:p>
           <a:p>
             <a:r>
-              <a:t>  "manual_insert_required": false</a:t>
+              <a:t>  "manual_insert_required": true</a:t>
             </a:r>
           </a:p>
           <a:p>
@@ -6566,17 +6616,17 @@
           </a:p>
           <a:p>
             <a:r>
-              <a:t>proof_object_type: none</a:t>
-            </a:r>
-          </a:p>
-          <a:p>
-            <a:r>
-              <a:t>proof_object_required: False</a:t>
-            </a:r>
-          </a:p>
-          <a:p>
-            <a:r>
-              <a:t>proof_object_screen_position: none</a:t>
+              <a:t>proof_object_type: article_quote</a:t>
+            </a:r>
+          </a:p>
+          <a:p>
+            <a:r>
+              <a:t>proof_object_required: True</a:t>
+            </a:r>
+          </a:p>
+          <a:p>
+            <a:r>
+              <a:t>proof_object_screen_position: left_half</a:t>
             </a:r>
           </a:p>
           <a:p>
@@ -6602,7 +6652,22 @@
           </a:p>
           <a:p>
             <a:r>
-              <a:t>  "은행은 자본규제와 위험가중자산을 고려해야 하므로, 위험한 자산을 무한정 늘릴 수 없다.",</a:t>
+              <a:t>  "은행은 자본규제와 위험가중자산을 고려해야 하므로, 위험한 자산을 무한정 늘릴 수 없다."</a:t>
+            </a:r>
+          </a:p>
+          <a:p>
+            <a:r>
+              <a:t>]</a:t>
+            </a:r>
+          </a:p>
+          <a:p>
+            <a:r>
+              <a:t>overflow_body_lines:</a:t>
+            </a:r>
+          </a:p>
+          <a:p>
+            <a:r>
+              <a:t>[</a:t>
             </a:r>
           </a:p>
           <a:p>
@@ -6615,16 +6680,6 @@
               <a:t>]</a:t>
             </a:r>
           </a:p>
-          <a:p>
-            <a:r>
-              <a:t>overflow_body_lines:</a:t>
-            </a:r>
-          </a:p>
-          <a:p>
-            <a:r>
-              <a:t>[]</a:t>
-            </a:r>
-          </a:p>
           <a:p/>
           <a:p>
             <a:r>
@@ -6731,22 +6786,22 @@
           </a:p>
           <a:p>
             <a:r>
-              <a:t>  "type": "none",</a:t>
-            </a:r>
-          </a:p>
-          <a:p>
-            <a:r>
-              <a:t>  "required": false,</a:t>
-            </a:r>
-          </a:p>
-          <a:p>
-            <a:r>
-              <a:t>  "screen_position": "none",</a:t>
-            </a:r>
-          </a:p>
-          <a:p>
-            <a:r>
-              <a:t>  "display_label": "",</a:t>
+              <a:t>  "type": "article_quote",</a:t>
+            </a:r>
+          </a:p>
+          <a:p>
+            <a:r>
+              <a:t>  "required": true,</a:t>
+            </a:r>
+          </a:p>
+          <a:p>
+            <a:r>
+              <a:t>  "screen_position": "left_half",</a:t>
+            </a:r>
+          </a:p>
+          <a:p>
+            <a:r>
+              <a:t>  "display_label": "[기사 인용]",</a:t>
             </a:r>
           </a:p>
           <a:p>
@@ -6766,7 +6821,7 @@
           </a:p>
           <a:p>
             <a:r>
-              <a:t>  "manual_insert_required": false</a:t>
+              <a:t>  "manual_insert_required": true</a:t>
             </a:r>
           </a:p>
           <a:p>
@@ -6954,7 +7009,22 @@
           </a:p>
           <a:p>
             <a:r>
-              <a:t>  "정책자료는 국민성장펀드가 AI·반도체 같은 첨단전략산업에 장기 자금을 공급하려는 틀이라고 설명한다.",</a:t>
+              <a:t>  "정책자료는 국민성장펀드가 AI·반도체 같은 첨단전략산업에 장기 자금을 공급하려는 틀이라고 설명한다."</a:t>
+            </a:r>
+          </a:p>
+          <a:p>
+            <a:r>
+              <a:t>]</a:t>
+            </a:r>
+          </a:p>
+          <a:p>
+            <a:r>
+              <a:t>overflow_body_lines:</a:t>
+            </a:r>
+          </a:p>
+          <a:p>
+            <a:r>
+              <a:t>[</a:t>
             </a:r>
           </a:p>
           <a:p>
@@ -6965,16 +7035,6 @@
           <a:p>
             <a:r>
               <a:t>]</a:t>
-            </a:r>
-          </a:p>
-          <a:p>
-            <a:r>
-              <a:t>overflow_body_lines:</a:t>
-            </a:r>
-          </a:p>
-          <a:p>
-            <a:r>
-              <a:t>[]</a:t>
             </a:r>
           </a:p>
           <a:p/>
@@ -7316,7 +7376,22 @@
           </a:p>
           <a:p>
             <a:r>
-              <a:t>  "너무 위험하면 결국 손실을 누가 떠안느냐는 문제가 생긴다.",</a:t>
+              <a:t>  "너무 위험하면 결국 손실을 누가 떠안느냐는 문제가 생긴다."</a:t>
+            </a:r>
+          </a:p>
+          <a:p>
+            <a:r>
+              <a:t>]</a:t>
+            </a:r>
+          </a:p>
+          <a:p>
+            <a:r>
+              <a:t>overflow_body_lines:</a:t>
+            </a:r>
+          </a:p>
+          <a:p>
+            <a:r>
+              <a:t>[</a:t>
             </a:r>
           </a:p>
           <a:p>
@@ -7327,16 +7402,6 @@
           <a:p>
             <a:r>
               <a:t>]</a:t>
-            </a:r>
-          </a:p>
-          <a:p>
-            <a:r>
-              <a:t>overflow_body_lines:</a:t>
-            </a:r>
-          </a:p>
-          <a:p>
-            <a:r>
-              <a:t>[]</a:t>
             </a:r>
           </a:p>
           <a:p/>
@@ -7914,17 +7979,17 @@
           </a:p>
           <a:p>
             <a:r>
-              <a:t>proof_object_type: none</a:t>
-            </a:r>
-          </a:p>
-          <a:p>
-            <a:r>
-              <a:t>proof_object_required: False</a:t>
-            </a:r>
-          </a:p>
-          <a:p>
-            <a:r>
-              <a:t>proof_object_screen_position: none</a:t>
+              <a:t>proof_object_type: article_quote</a:t>
+            </a:r>
+          </a:p>
+          <a:p>
+            <a:r>
+              <a:t>proof_object_required: True</a:t>
+            </a:r>
+          </a:p>
+          <a:p>
+            <a:r>
+              <a:t>proof_object_screen_position: left_half</a:t>
             </a:r>
           </a:p>
           <a:p>
@@ -7950,7 +8015,22 @@
           </a:p>
           <a:p>
             <a:r>
-              <a:t>  "반도체, 전력망, 데이터센터, 장비, 소재가 함께 필요하다.",</a:t>
+              <a:t>  "반도체, 전력망, 데이터센터, 장비, 소재가 함께 필요하다."</a:t>
+            </a:r>
+          </a:p>
+          <a:p>
+            <a:r>
+              <a:t>]</a:t>
+            </a:r>
+          </a:p>
+          <a:p>
+            <a:r>
+              <a:t>overflow_body_lines:</a:t>
+            </a:r>
+          </a:p>
+          <a:p>
+            <a:r>
+              <a:t>[</a:t>
             </a:r>
           </a:p>
           <a:p>
@@ -7963,16 +8043,6 @@
               <a:t>]</a:t>
             </a:r>
           </a:p>
-          <a:p>
-            <a:r>
-              <a:t>overflow_body_lines:</a:t>
-            </a:r>
-          </a:p>
-          <a:p>
-            <a:r>
-              <a:t>[]</a:t>
-            </a:r>
-          </a:p>
           <a:p/>
           <a:p>
             <a:r>
@@ -8079,22 +8149,22 @@
           </a:p>
           <a:p>
             <a:r>
-              <a:t>  "type": "none",</a:t>
-            </a:r>
-          </a:p>
-          <a:p>
-            <a:r>
-              <a:t>  "required": false,</a:t>
-            </a:r>
-          </a:p>
-          <a:p>
-            <a:r>
-              <a:t>  "screen_position": "none",</a:t>
-            </a:r>
-          </a:p>
-          <a:p>
-            <a:r>
-              <a:t>  "display_label": "",</a:t>
+              <a:t>  "type": "article_quote",</a:t>
+            </a:r>
+          </a:p>
+          <a:p>
+            <a:r>
+              <a:t>  "required": true,</a:t>
+            </a:r>
+          </a:p>
+          <a:p>
+            <a:r>
+              <a:t>  "screen_position": "left_half",</a:t>
+            </a:r>
+          </a:p>
+          <a:p>
+            <a:r>
+              <a:t>  "display_label": "[기사 인용]",</a:t>
             </a:r>
           </a:p>
           <a:p>
@@ -8114,7 +8184,7 @@
           </a:p>
           <a:p>
             <a:r>
-              <a:t>  "manual_insert_required": false</a:t>
+              <a:t>  "manual_insert_required": true</a:t>
             </a:r>
           </a:p>
           <a:p>
@@ -8654,7 +8724,22 @@
           </a:p>
           <a:p>
             <a:r>
-              <a:t>  "하지만 초기 기술, 인력, 데이터, 공정 노하우는 평가하기 어렵다.",</a:t>
+              <a:t>  "하지만 초기 기술, 인력, 데이터, 공정 노하우는 평가하기 어렵다."</a:t>
+            </a:r>
+          </a:p>
+          <a:p>
+            <a:r>
+              <a:t>]</a:t>
+            </a:r>
+          </a:p>
+          <a:p>
+            <a:r>
+              <a:t>overflow_body_lines:</a:t>
+            </a:r>
+          </a:p>
+          <a:p>
+            <a:r>
+              <a:t>[</a:t>
             </a:r>
           </a:p>
           <a:p>
@@ -8665,16 +8750,6 @@
           <a:p>
             <a:r>
               <a:t>]</a:t>
-            </a:r>
-          </a:p>
-          <a:p>
-            <a:r>
-              <a:t>overflow_body_lines:</a:t>
-            </a:r>
-          </a:p>
-          <a:p>
-            <a:r>
-              <a:t>[]</a:t>
             </a:r>
           </a:p>
           <a:p/>
@@ -12140,22 +12215,6 @@
               <a:t>하지만 정책자금이 늘 좋은 결과를 만든다고 단정할 수는 없다.</a:t>
             </a:r>
           </a:p>
-          <a:p>
-            <a:pPr>
-              <a:spcAft>
-                <a:spcPts val="800"/>
-              </a:spcAft>
-            </a:pPr>
-            <a:r>
-              <a:rPr sz="2300" b="0" u="none">
-                <a:solidFill>
-                  <a:srgbClr val="181C23"/>
-                </a:solidFill>
-                <a:latin typeface="Malgun Gothic"/>
-              </a:rPr>
-              <a:t>정책금융은 성장의 마중물일 수도, 손실의 통로일 수도 있다.</a:t>
-            </a:r>
-          </a:p>
         </p:txBody>
       </p:sp>
       <p:sp>
@@ -12338,22 +12397,6 @@
                 <a:latin typeface="Malgun Gothic"/>
               </a:rPr>
               <a:t>기업은 긴 투자금을 원한다.</a:t>
-            </a:r>
-          </a:p>
-          <a:p>
-            <a:pPr>
-              <a:spcAft>
-                <a:spcPts val="800"/>
-              </a:spcAft>
-            </a:pPr>
-            <a:r>
-              <a:rPr sz="2300" b="0" u="none">
-                <a:solidFill>
-                  <a:srgbClr val="181C23"/>
-                </a:solidFill>
-                <a:latin typeface="Malgun Gothic"/>
-              </a:rPr>
-              <a:t>국가는 전략산업을 키우고 싶다.</a:t>
             </a:r>
           </a:p>
         </p:txBody>
@@ -12692,7 +12735,7 @@
         <p:spPr>
           <a:xfrm>
             <a:off x="713232" y="2560320"/>
-            <a:ext cx="9875520" cy="2651760"/>
+            <a:ext cx="6766560" cy="2651760"/>
           </a:xfrm>
           <a:prstGeom prst="rect">
             <a:avLst/>
@@ -12736,27 +12779,97 @@
               <a:t>국민참여형 펀드는 일반 국민 자금도 일부 모아 자펀드에 투자하는 구조로 설계됐다.</a:t>
             </a:r>
           </a:p>
-          <a:p>
-            <a:pPr>
-              <a:spcAft>
-                <a:spcPts val="800"/>
-              </a:spcAft>
-            </a:pPr>
-            <a:r>
-              <a:rPr sz="2400" b="0" u="none">
+        </p:txBody>
+      </p:sp>
+      <p:sp>
+        <p:nvSpPr>
+          <p:cNvPr id="4" name="Rectangle 3"/>
+          <p:cNvSpPr/>
+          <p:nvPr/>
+        </p:nvSpPr>
+        <p:spPr>
+          <a:xfrm>
+            <a:off x="8458200" y="4389120"/>
+            <a:ext cx="2560320" cy="1097280"/>
+          </a:xfrm>
+          <a:prstGeom prst="rect">
+            <a:avLst/>
+          </a:prstGeom>
+          <a:solidFill>
+            <a:srgbClr val="EBF1F4"/>
+          </a:solidFill>
+          <a:ln w="12700">
+            <a:solidFill>
+              <a:srgbClr val="A0AEB8"/>
+            </a:solidFill>
+          </a:ln>
+        </p:spPr>
+        <p:style>
+          <a:lnRef idx="1">
+            <a:schemeClr val="accent1"/>
+          </a:lnRef>
+          <a:fillRef idx="3">
+            <a:schemeClr val="accent1"/>
+          </a:fillRef>
+          <a:effectRef idx="2">
+            <a:schemeClr val="accent1"/>
+          </a:effectRef>
+          <a:fontRef idx="minor">
+            <a:schemeClr val="lt1"/>
+          </a:fontRef>
+        </p:style>
+        <p:txBody>
+          <a:bodyPr rtlCol="0" anchor="ctr" wrap="square"/>
+          <a:lstStyle/>
+          <a:p>
+            <a:pPr algn="ctr"/>
+            <a:r>
+              <a:rPr sz="1600" b="1">
                 <a:solidFill>
-                  <a:srgbClr val="181C23"/>
+                  <a:srgbClr val="566070"/>
                 </a:solidFill>
                 <a:latin typeface="Malgun Gothic"/>
               </a:rPr>
-              <a:t>그래서 이름은 성장 이야기지만, 실제 방송에서는 투자자 리스크와 정책 책임을 함께 봐야 한다.</a:t>
-            </a:r>
-          </a:p>
-        </p:txBody>
-      </p:sp>
-      <p:sp>
-        <p:nvSpPr>
-          <p:cNvPr id="4" name="TextBox 3"/>
+              <a:t>[기사 인용]</a:t>
+            </a:r>
+          </a:p>
+          <a:p>
+            <a:pPr algn="ctr">
+              <a:spcBef>
+                <a:spcPts val="800"/>
+              </a:spcBef>
+            </a:pPr>
+            <a:r>
+              <a:rPr sz="1800" b="1">
+                <a:solidFill>
+                  <a:srgbClr val="000000"/>
+                </a:solidFill>
+                <a:latin typeface="Malgun Gothic"/>
+              </a:rPr>
+              <a:t>금융위원회</a:t>
+            </a:r>
+          </a:p>
+          <a:p>
+            <a:pPr algn="ctr">
+              <a:spcBef>
+                <a:spcPts val="400"/>
+              </a:spcBef>
+            </a:pPr>
+            <a:r>
+              <a:rPr sz="1400" b="0">
+                <a:solidFill>
+                  <a:srgbClr val="566070"/>
+                </a:solidFill>
+                <a:latin typeface="Malgun Gothic"/>
+              </a:rPr>
+              <a:t>국민성장펀드라는 이름이 붙으면 이야기는 더 어려워진다</a:t>
+            </a:r>
+          </a:p>
+        </p:txBody>
+      </p:sp>
+      <p:sp>
+        <p:nvSpPr>
+          <p:cNvPr id="5" name="TextBox 4"/>
           <p:cNvSpPr txBox="1"/>
           <p:nvPr/>
         </p:nvSpPr>
@@ -12790,7 +12903,7 @@
       </p:sp>
       <p:sp>
         <p:nvSpPr>
-          <p:cNvPr id="5" name="TextBox 4"/>
+          <p:cNvPr id="6" name="TextBox 5"/>
           <p:cNvSpPr txBox="1"/>
           <p:nvPr/>
         </p:nvSpPr>
@@ -12936,27 +13049,97 @@
               <a:t>이 장치는 투자자의 위험을 낮추려는 설계지만, 원금 손실 가능성이 사라진다는 뜻은 아니다.</a:t>
             </a:r>
           </a:p>
-          <a:p>
-            <a:pPr>
-              <a:spcAft>
-                <a:spcPts val="800"/>
-              </a:spcAft>
-            </a:pPr>
-            <a:r>
-              <a:rPr sz="2000" b="0" u="none">
+        </p:txBody>
+      </p:sp>
+      <p:sp>
+        <p:nvSpPr>
+          <p:cNvPr id="4" name="Rectangle 3"/>
+          <p:cNvSpPr/>
+          <p:nvPr/>
+        </p:nvSpPr>
+        <p:spPr>
+          <a:xfrm>
+            <a:off x="7818120" y="1417320"/>
+            <a:ext cx="3703320" cy="4251960"/>
+          </a:xfrm>
+          <a:prstGeom prst="rect">
+            <a:avLst/>
+          </a:prstGeom>
+          <a:solidFill>
+            <a:srgbClr val="EBF1F4"/>
+          </a:solidFill>
+          <a:ln w="12700">
+            <a:solidFill>
+              <a:srgbClr val="A0AEB8"/>
+            </a:solidFill>
+          </a:ln>
+        </p:spPr>
+        <p:style>
+          <a:lnRef idx="1">
+            <a:schemeClr val="accent1"/>
+          </a:lnRef>
+          <a:fillRef idx="3">
+            <a:schemeClr val="accent1"/>
+          </a:fillRef>
+          <a:effectRef idx="2">
+            <a:schemeClr val="accent1"/>
+          </a:effectRef>
+          <a:fontRef idx="minor">
+            <a:schemeClr val="lt1"/>
+          </a:fontRef>
+        </p:style>
+        <p:txBody>
+          <a:bodyPr rtlCol="0" anchor="ctr" wrap="square"/>
+          <a:lstStyle/>
+          <a:p>
+            <a:pPr algn="ctr"/>
+            <a:r>
+              <a:rPr sz="1600" b="1">
                 <a:solidFill>
-                  <a:srgbClr val="181C23"/>
+                  <a:srgbClr val="566070"/>
                 </a:solidFill>
                 <a:latin typeface="Malgun Gothic"/>
               </a:rPr>
-              <a:t>손실을 누가, 어떤 순서로, 어디까지 부담하는지가 핵심 질문이다.</a:t>
-            </a:r>
-          </a:p>
-        </p:txBody>
-      </p:sp>
-      <p:sp>
-        <p:nvSpPr>
-          <p:cNvPr id="4" name="TextBox 3"/>
+              <a:t>[기사 인용]</a:t>
+            </a:r>
+          </a:p>
+          <a:p>
+            <a:pPr algn="ctr">
+              <a:spcBef>
+                <a:spcPts val="800"/>
+              </a:spcBef>
+            </a:pPr>
+            <a:r>
+              <a:rPr sz="1800" b="1">
+                <a:solidFill>
+                  <a:srgbClr val="000000"/>
+                </a:solidFill>
+                <a:latin typeface="Malgun Gothic"/>
+              </a:rPr>
+              <a:t>정책브리핑</a:t>
+            </a:r>
+          </a:p>
+          <a:p>
+            <a:pPr algn="ctr">
+              <a:spcBef>
+                <a:spcPts val="400"/>
+              </a:spcBef>
+            </a:pPr>
+            <a:r>
+              <a:rPr sz="1400" b="0">
+                <a:solidFill>
+                  <a:srgbClr val="566070"/>
+                </a:solidFill>
+                <a:latin typeface="Malgun Gothic"/>
+              </a:rPr>
+              <a:t>위험을 나눈다는 말은 손실 가능성도 나눈다는 뜻이다</a:t>
+            </a:r>
+          </a:p>
+        </p:txBody>
+      </p:sp>
+      <p:sp>
+        <p:nvSpPr>
+          <p:cNvPr id="5" name="TextBox 4"/>
           <p:cNvSpPr txBox="1"/>
           <p:nvPr/>
         </p:nvSpPr>
@@ -12990,7 +13173,7 @@
       </p:sp>
       <p:sp>
         <p:nvSpPr>
-          <p:cNvPr id="5" name="TextBox 4"/>
+          <p:cNvPr id="6" name="TextBox 5"/>
           <p:cNvSpPr txBox="1"/>
           <p:nvPr/>
         </p:nvSpPr>
@@ -13455,22 +13638,6 @@
               <a:t>공식자료는 AI, 반도체, 이차전지 등 첨단전략산업을 넓은 지원 대상으로 제시한다.</a:t>
             </a:r>
           </a:p>
-          <a:p>
-            <a:pPr>
-              <a:spcAft>
-                <a:spcPts val="800"/>
-              </a:spcAft>
-            </a:pPr>
-            <a:r>
-              <a:rPr sz="1900" b="0" u="none">
-                <a:solidFill>
-                  <a:srgbClr val="181C23"/>
-                </a:solidFill>
-                <a:latin typeface="Malgun Gothic"/>
-              </a:rPr>
-              <a:t>하지만 방송에서는 이것이 특정 기업 성공 보장이나 특정 상품 추천처럼 들리면 안 된다.</a:t>
-            </a:r>
-          </a:p>
         </p:txBody>
       </p:sp>
       <p:sp>
@@ -13507,7 +13674,7 @@
                 </a:solidFill>
                 <a:latin typeface="Malgun Gothic"/>
               </a:rPr>
-              <a:t>성장산업 지원과 특정 기업 밀어주기는 구분해서 다뤄야 한다.</a:t>
+              <a:t>하지만 방송에서는 이것이 특정 기업 성공 보장이나 특정 상품 추천처럼 들리면 안 된다.</a:t>
             </a:r>
           </a:p>
         </p:txBody>
@@ -13768,22 +13935,6 @@
               <a:t>반대쪽 질문도 있다. 재정이 위험을 먼저 떠안으면 민간은 얼마나 책임 있게 투자할까.</a:t>
             </a:r>
           </a:p>
-          <a:p>
-            <a:pPr>
-              <a:spcAft>
-                <a:spcPts val="800"/>
-              </a:spcAft>
-            </a:pPr>
-            <a:r>
-              <a:rPr sz="1900" b="0" u="none">
-                <a:solidFill>
-                  <a:srgbClr val="181C23"/>
-                </a:solidFill>
-                <a:latin typeface="Malgun Gothic"/>
-              </a:rPr>
-              <a:t>또 은행과 금융회사는 건전성 규제, 위험가중자산, 예금자 보호 논리 안에서 움직인다.</a:t>
-            </a:r>
-          </a:p>
         </p:txBody>
       </p:sp>
       <p:sp>
@@ -13820,7 +13971,7 @@
                 </a:solidFill>
                 <a:latin typeface="Malgun Gothic"/>
               </a:rPr>
-              <a:t>그래서 아무도 위험을 안 지는 문제와, 누군가에게 위험을 떠넘기는 문제를 동시에 봐야 한다.</a:t>
+              <a:t>또 은행과 금융회사는 건전성 규제, 위험가중자산, 예금자 보호 논리 안에서 움직인다.</a:t>
             </a:r>
           </a:p>
         </p:txBody>
@@ -14005,22 +14156,6 @@
                 <a:latin typeface="Malgun Gothic"/>
               </a:rPr>
               <a:t>하지만 위험도 함께 나눠야 한다면, 손실이 발생했을 때 재정·운용사·투자자·금융권의 책임선이 중요해진다.</a:t>
-            </a:r>
-          </a:p>
-          <a:p>
-            <a:pPr>
-              <a:spcAft>
-                <a:spcPts val="800"/>
-              </a:spcAft>
-            </a:pPr>
-            <a:r>
-              <a:rPr sz="2300" b="0" u="none">
-                <a:solidFill>
-                  <a:srgbClr val="181C23"/>
-                </a:solidFill>
-                <a:latin typeface="Malgun Gothic"/>
-              </a:rPr>
-              <a:t>국민성장펀드 이야기는 결국 수익보다 위험 배분의 설계로 읽어야 한다.</a:t>
             </a:r>
           </a:p>
         </p:txBody>
@@ -14359,7 +14494,7 @@
         <p:spPr>
           <a:xfrm>
             <a:off x="713232" y="2560320"/>
-            <a:ext cx="9875520" cy="2651760"/>
+            <a:ext cx="6766560" cy="2651760"/>
           </a:xfrm>
           <a:prstGeom prst="rect">
             <a:avLst/>
@@ -14403,27 +14538,97 @@
               <a:t>금융위원회 공식자료는 국민성장펀드가 5년간 150조 원, 2026년 30조 원 규모로 첨단산업 생태계에 자금을 공급하는 틀이라고 설명한다.</a:t>
             </a:r>
           </a:p>
-          <a:p>
-            <a:pPr>
-              <a:spcAft>
-                <a:spcPts val="800"/>
-              </a:spcAft>
-            </a:pPr>
-            <a:r>
-              <a:rPr sz="2400" b="0" u="none">
+        </p:txBody>
+      </p:sp>
+      <p:sp>
+        <p:nvSpPr>
+          <p:cNvPr id="4" name="Rectangle 3"/>
+          <p:cNvSpPr/>
+          <p:nvPr/>
+        </p:nvSpPr>
+        <p:spPr>
+          <a:xfrm>
+            <a:off x="8458200" y="4389120"/>
+            <a:ext cx="2560320" cy="1097280"/>
+          </a:xfrm>
+          <a:prstGeom prst="rect">
+            <a:avLst/>
+          </a:prstGeom>
+          <a:solidFill>
+            <a:srgbClr val="EBF1F4"/>
+          </a:solidFill>
+          <a:ln w="12700">
+            <a:solidFill>
+              <a:srgbClr val="A0AEB8"/>
+            </a:solidFill>
+          </a:ln>
+        </p:spPr>
+        <p:style>
+          <a:lnRef idx="1">
+            <a:schemeClr val="accent1"/>
+          </a:lnRef>
+          <a:fillRef idx="3">
+            <a:schemeClr val="accent1"/>
+          </a:fillRef>
+          <a:effectRef idx="2">
+            <a:schemeClr val="accent1"/>
+          </a:effectRef>
+          <a:fontRef idx="minor">
+            <a:schemeClr val="lt1"/>
+          </a:fontRef>
+        </p:style>
+        <p:txBody>
+          <a:bodyPr rtlCol="0" anchor="ctr" wrap="square"/>
+          <a:lstStyle/>
+          <a:p>
+            <a:pPr algn="ctr"/>
+            <a:r>
+              <a:rPr sz="1600" b="1">
                 <a:solidFill>
-                  <a:srgbClr val="181C23"/>
+                  <a:srgbClr val="566070"/>
                 </a:solidFill>
                 <a:latin typeface="Malgun Gothic"/>
               </a:rPr>
-              <a:t>다만 이 발언과 정책 숫자가 곧 정책 성공을 뜻하는 것은 아니다.</a:t>
-            </a:r>
-          </a:p>
-        </p:txBody>
-      </p:sp>
-      <p:sp>
-        <p:nvSpPr>
-          <p:cNvPr id="4" name="TextBox 3"/>
+              <a:t>[기사 인용]</a:t>
+            </a:r>
+          </a:p>
+          <a:p>
+            <a:pPr algn="ctr">
+              <a:spcBef>
+                <a:spcPts val="800"/>
+              </a:spcBef>
+            </a:pPr>
+            <a:r>
+              <a:rPr sz="1800" b="1">
+                <a:solidFill>
+                  <a:srgbClr val="000000"/>
+                </a:solidFill>
+                <a:latin typeface="Malgun Gothic"/>
+              </a:rPr>
+              <a:t>news.einfomax.co.kr</a:t>
+            </a:r>
+          </a:p>
+          <a:p>
+            <a:pPr algn="ctr">
+              <a:spcBef>
+                <a:spcPts val="400"/>
+              </a:spcBef>
+            </a:pPr>
+            <a:r>
+              <a:rPr sz="1400" b="0">
+                <a:solidFill>
+                  <a:srgbClr val="566070"/>
+                </a:solidFill>
+                <a:latin typeface="Malgun Gothic"/>
+              </a:rPr>
+              <a:t>금융위원장이 던진 질문 하나</a:t>
+            </a:r>
+          </a:p>
+        </p:txBody>
+      </p:sp>
+      <p:sp>
+        <p:nvSpPr>
+          <p:cNvPr id="5" name="TextBox 4"/>
           <p:cNvSpPr txBox="1"/>
           <p:nvPr/>
         </p:nvSpPr>
@@ -14457,7 +14662,7 @@
       </p:sp>
       <p:sp>
         <p:nvSpPr>
-          <p:cNvPr id="5" name="TextBox 4"/>
+          <p:cNvPr id="6" name="TextBox 5"/>
           <p:cNvSpPr txBox="1"/>
           <p:nvPr/>
         </p:nvSpPr>
@@ -14603,27 +14808,97 @@
               <a:t>위험가중자산이 커지면 자본 부담도 커질 수 있고, 예금자 보호 논리와도 충돌할 수 있다.</a:t>
             </a:r>
           </a:p>
-          <a:p>
-            <a:pPr>
-              <a:spcAft>
-                <a:spcPts val="800"/>
-              </a:spcAft>
-            </a:pPr>
-            <a:r>
-              <a:rPr sz="2000" b="0" u="none">
+        </p:txBody>
+      </p:sp>
+      <p:sp>
+        <p:nvSpPr>
+          <p:cNvPr id="4" name="Rectangle 3"/>
+          <p:cNvSpPr/>
+          <p:nvPr/>
+        </p:nvSpPr>
+        <p:spPr>
+          <a:xfrm>
+            <a:off x="7818120" y="1417320"/>
+            <a:ext cx="3703320" cy="4251960"/>
+          </a:xfrm>
+          <a:prstGeom prst="rect">
+            <a:avLst/>
+          </a:prstGeom>
+          <a:solidFill>
+            <a:srgbClr val="EBF1F4"/>
+          </a:solidFill>
+          <a:ln w="12700">
+            <a:solidFill>
+              <a:srgbClr val="A0AEB8"/>
+            </a:solidFill>
+          </a:ln>
+        </p:spPr>
+        <p:style>
+          <a:lnRef idx="1">
+            <a:schemeClr val="accent1"/>
+          </a:lnRef>
+          <a:fillRef idx="3">
+            <a:schemeClr val="accent1"/>
+          </a:fillRef>
+          <a:effectRef idx="2">
+            <a:schemeClr val="accent1"/>
+          </a:effectRef>
+          <a:fontRef idx="minor">
+            <a:schemeClr val="lt1"/>
+          </a:fontRef>
+        </p:style>
+        <p:txBody>
+          <a:bodyPr rtlCol="0" anchor="ctr" wrap="square"/>
+          <a:lstStyle/>
+          <a:p>
+            <a:pPr algn="ctr"/>
+            <a:r>
+              <a:rPr sz="1600" b="1">
                 <a:solidFill>
-                  <a:srgbClr val="181C23"/>
+                  <a:srgbClr val="566070"/>
                 </a:solidFill>
                 <a:latin typeface="Malgun Gothic"/>
               </a:rPr>
-              <a:t>따라서 생산적 금융은 구호가 아니라 자본규제와 위험분담 설계의 문제다.</a:t>
-            </a:r>
-          </a:p>
-        </p:txBody>
-      </p:sp>
-      <p:sp>
-        <p:nvSpPr>
-          <p:cNvPr id="4" name="TextBox 3"/>
+              <a:t>[기사 인용]</a:t>
+            </a:r>
+          </a:p>
+          <a:p>
+            <a:pPr algn="ctr">
+              <a:spcBef>
+                <a:spcPts val="800"/>
+              </a:spcBef>
+            </a:pPr>
+            <a:r>
+              <a:rPr sz="1800" b="1">
+                <a:solidFill>
+                  <a:srgbClr val="000000"/>
+                </a:solidFill>
+                <a:latin typeface="Malgun Gothic"/>
+              </a:rPr>
+              <a:t>BIS</a:t>
+            </a:r>
+          </a:p>
+          <a:p>
+            <a:pPr algn="ctr">
+              <a:spcBef>
+                <a:spcPts val="400"/>
+              </a:spcBef>
+            </a:pPr>
+            <a:r>
+              <a:rPr sz="1400" b="0">
+                <a:solidFill>
+                  <a:srgbClr val="566070"/>
+                </a:solidFill>
+                <a:latin typeface="Malgun Gothic"/>
+              </a:rPr>
+              <a:t>금융권에 “성장에 베팅하라”고 말하는 순간 생기는 문제</a:t>
+            </a:r>
+          </a:p>
+        </p:txBody>
+      </p:sp>
+      <p:sp>
+        <p:nvSpPr>
+          <p:cNvPr id="5" name="TextBox 4"/>
           <p:cNvSpPr txBox="1"/>
           <p:nvPr/>
         </p:nvSpPr>
@@ -14657,7 +14932,7 @@
       </p:sp>
       <p:sp>
         <p:nvSpPr>
-          <p:cNvPr id="5" name="TextBox 4"/>
+          <p:cNvPr id="6" name="TextBox 5"/>
           <p:cNvSpPr txBox="1"/>
           <p:nvPr/>
         </p:nvSpPr>
@@ -14877,22 +15152,6 @@
               <a:t>이 주제는 곧바로 특정 산업·기업·펀드 투자 판단처럼 보일 수 있다.</a:t>
             </a:r>
           </a:p>
-          <a:p>
-            <a:pPr>
-              <a:spcAft>
-                <a:spcPts val="800"/>
-              </a:spcAft>
-            </a:pPr>
-            <a:r>
-              <a:rPr sz="1900" b="0" u="none">
-                <a:solidFill>
-                  <a:srgbClr val="181C23"/>
-                </a:solidFill>
-                <a:latin typeface="Malgun Gothic"/>
-              </a:rPr>
-              <a:t>그래서 수익률, 주가, 매수·매도, 유망종목식 표현은 피해야 한다.</a:t>
-            </a:r>
-          </a:p>
         </p:txBody>
       </p:sp>
       <p:sp>
@@ -14929,7 +15188,7 @@
                 </a:solidFill>
                 <a:latin typeface="Malgun Gothic"/>
               </a:rPr>
-              <a:t>핵심은 투자 추천이 아니라 위험을 누가 나누느냐는 제도 설계다.</a:t>
+              <a:t>그래서 수익률, 주가, 매수·매도, 유망종목식 표현은 피해야 한다.</a:t>
             </a:r>
           </a:p>
         </p:txBody>
@@ -15116,22 +15375,6 @@
               <a:t>좋은 위험을 고르는 능력, 손실을 나누는 규칙, 금융권 건전성을 함께 설계할 수 있느냐는 질문이다.</a:t>
             </a:r>
           </a:p>
-          <a:p>
-            <a:pPr>
-              <a:spcAft>
-                <a:spcPts val="800"/>
-              </a:spcAft>
-            </a:pPr>
-            <a:r>
-              <a:rPr sz="2300" b="0" u="none">
-                <a:solidFill>
-                  <a:srgbClr val="181C23"/>
-                </a:solidFill>
-                <a:latin typeface="Malgun Gothic"/>
-              </a:rPr>
-              <a:t>국민성장펀드는 그 질문을 보여주는 한 사례일 뿐, 성공을 단정할 수는 없다.</a:t>
-            </a:r>
-          </a:p>
         </p:txBody>
       </p:sp>
       <p:sp>
@@ -15700,27 +15943,97 @@
               <a:t>은행은 자본규제와 위험가중자산을 고려해야 하므로, 위험한 자산을 무한정 늘릴 수 없다.</a:t>
             </a:r>
           </a:p>
-          <a:p>
-            <a:pPr>
-              <a:spcAft>
-                <a:spcPts val="800"/>
-              </a:spcAft>
-            </a:pPr>
-            <a:r>
-              <a:rPr sz="2000" b="0" u="none">
+        </p:txBody>
+      </p:sp>
+      <p:sp>
+        <p:nvSpPr>
+          <p:cNvPr id="4" name="Rectangle 3"/>
+          <p:cNvSpPr/>
+          <p:nvPr/>
+        </p:nvSpPr>
+        <p:spPr>
+          <a:xfrm>
+            <a:off x="7818120" y="1417320"/>
+            <a:ext cx="3703320" cy="4251960"/>
+          </a:xfrm>
+          <a:prstGeom prst="rect">
+            <a:avLst/>
+          </a:prstGeom>
+          <a:solidFill>
+            <a:srgbClr val="EBF1F4"/>
+          </a:solidFill>
+          <a:ln w="12700">
+            <a:solidFill>
+              <a:srgbClr val="A0AEB8"/>
+            </a:solidFill>
+          </a:ln>
+        </p:spPr>
+        <p:style>
+          <a:lnRef idx="1">
+            <a:schemeClr val="accent1"/>
+          </a:lnRef>
+          <a:fillRef idx="3">
+            <a:schemeClr val="accent1"/>
+          </a:fillRef>
+          <a:effectRef idx="2">
+            <a:schemeClr val="accent1"/>
+          </a:effectRef>
+          <a:fontRef idx="minor">
+            <a:schemeClr val="lt1"/>
+          </a:fontRef>
+        </p:style>
+        <p:txBody>
+          <a:bodyPr rtlCol="0" anchor="ctr" wrap="square"/>
+          <a:lstStyle/>
+          <a:p>
+            <a:pPr algn="ctr"/>
+            <a:r>
+              <a:rPr sz="1600" b="1">
                 <a:solidFill>
-                  <a:srgbClr val="181C23"/>
+                  <a:srgbClr val="566070"/>
                 </a:solidFill>
                 <a:latin typeface="Malgun Gothic"/>
               </a:rPr>
-              <a:t>그래서 장기 위험자본 논의는 은행의 본능을 비난하는 문제가 아니라 금융 시스템의 설계 문제에 가깝다.</a:t>
-            </a:r>
-          </a:p>
-        </p:txBody>
-      </p:sp>
-      <p:sp>
-        <p:nvSpPr>
-          <p:cNvPr id="4" name="TextBox 3"/>
+              <a:t>[기사 인용]</a:t>
+            </a:r>
+          </a:p>
+          <a:p>
+            <a:pPr algn="ctr">
+              <a:spcBef>
+                <a:spcPts val="800"/>
+              </a:spcBef>
+            </a:pPr>
+            <a:r>
+              <a:rPr sz="1800" b="1">
+                <a:solidFill>
+                  <a:srgbClr val="000000"/>
+                </a:solidFill>
+                <a:latin typeface="Malgun Gothic"/>
+              </a:rPr>
+              <a:t>BIS</a:t>
+            </a:r>
+          </a:p>
+          <a:p>
+            <a:pPr algn="ctr">
+              <a:spcBef>
+                <a:spcPts val="400"/>
+              </a:spcBef>
+            </a:pPr>
+            <a:r>
+              <a:rPr sz="1400" b="0">
+                <a:solidFill>
+                  <a:srgbClr val="566070"/>
+                </a:solidFill>
+                <a:latin typeface="Malgun Gothic"/>
+              </a:rPr>
+              <a:t>은행 입장에서는 담보가 제일 편하다</a:t>
+            </a:r>
+          </a:p>
+        </p:txBody>
+      </p:sp>
+      <p:sp>
+        <p:nvSpPr>
+          <p:cNvPr id="5" name="TextBox 4"/>
           <p:cNvSpPr txBox="1"/>
           <p:nvPr/>
         </p:nvSpPr>
@@ -15754,7 +16067,7 @@
       </p:sp>
       <p:sp>
         <p:nvSpPr>
-          <p:cNvPr id="5" name="TextBox 4"/>
+          <p:cNvPr id="6" name="TextBox 5"/>
           <p:cNvSpPr txBox="1"/>
           <p:nvPr/>
         </p:nvSpPr>
@@ -15900,22 +16213,6 @@
               <a:t>정책자료는 국민성장펀드가 AI·반도체 같은 첨단전략산업에 장기 자금을 공급하려는 틀이라고 설명한다.</a:t>
             </a:r>
           </a:p>
-          <a:p>
-            <a:pPr>
-              <a:spcAft>
-                <a:spcPts val="800"/>
-              </a:spcAft>
-            </a:pPr>
-            <a:r>
-              <a:rPr sz="2300" b="0" u="none">
-                <a:solidFill>
-                  <a:srgbClr val="181C23"/>
-                </a:solidFill>
-                <a:latin typeface="Malgun Gothic"/>
-              </a:rPr>
-              <a:t>그래서 이 이야기는 “대출을 늘리자”보다 “누가 긴 위험을 나눌 것인가”에 가깝다.</a:t>
-            </a:r>
-          </a:p>
         </p:txBody>
       </p:sp>
       <p:sp>
@@ -16098,22 +16395,6 @@
                 <a:latin typeface="Malgun Gothic"/>
               </a:rPr>
               <a:t>너무 위험하면 결국 손실을 누가 떠안느냐는 문제가 생긴다.</a:t>
-            </a:r>
-          </a:p>
-          <a:p>
-            <a:pPr>
-              <a:spcAft>
-                <a:spcPts val="800"/>
-              </a:spcAft>
-            </a:pPr>
-            <a:r>
-              <a:rPr sz="2300" b="0" u="none">
-                <a:solidFill>
-                  <a:srgbClr val="181C23"/>
-                </a:solidFill>
-                <a:latin typeface="Malgun Gothic"/>
-              </a:rPr>
-              <a:t>이 사이의 균형이 정책금융 논쟁의 본론이다.</a:t>
             </a:r>
           </a:p>
         </p:txBody>
@@ -16496,27 +16777,97 @@
               <a:t>반도체, 전력망, 데이터센터, 장비, 소재가 함께 필요하다.</a:t>
             </a:r>
           </a:p>
-          <a:p>
-            <a:pPr>
-              <a:spcAft>
-                <a:spcPts val="800"/>
-              </a:spcAft>
-            </a:pPr>
-            <a:r>
-              <a:rPr sz="2000" b="0" u="none">
+        </p:txBody>
+      </p:sp>
+      <p:sp>
+        <p:nvSpPr>
+          <p:cNvPr id="4" name="Rectangle 3"/>
+          <p:cNvSpPr/>
+          <p:nvPr/>
+        </p:nvSpPr>
+        <p:spPr>
+          <a:xfrm>
+            <a:off x="7818120" y="1417320"/>
+            <a:ext cx="3703320" cy="4251960"/>
+          </a:xfrm>
+          <a:prstGeom prst="rect">
+            <a:avLst/>
+          </a:prstGeom>
+          <a:solidFill>
+            <a:srgbClr val="EBF1F4"/>
+          </a:solidFill>
+          <a:ln w="12700">
+            <a:solidFill>
+              <a:srgbClr val="A0AEB8"/>
+            </a:solidFill>
+          </a:ln>
+        </p:spPr>
+        <p:style>
+          <a:lnRef idx="1">
+            <a:schemeClr val="accent1"/>
+          </a:lnRef>
+          <a:fillRef idx="3">
+            <a:schemeClr val="accent1"/>
+          </a:fillRef>
+          <a:effectRef idx="2">
+            <a:schemeClr val="accent1"/>
+          </a:effectRef>
+          <a:fontRef idx="minor">
+            <a:schemeClr val="lt1"/>
+          </a:fontRef>
+        </p:style>
+        <p:txBody>
+          <a:bodyPr rtlCol="0" anchor="ctr" wrap="square"/>
+          <a:lstStyle/>
+          <a:p>
+            <a:pPr algn="ctr"/>
+            <a:r>
+              <a:rPr sz="1600" b="1">
                 <a:solidFill>
-                  <a:srgbClr val="181C23"/>
+                  <a:srgbClr val="566070"/>
                 </a:solidFill>
                 <a:latin typeface="Malgun Gothic"/>
               </a:rPr>
-              <a:t>공식자료가 “인내자본”을 말하는 이유도 이 산업이 긴 회수 기간과 대규모 선투자를 요구하기 때문이다.</a:t>
-            </a:r>
-          </a:p>
-        </p:txBody>
-      </p:sp>
-      <p:sp>
-        <p:nvSpPr>
-          <p:cNvPr id="4" name="TextBox 3"/>
+              <a:t>[기사 인용]</a:t>
+            </a:r>
+          </a:p>
+          <a:p>
+            <a:pPr algn="ctr">
+              <a:spcBef>
+                <a:spcPts val="800"/>
+              </a:spcBef>
+            </a:pPr>
+            <a:r>
+              <a:rPr sz="1800" b="1">
+                <a:solidFill>
+                  <a:srgbClr val="000000"/>
+                </a:solidFill>
+                <a:latin typeface="Malgun Gothic"/>
+              </a:rPr>
+              <a:t>정책브리핑</a:t>
+            </a:r>
+          </a:p>
+          <a:p>
+            <a:pPr algn="ctr">
+              <a:spcBef>
+                <a:spcPts val="400"/>
+              </a:spcBef>
+            </a:pPr>
+            <a:r>
+              <a:rPr sz="1400" b="0">
+                <a:solidFill>
+                  <a:srgbClr val="566070"/>
+                </a:solidFill>
+                <a:latin typeface="Malgun Gothic"/>
+              </a:rPr>
+              <a:t>AI가 소프트웨어만의 문제가 아니게 된 순간</a:t>
+            </a:r>
+          </a:p>
+        </p:txBody>
+      </p:sp>
+      <p:sp>
+        <p:nvSpPr>
+          <p:cNvPr id="5" name="TextBox 4"/>
           <p:cNvSpPr txBox="1"/>
           <p:nvPr/>
         </p:nvSpPr>
@@ -16550,7 +16901,7 @@
       </p:sp>
       <p:sp>
         <p:nvSpPr>
-          <p:cNvPr id="5" name="TextBox 4"/>
+          <p:cNvPr id="6" name="TextBox 5"/>
           <p:cNvSpPr txBox="1"/>
           <p:nvPr/>
         </p:nvSpPr>
@@ -16686,7 +17037,7 @@
           <a:p>
             <a:pPr algn="ctr"/>
             <a:r>
-              <a:rPr sz="1600">
+              <a:rPr sz="1600" b="0">
                 <a:solidFill>
                   <a:srgbClr val="566070"/>
                 </a:solidFill>
@@ -17024,22 +17375,6 @@
               <a:t>공장, 토지, 건물은 담보로 잡기 쉽다.</a:t>
             </a:r>
           </a:p>
-          <a:p>
-            <a:pPr>
-              <a:spcAft>
-                <a:spcPts val="800"/>
-              </a:spcAft>
-            </a:pPr>
-            <a:r>
-              <a:rPr sz="1900" b="0" u="none">
-                <a:solidFill>
-                  <a:srgbClr val="181C23"/>
-                </a:solidFill>
-                <a:latin typeface="Malgun Gothic"/>
-              </a:rPr>
-              <a:t>하지만 초기 기술, 인력, 데이터, 공정 노하우는 평가하기 어렵다.</a:t>
-            </a:r>
-          </a:p>
         </p:txBody>
       </p:sp>
       <p:sp>
@@ -17076,7 +17411,7 @@
                 </a:solidFill>
                 <a:latin typeface="Malgun Gothic"/>
               </a:rPr>
-              <a:t>위험가중자산과 자본규제가 있는 은행 입장에서는 이런 불확실성이 비용이 된다.</a:t>
+              <a:t>하지만 초기 기술, 인력, 데이터, 공정 노하우는 평가하기 어렵다.</a:t>
             </a:r>
           </a:p>
         </p:txBody>

--- a/outputs/pptx/productive_finance_policy_draft.pptx
+++ b/outputs/pptx/productive_finance_policy_draft.pptx
@@ -12001,6 +12001,9 @@
           <a:lstStyle/>
           <a:p>
             <a:pPr>
+              <a:lnSpc>
+                <a:spcPct val="150000"/>
+              </a:lnSpc>
               <a:spcAft>
                 <a:spcPts val="800"/>
               </a:spcAft>
@@ -12017,6 +12020,9 @@
           </a:p>
           <a:p>
             <a:pPr>
+              <a:lnSpc>
+                <a:spcPct val="150000"/>
+              </a:lnSpc>
               <a:spcAft>
                 <a:spcPts val="800"/>
               </a:spcAft>
@@ -12185,6 +12191,9 @@
           <a:lstStyle/>
           <a:p>
             <a:pPr>
+              <a:lnSpc>
+                <a:spcPct val="150000"/>
+              </a:lnSpc>
               <a:spcAft>
                 <a:spcPts val="800"/>
               </a:spcAft>
@@ -12201,6 +12210,9 @@
           </a:p>
           <a:p>
             <a:pPr>
+              <a:lnSpc>
+                <a:spcPct val="150000"/>
+              </a:lnSpc>
               <a:spcAft>
                 <a:spcPts val="800"/>
               </a:spcAft>
@@ -12369,6 +12381,9 @@
           <a:lstStyle/>
           <a:p>
             <a:pPr>
+              <a:lnSpc>
+                <a:spcPct val="150000"/>
+              </a:lnSpc>
               <a:spcAft>
                 <a:spcPts val="800"/>
               </a:spcAft>
@@ -12385,6 +12400,9 @@
           </a:p>
           <a:p>
             <a:pPr>
+              <a:lnSpc>
+                <a:spcPct val="150000"/>
+              </a:lnSpc>
               <a:spcAft>
                 <a:spcPts val="800"/>
               </a:spcAft>
@@ -12594,7 +12612,13 @@
             <a:spAutoFit/>
           </a:bodyPr>
           <a:lstStyle/>
-          <a:p/>
+          <a:p>
+            <a:pPr>
+              <a:lnSpc>
+                <a:spcPct val="150000"/>
+              </a:lnSpc>
+            </a:pPr>
+          </a:p>
         </p:txBody>
       </p:sp>
       <p:sp>
@@ -12749,6 +12773,9 @@
           <a:lstStyle/>
           <a:p>
             <a:pPr>
+              <a:lnSpc>
+                <a:spcPct val="150000"/>
+              </a:lnSpc>
               <a:spcAft>
                 <a:spcPts val="800"/>
               </a:spcAft>
@@ -12765,6 +12792,9 @@
           </a:p>
           <a:p>
             <a:pPr>
+              <a:lnSpc>
+                <a:spcPct val="150000"/>
+              </a:lnSpc>
               <a:spcAft>
                 <a:spcPts val="800"/>
               </a:spcAft>
@@ -13019,6 +13049,9 @@
           <a:lstStyle/>
           <a:p>
             <a:pPr>
+              <a:lnSpc>
+                <a:spcPct val="150000"/>
+              </a:lnSpc>
               <a:spcAft>
                 <a:spcPts val="800"/>
               </a:spcAft>
@@ -13035,6 +13068,9 @@
           </a:p>
           <a:p>
             <a:pPr>
+              <a:lnSpc>
+                <a:spcPct val="150000"/>
+              </a:lnSpc>
               <a:spcAft>
                 <a:spcPts val="800"/>
               </a:spcAft>
@@ -13334,6 +13370,9 @@
           <a:lstStyle/>
           <a:p>
             <a:pPr>
+              <a:lnSpc>
+                <a:spcPct val="150000"/>
+              </a:lnSpc>
               <a:spcAft>
                 <a:spcPts val="800"/>
               </a:spcAft>
@@ -13350,6 +13389,9 @@
           </a:p>
           <a:p>
             <a:pPr>
+              <a:lnSpc>
+                <a:spcPct val="150000"/>
+              </a:lnSpc>
               <a:spcAft>
                 <a:spcPts val="800"/>
               </a:spcAft>
@@ -13366,6 +13408,9 @@
           </a:p>
           <a:p>
             <a:pPr>
+              <a:lnSpc>
+                <a:spcPct val="150000"/>
+              </a:lnSpc>
               <a:spcAft>
                 <a:spcPts val="800"/>
               </a:spcAft>
@@ -13624,6 +13669,9 @@
           <a:lstStyle/>
           <a:p>
             <a:pPr>
+              <a:lnSpc>
+                <a:spcPct val="150000"/>
+              </a:lnSpc>
               <a:spcAft>
                 <a:spcPts val="800"/>
               </a:spcAft>
@@ -13663,6 +13711,9 @@
           <a:lstStyle/>
           <a:p>
             <a:pPr>
+              <a:lnSpc>
+                <a:spcPct val="150000"/>
+              </a:lnSpc>
               <a:spcAft>
                 <a:spcPts val="800"/>
               </a:spcAft>
@@ -13921,6 +13972,9 @@
           <a:lstStyle/>
           <a:p>
             <a:pPr>
+              <a:lnSpc>
+                <a:spcPct val="150000"/>
+              </a:lnSpc>
               <a:spcAft>
                 <a:spcPts val="800"/>
               </a:spcAft>
@@ -13960,6 +14014,9 @@
           <a:lstStyle/>
           <a:p>
             <a:pPr>
+              <a:lnSpc>
+                <a:spcPct val="150000"/>
+              </a:lnSpc>
               <a:spcAft>
                 <a:spcPts val="800"/>
               </a:spcAft>
@@ -14128,6 +14185,9 @@
           <a:lstStyle/>
           <a:p>
             <a:pPr>
+              <a:lnSpc>
+                <a:spcPct val="150000"/>
+              </a:lnSpc>
               <a:spcAft>
                 <a:spcPts val="800"/>
               </a:spcAft>
@@ -14144,6 +14204,9 @@
           </a:p>
           <a:p>
             <a:pPr>
+              <a:lnSpc>
+                <a:spcPct val="150000"/>
+              </a:lnSpc>
               <a:spcAft>
                 <a:spcPts val="800"/>
               </a:spcAft>
@@ -14353,7 +14416,13 @@
             <a:spAutoFit/>
           </a:bodyPr>
           <a:lstStyle/>
-          <a:p/>
+          <a:p>
+            <a:pPr>
+              <a:lnSpc>
+                <a:spcPct val="150000"/>
+              </a:lnSpc>
+            </a:pPr>
+          </a:p>
         </p:txBody>
       </p:sp>
       <p:sp>
@@ -14508,6 +14577,9 @@
           <a:lstStyle/>
           <a:p>
             <a:pPr>
+              <a:lnSpc>
+                <a:spcPct val="150000"/>
+              </a:lnSpc>
               <a:spcAft>
                 <a:spcPts val="800"/>
               </a:spcAft>
@@ -14524,6 +14596,9 @@
           </a:p>
           <a:p>
             <a:pPr>
+              <a:lnSpc>
+                <a:spcPct val="150000"/>
+              </a:lnSpc>
               <a:spcAft>
                 <a:spcPts val="800"/>
               </a:spcAft>
@@ -14778,6 +14853,9 @@
           <a:lstStyle/>
           <a:p>
             <a:pPr>
+              <a:lnSpc>
+                <a:spcPct val="150000"/>
+              </a:lnSpc>
               <a:spcAft>
                 <a:spcPts val="800"/>
               </a:spcAft>
@@ -14794,6 +14872,9 @@
           </a:p>
           <a:p>
             <a:pPr>
+              <a:lnSpc>
+                <a:spcPct val="150000"/>
+              </a:lnSpc>
               <a:spcAft>
                 <a:spcPts val="800"/>
               </a:spcAft>
@@ -15138,6 +15219,9 @@
           <a:lstStyle/>
           <a:p>
             <a:pPr>
+              <a:lnSpc>
+                <a:spcPct val="150000"/>
+              </a:lnSpc>
               <a:spcAft>
                 <a:spcPts val="800"/>
               </a:spcAft>
@@ -15177,6 +15261,9 @@
           <a:lstStyle/>
           <a:p>
             <a:pPr>
+              <a:lnSpc>
+                <a:spcPct val="150000"/>
+              </a:lnSpc>
               <a:spcAft>
                 <a:spcPts val="800"/>
               </a:spcAft>
@@ -15345,6 +15432,9 @@
           <a:lstStyle/>
           <a:p>
             <a:pPr>
+              <a:lnSpc>
+                <a:spcPct val="150000"/>
+              </a:lnSpc>
               <a:spcAft>
                 <a:spcPts val="800"/>
               </a:spcAft>
@@ -15361,6 +15451,9 @@
           </a:p>
           <a:p>
             <a:pPr>
+              <a:lnSpc>
+                <a:spcPct val="150000"/>
+              </a:lnSpc>
               <a:spcAft>
                 <a:spcPts val="800"/>
               </a:spcAft>
@@ -15529,6 +15622,9 @@
           <a:lstStyle/>
           <a:p>
             <a:pPr>
+              <a:lnSpc>
+                <a:spcPct val="150000"/>
+              </a:lnSpc>
               <a:spcAft>
                 <a:spcPts val="800"/>
               </a:spcAft>
@@ -15545,6 +15641,9 @@
           </a:p>
           <a:p>
             <a:pPr>
+              <a:lnSpc>
+                <a:spcPct val="150000"/>
+              </a:lnSpc>
               <a:spcAft>
                 <a:spcPts val="800"/>
               </a:spcAft>
@@ -15561,6 +15660,9 @@
           </a:p>
           <a:p>
             <a:pPr>
+              <a:lnSpc>
+                <a:spcPct val="150000"/>
+              </a:lnSpc>
               <a:spcAft>
                 <a:spcPts val="800"/>
               </a:spcAft>
@@ -15729,6 +15831,9 @@
           <a:lstStyle/>
           <a:p>
             <a:pPr>
+              <a:lnSpc>
+                <a:spcPct val="150000"/>
+              </a:lnSpc>
               <a:spcAft>
                 <a:spcPts val="800"/>
               </a:spcAft>
@@ -15745,6 +15850,9 @@
           </a:p>
           <a:p>
             <a:pPr>
+              <a:lnSpc>
+                <a:spcPct val="150000"/>
+              </a:lnSpc>
               <a:spcAft>
                 <a:spcPts val="800"/>
               </a:spcAft>
@@ -15913,6 +16021,9 @@
           <a:lstStyle/>
           <a:p>
             <a:pPr>
+              <a:lnSpc>
+                <a:spcPct val="150000"/>
+              </a:lnSpc>
               <a:spcAft>
                 <a:spcPts val="800"/>
               </a:spcAft>
@@ -15929,6 +16040,9 @@
           </a:p>
           <a:p>
             <a:pPr>
+              <a:lnSpc>
+                <a:spcPct val="150000"/>
+              </a:lnSpc>
               <a:spcAft>
                 <a:spcPts val="800"/>
               </a:spcAft>
@@ -16183,6 +16297,9 @@
           <a:lstStyle/>
           <a:p>
             <a:pPr>
+              <a:lnSpc>
+                <a:spcPct val="150000"/>
+              </a:lnSpc>
               <a:spcAft>
                 <a:spcPts val="800"/>
               </a:spcAft>
@@ -16199,6 +16316,9 @@
           </a:p>
           <a:p>
             <a:pPr>
+              <a:lnSpc>
+                <a:spcPct val="150000"/>
+              </a:lnSpc>
               <a:spcAft>
                 <a:spcPts val="800"/>
               </a:spcAft>
@@ -16367,6 +16487,9 @@
           <a:lstStyle/>
           <a:p>
             <a:pPr>
+              <a:lnSpc>
+                <a:spcPct val="150000"/>
+              </a:lnSpc>
               <a:spcAft>
                 <a:spcPts val="800"/>
               </a:spcAft>
@@ -16383,6 +16506,9 @@
           </a:p>
           <a:p>
             <a:pPr>
+              <a:lnSpc>
+                <a:spcPct val="150000"/>
+              </a:lnSpc>
               <a:spcAft>
                 <a:spcPts val="800"/>
               </a:spcAft>
@@ -16592,7 +16718,13 @@
             <a:spAutoFit/>
           </a:bodyPr>
           <a:lstStyle/>
-          <a:p/>
+          <a:p>
+            <a:pPr>
+              <a:lnSpc>
+                <a:spcPct val="150000"/>
+              </a:lnSpc>
+            </a:pPr>
+          </a:p>
         </p:txBody>
       </p:sp>
       <p:sp>
@@ -16747,6 +16879,9 @@
           <a:lstStyle/>
           <a:p>
             <a:pPr>
+              <a:lnSpc>
+                <a:spcPct val="150000"/>
+              </a:lnSpc>
               <a:spcAft>
                 <a:spcPts val="800"/>
               </a:spcAft>
@@ -16763,6 +16898,9 @@
           </a:p>
           <a:p>
             <a:pPr>
+              <a:lnSpc>
+                <a:spcPct val="150000"/>
+              </a:lnSpc>
               <a:spcAft>
                 <a:spcPts val="800"/>
               </a:spcAft>
@@ -17071,6 +17209,9 @@
           <a:lstStyle/>
           <a:p>
             <a:pPr>
+              <a:lnSpc>
+                <a:spcPct val="150000"/>
+              </a:lnSpc>
               <a:spcAft>
                 <a:spcPts val="800"/>
               </a:spcAft>
@@ -17087,6 +17228,9 @@
           </a:p>
           <a:p>
             <a:pPr>
+              <a:lnSpc>
+                <a:spcPct val="150000"/>
+              </a:lnSpc>
               <a:spcAft>
                 <a:spcPts val="800"/>
               </a:spcAft>
@@ -17103,6 +17247,9 @@
           </a:p>
           <a:p>
             <a:pPr>
+              <a:lnSpc>
+                <a:spcPct val="150000"/>
+              </a:lnSpc>
               <a:spcAft>
                 <a:spcPts val="800"/>
               </a:spcAft>
@@ -17361,6 +17508,9 @@
           <a:lstStyle/>
           <a:p>
             <a:pPr>
+              <a:lnSpc>
+                <a:spcPct val="150000"/>
+              </a:lnSpc>
               <a:spcAft>
                 <a:spcPts val="800"/>
               </a:spcAft>
@@ -17400,6 +17550,9 @@
           <a:lstStyle/>
           <a:p>
             <a:pPr>
+              <a:lnSpc>
+                <a:spcPct val="150000"/>
+              </a:lnSpc>
               <a:spcAft>
                 <a:spcPts val="800"/>
               </a:spcAft>

--- a/outputs/pptx/productive_finance_policy_draft.pptx
+++ b/outputs/pptx/productive_finance_policy_draft.pptx
@@ -11995,7 +11995,7 @@
           <a:noFill/>
         </p:spPr>
         <p:txBody>
-          <a:bodyPr wrap="square">
+          <a:bodyPr wrap="square" anchor="ctr">
             <a:spAutoFit/>
           </a:bodyPr>
           <a:lstStyle/>
@@ -12185,7 +12185,7 @@
           <a:noFill/>
         </p:spPr>
         <p:txBody>
-          <a:bodyPr wrap="square">
+          <a:bodyPr wrap="square" anchor="ctr">
             <a:spAutoFit/>
           </a:bodyPr>
           <a:lstStyle/>
@@ -12375,7 +12375,7 @@
           <a:noFill/>
         </p:spPr>
         <p:txBody>
-          <a:bodyPr wrap="square">
+          <a:bodyPr wrap="square" anchor="ctr">
             <a:spAutoFit/>
           </a:bodyPr>
           <a:lstStyle/>
@@ -12608,7 +12608,7 @@
           <a:noFill/>
         </p:spPr>
         <p:txBody>
-          <a:bodyPr wrap="square">
+          <a:bodyPr wrap="square" anchor="ctr">
             <a:spAutoFit/>
           </a:bodyPr>
           <a:lstStyle/>
@@ -12767,7 +12767,7 @@
           <a:noFill/>
         </p:spPr>
         <p:txBody>
-          <a:bodyPr wrap="square">
+          <a:bodyPr wrap="square" anchor="ctr">
             <a:spAutoFit/>
           </a:bodyPr>
           <a:lstStyle/>
@@ -12854,7 +12854,7 @@
           <a:p>
             <a:pPr algn="ctr"/>
             <a:r>
-              <a:rPr sz="1600" b="1">
+              <a:rPr sz="1600" b="0">
                 <a:solidFill>
                   <a:srgbClr val="566070"/>
                 </a:solidFill>
@@ -13043,7 +13043,7 @@
           <a:noFill/>
         </p:spPr>
         <p:txBody>
-          <a:bodyPr wrap="square">
+          <a:bodyPr wrap="square" anchor="ctr">
             <a:spAutoFit/>
           </a:bodyPr>
           <a:lstStyle/>
@@ -13130,7 +13130,7 @@
           <a:p>
             <a:pPr algn="ctr"/>
             <a:r>
-              <a:rPr sz="1600" b="1">
+              <a:rPr sz="1600" b="0">
                 <a:solidFill>
                   <a:srgbClr val="566070"/>
                 </a:solidFill>
@@ -13364,7 +13364,7 @@
           <a:noFill/>
         </p:spPr>
         <p:txBody>
-          <a:bodyPr wrap="square">
+          <a:bodyPr wrap="square" anchor="ctr">
             <a:spAutoFit/>
           </a:bodyPr>
           <a:lstStyle/>
@@ -13663,7 +13663,7 @@
           <a:noFill/>
         </p:spPr>
         <p:txBody>
-          <a:bodyPr wrap="square">
+          <a:bodyPr wrap="square" anchor="ctr">
             <a:spAutoFit/>
           </a:bodyPr>
           <a:lstStyle/>
@@ -13705,7 +13705,7 @@
           <a:noFill/>
         </p:spPr>
         <p:txBody>
-          <a:bodyPr wrap="square">
+          <a:bodyPr wrap="square" anchor="ctr">
             <a:spAutoFit/>
           </a:bodyPr>
           <a:lstStyle/>
@@ -13966,7 +13966,7 @@
           <a:noFill/>
         </p:spPr>
         <p:txBody>
-          <a:bodyPr wrap="square">
+          <a:bodyPr wrap="square" anchor="ctr">
             <a:spAutoFit/>
           </a:bodyPr>
           <a:lstStyle/>
@@ -14008,7 +14008,7 @@
           <a:noFill/>
         </p:spPr>
         <p:txBody>
-          <a:bodyPr wrap="square">
+          <a:bodyPr wrap="square" anchor="ctr">
             <a:spAutoFit/>
           </a:bodyPr>
           <a:lstStyle/>
@@ -14179,7 +14179,7 @@
           <a:noFill/>
         </p:spPr>
         <p:txBody>
-          <a:bodyPr wrap="square">
+          <a:bodyPr wrap="square" anchor="ctr">
             <a:spAutoFit/>
           </a:bodyPr>
           <a:lstStyle/>
@@ -14412,7 +14412,7 @@
           <a:noFill/>
         </p:spPr>
         <p:txBody>
-          <a:bodyPr wrap="square">
+          <a:bodyPr wrap="square" anchor="ctr">
             <a:spAutoFit/>
           </a:bodyPr>
           <a:lstStyle/>
@@ -14571,7 +14571,7 @@
           <a:noFill/>
         </p:spPr>
         <p:txBody>
-          <a:bodyPr wrap="square">
+          <a:bodyPr wrap="square" anchor="ctr">
             <a:spAutoFit/>
           </a:bodyPr>
           <a:lstStyle/>
@@ -14658,7 +14658,7 @@
           <a:p>
             <a:pPr algn="ctr"/>
             <a:r>
-              <a:rPr sz="1600" b="1">
+              <a:rPr sz="1600" b="0">
                 <a:solidFill>
                   <a:srgbClr val="566070"/>
                 </a:solidFill>
@@ -14847,7 +14847,7 @@
           <a:noFill/>
         </p:spPr>
         <p:txBody>
-          <a:bodyPr wrap="square">
+          <a:bodyPr wrap="square" anchor="ctr">
             <a:spAutoFit/>
           </a:bodyPr>
           <a:lstStyle/>
@@ -14934,7 +14934,7 @@
           <a:p>
             <a:pPr algn="ctr"/>
             <a:r>
-              <a:rPr sz="1600" b="1">
+              <a:rPr sz="1600" b="0">
                 <a:solidFill>
                   <a:srgbClr val="566070"/>
                 </a:solidFill>
@@ -15213,7 +15213,7 @@
           <a:noFill/>
         </p:spPr>
         <p:txBody>
-          <a:bodyPr wrap="square">
+          <a:bodyPr wrap="square" anchor="ctr">
             <a:spAutoFit/>
           </a:bodyPr>
           <a:lstStyle/>
@@ -15255,7 +15255,7 @@
           <a:noFill/>
         </p:spPr>
         <p:txBody>
-          <a:bodyPr wrap="square">
+          <a:bodyPr wrap="square" anchor="ctr">
             <a:spAutoFit/>
           </a:bodyPr>
           <a:lstStyle/>
@@ -15426,7 +15426,7 @@
           <a:noFill/>
         </p:spPr>
         <p:txBody>
-          <a:bodyPr wrap="square">
+          <a:bodyPr wrap="square" anchor="ctr">
             <a:spAutoFit/>
           </a:bodyPr>
           <a:lstStyle/>
@@ -15616,7 +15616,7 @@
           <a:noFill/>
         </p:spPr>
         <p:txBody>
-          <a:bodyPr wrap="square">
+          <a:bodyPr wrap="square" anchor="ctr">
             <a:spAutoFit/>
           </a:bodyPr>
           <a:lstStyle/>
@@ -15825,7 +15825,7 @@
           <a:noFill/>
         </p:spPr>
         <p:txBody>
-          <a:bodyPr wrap="square">
+          <a:bodyPr wrap="square" anchor="ctr">
             <a:spAutoFit/>
           </a:bodyPr>
           <a:lstStyle/>
@@ -16015,7 +16015,7 @@
           <a:noFill/>
         </p:spPr>
         <p:txBody>
-          <a:bodyPr wrap="square">
+          <a:bodyPr wrap="square" anchor="ctr">
             <a:spAutoFit/>
           </a:bodyPr>
           <a:lstStyle/>
@@ -16102,7 +16102,7 @@
           <a:p>
             <a:pPr algn="ctr"/>
             <a:r>
-              <a:rPr sz="1600" b="1">
+              <a:rPr sz="1600" b="0">
                 <a:solidFill>
                   <a:srgbClr val="566070"/>
                 </a:solidFill>
@@ -16291,7 +16291,7 @@
           <a:noFill/>
         </p:spPr>
         <p:txBody>
-          <a:bodyPr wrap="square">
+          <a:bodyPr wrap="square" anchor="ctr">
             <a:spAutoFit/>
           </a:bodyPr>
           <a:lstStyle/>
@@ -16481,7 +16481,7 @@
           <a:noFill/>
         </p:spPr>
         <p:txBody>
-          <a:bodyPr wrap="square">
+          <a:bodyPr wrap="square" anchor="ctr">
             <a:spAutoFit/>
           </a:bodyPr>
           <a:lstStyle/>
@@ -16714,7 +16714,7 @@
           <a:noFill/>
         </p:spPr>
         <p:txBody>
-          <a:bodyPr wrap="square">
+          <a:bodyPr wrap="square" anchor="ctr">
             <a:spAutoFit/>
           </a:bodyPr>
           <a:lstStyle/>
@@ -16873,7 +16873,7 @@
           <a:noFill/>
         </p:spPr>
         <p:txBody>
-          <a:bodyPr wrap="square">
+          <a:bodyPr wrap="square" anchor="ctr">
             <a:spAutoFit/>
           </a:bodyPr>
           <a:lstStyle/>
@@ -16960,7 +16960,7 @@
           <a:p>
             <a:pPr algn="ctr"/>
             <a:r>
-              <a:rPr sz="1600" b="1">
+              <a:rPr sz="1600" b="0">
                 <a:solidFill>
                   <a:srgbClr val="566070"/>
                 </a:solidFill>
@@ -17203,7 +17203,7 @@
           <a:noFill/>
         </p:spPr>
         <p:txBody>
-          <a:bodyPr wrap="square">
+          <a:bodyPr wrap="square" anchor="ctr">
             <a:spAutoFit/>
           </a:bodyPr>
           <a:lstStyle/>
@@ -17502,7 +17502,7 @@
           <a:noFill/>
         </p:spPr>
         <p:txBody>
-          <a:bodyPr wrap="square">
+          <a:bodyPr wrap="square" anchor="ctr">
             <a:spAutoFit/>
           </a:bodyPr>
           <a:lstStyle/>
@@ -17544,7 +17544,7 @@
           <a:noFill/>
         </p:spPr>
         <p:txBody>
-          <a:bodyPr wrap="square">
+          <a:bodyPr wrap="square" anchor="ctr">
             <a:spAutoFit/>
           </a:bodyPr>
           <a:lstStyle/>

--- a/outputs/pptx/productive_finance_policy_draft.pptx
+++ b/outputs/pptx/productive_finance_policy_draft.pptx
@@ -923,12 +923,12 @@
           </a:p>
           <a:p>
             <a:r>
-              <a:t>  "정책금융의 명분은 민간이 감당하기 어려운 초기 위험을 나눠지는 것이다.",</a:t>
-            </a:r>
-          </a:p>
-          <a:p>
-            <a:r>
-              <a:t>  "하지만 정책자금이 늘 좋은 결과를 만든다고 단정할 수는 없다."</a:t>
+              <a:t>  "정책금융의 명분은 민간이 감당하기 어려운 초기 위험을 나눠지는…",</a:t>
+            </a:r>
+          </a:p>
+          <a:p>
+            <a:r>
+              <a:t>  "정책금융은 성장의 마중물일 수도, 손실의 통로일 수도 있다."</a:t>
             </a:r>
           </a:p>
           <a:p>
@@ -1903,7 +1903,7 @@
           </a:p>
           <a:p>
             <a:r>
-              <a:t>proof_object_type: article_quote</a:t>
+              <a:t>proof_object_type: source_card</a:t>
             </a:r>
           </a:p>
           <a:p>
@@ -1934,12 +1934,12 @@
           </a:p>
           <a:p>
             <a:r>
-              <a:t>  "국민성장펀드는 민관합동 150조 원 규모로 첨단전략산업 생태계를 지원하겠다는 정책 틀이다.",</a:t>
-            </a:r>
-          </a:p>
-          <a:p>
-            <a:r>
-              <a:t>  "국민참여형 펀드는 일반 국민 자금도 일부 모아 자펀드에 투자하는 구조로 설계됐다."</a:t>
+              <a:t>  "국민성장펀드는 민관합동 150조 원 규모로 첨단전략산업 생태계를…",</a:t>
+            </a:r>
+          </a:p>
+          <a:p>
+            <a:r>
+              <a:t>  "국민참여형 펀드는 일반 국민 자금도 일부 모아 자펀드에 투자하는…"</a:t>
             </a:r>
           </a:p>
           <a:p>
@@ -2078,7 +2078,7 @@
           </a:p>
           <a:p>
             <a:r>
-              <a:t>  "type": "article_quote",</a:t>
+              <a:t>  "type": "source_card",</a:t>
             </a:r>
           </a:p>
           <a:p>
@@ -2093,7 +2093,7 @@
           </a:p>
           <a:p>
             <a:r>
-              <a:t>  "display_label": "[기사 인용]",</a:t>
+              <a:t>  "display_label": "[출처]",</a:t>
             </a:r>
           </a:p>
           <a:p>
@@ -2270,7 +2270,7 @@
           </a:p>
           <a:p>
             <a:r>
-              <a:t>proof_object_type: article_quote</a:t>
+              <a:t>proof_object_type: source_card</a:t>
             </a:r>
           </a:p>
           <a:p>
@@ -2301,12 +2301,12 @@
           </a:p>
           <a:p>
             <a:r>
-              <a:t>  "국민참여형 펀드 자료는 재정이 각 자펀드에서 20% 범위의 손실을 우선 부담하는 구조를 설명한다.",</a:t>
-            </a:r>
-          </a:p>
-          <a:p>
-            <a:r>
-              <a:t>  "이 장치는 투자자의 위험을 낮추려는 설계지만, 원금 손실 가능성이 사라진다는 뜻은 아니다."</a:t>
+              <a:t>  "이 장치는 투자자의 위험을 낮추려는 설계지만",</a:t>
+            </a:r>
+          </a:p>
+          <a:p>
+            <a:r>
+              <a:t>  "손실을 누가, 어떤 순서로, 어디까지 부담하는지가 핵심 질문이다."</a:t>
             </a:r>
           </a:p>
           <a:p>
@@ -2440,7 +2440,7 @@
           </a:p>
           <a:p>
             <a:r>
-              <a:t>  "type": "article_quote",</a:t>
+              <a:t>  "type": "source_card",</a:t>
             </a:r>
           </a:p>
           <a:p>
@@ -2455,7 +2455,7 @@
           </a:p>
           <a:p>
             <a:r>
-              <a:t>  "display_label": "[기사 인용]",</a:t>
+              <a:t>  "display_label": "[출처]",</a:t>
             </a:r>
           </a:p>
           <a:p>
@@ -2658,12 +2658,7 @@
           </a:p>
           <a:p>
             <a:r>
-              <a:t>  "정책금융의 어려움은 “돈을 넣을 것인가”보다 “손실이 나면 누가 먼저 감당할 것인가”다.",</a:t>
-            </a:r>
-          </a:p>
-          <a:p>
-            <a:r>
-              <a:t>  "공식자료는 후순위 재정 보강을 설명하지만, 반대 관점은 손실 보전과 관제상품화 논란을 제기한다.",</a:t>
+              <a:t>  "정책금융의 어려움은 “돈을 넣을 것인가”보다 “손실이 나면 누가…",</a:t>
             </a:r>
           </a:p>
           <a:p>
@@ -2683,7 +2678,17 @@
           </a:p>
           <a:p>
             <a:r>
-              <a:t>[]</a:t>
+              <a:t>[</a:t>
+            </a:r>
+          </a:p>
+          <a:p>
+            <a:r>
+              <a:t>  "이 둘을 같이 봐야 정책금융 논쟁이 단순 찬반으로 흐르지 않는다."</a:t>
+            </a:r>
+          </a:p>
+          <a:p>
+            <a:r>
+              <a:t>]</a:t>
             </a:r>
           </a:p>
           <a:p/>
@@ -2812,7 +2817,7 @@
           </a:p>
           <a:p>
             <a:r>
-              <a:t>  "display_label": "[기사 인용]",</a:t>
+              <a:t>  "display_label": "[인용]",</a:t>
             </a:r>
           </a:p>
           <a:p>
@@ -3020,12 +3025,12 @@
           </a:p>
           <a:p>
             <a:r>
-              <a:t>  "공식자료는 AI, 반도체, 이차전지 등 첨단전략산업을 넓은 지원 대상으로 제시한다.",</a:t>
-            </a:r>
-          </a:p>
-          <a:p>
-            <a:r>
-              <a:t>  "하지만 방송에서는 이것이 특정 기업 성공 보장이나 특정 상품 추천처럼 들리면 안 된다."</a:t>
+              <a:t>  "",</a:t>
+            </a:r>
+          </a:p>
+          <a:p>
+            <a:r>
+              <a:t>  "성장산업 지원과 특정 기업 밀어주기는 구분해서 다뤄야 한다."</a:t>
             </a:r>
           </a:p>
           <a:p>
@@ -3387,12 +3392,12 @@
           </a:p>
           <a:p>
             <a:r>
-              <a:t>  "반대쪽 질문도 있다. 재정이 위험을 먼저 떠안으면 민간은 얼마나 책임 있게 투자할까.",</a:t>
-            </a:r>
-          </a:p>
-          <a:p>
-            <a:r>
-              <a:t>  "또 은행과 금융회사는 건전성 규제, 위험가중자산, 예금자 보호 논리 안에서 움직인다."</a:t>
+              <a:t>  "반대쪽 질문도 있다",</a:t>
+            </a:r>
+          </a:p>
+          <a:p>
+            <a:r>
+              <a:t>  "또 은행과 금융회사는 건전성 규제"</a:t>
             </a:r>
           </a:p>
           <a:p>
@@ -3759,7 +3764,7 @@
           </a:p>
           <a:p>
             <a:r>
-              <a:t>  "하지만 위험도 함께 나눠야 한다면, 손실이 발생했을 때 재정·운용사·투자자·금융권의 책임선이 중요해진다."</a:t>
+              <a:t>  ""</a:t>
             </a:r>
           </a:p>
           <a:p>
@@ -4397,7 +4402,7 @@
           </a:p>
           <a:p>
             <a:r>
-              <a:t>proof_object_type: article_quote</a:t>
+              <a:t>proof_object_type: source_card</a:t>
             </a:r>
           </a:p>
           <a:p>
@@ -4428,12 +4433,7 @@
           </a:p>
           <a:p>
             <a:r>
-              <a:t>  "“담보 및 단기수익 중심 금융 경쟁은 앞서가기 어렵다”는 문제 제기가 나왔다.",</a:t>
-            </a:r>
-          </a:p>
-          <a:p>
-            <a:r>
-              <a:t>  "금융위원회 공식자료는 국민성장펀드가 5년간 150조 원, 2026년 30조 원 규모로 첨단산업 생태계에 자금을 공급하는 틀이라고 설명한다."</a:t>
+              <a:t>  "“담보 및 단기수익 중심 금융 경쟁은 앞서가기 어렵다”는 문제…"</a:t>
             </a:r>
           </a:p>
           <a:p>
@@ -4453,6 +4453,11 @@
           </a:p>
           <a:p>
             <a:r>
+              <a:t>  "금융위원회 공식자료는 국민성장펀드가 5년간 150조 원, 2026년 30조 원 규모로 첨단산업 생태계에 자금을 공급하는 틀이라고 설명한다.",</a:t>
+            </a:r>
+          </a:p>
+          <a:p>
+            <a:r>
               <a:t>  "다만 이 발언과 정책 숫자가 곧 정책 성공을 뜻하는 것은 아니다."</a:t>
             </a:r>
           </a:p>
@@ -4567,7 +4572,7 @@
           </a:p>
           <a:p>
             <a:r>
-              <a:t>  "type": "article_quote",</a:t>
+              <a:t>  "type": "source_card",</a:t>
             </a:r>
           </a:p>
           <a:p>
@@ -4582,7 +4587,7 @@
           </a:p>
           <a:p>
             <a:r>
-              <a:t>  "display_label": "[기사 인용]",</a:t>
+              <a:t>  "display_label": "[출처]",</a:t>
             </a:r>
           </a:p>
           <a:p>
@@ -4754,7 +4759,7 @@
           </a:p>
           <a:p>
             <a:r>
-              <a:t>proof_object_type: article_quote</a:t>
+              <a:t>proof_object_type: source_card</a:t>
             </a:r>
           </a:p>
           <a:p>
@@ -4790,7 +4795,7 @@
           </a:p>
           <a:p>
             <a:r>
-              <a:t>  "위험가중자산이 커지면 자본 부담도 커질 수 있고, 예금자 보호 논리와도 충돌할 수 있다."</a:t>
+              <a:t>  "위험가중자산이 커지면 자본 부담도 커질 수 있고"</a:t>
             </a:r>
           </a:p>
           <a:p>
@@ -4924,7 +4929,7 @@
           </a:p>
           <a:p>
             <a:r>
-              <a:t>  "type": "article_quote",</a:t>
+              <a:t>  "type": "source_card",</a:t>
             </a:r>
           </a:p>
           <a:p>
@@ -4939,7 +4944,7 @@
           </a:p>
           <a:p>
             <a:r>
-              <a:t>  "display_label": "[기사 인용]",</a:t>
+              <a:t>  "display_label": "[출처]",</a:t>
             </a:r>
           </a:p>
           <a:p>
@@ -5142,12 +5147,12 @@
           </a:p>
           <a:p>
             <a:r>
-              <a:t>  "이 주제는 곧바로 특정 산업·기업·펀드 투자 판단처럼 보일 수 있다.",</a:t>
-            </a:r>
-          </a:p>
-          <a:p>
-            <a:r>
-              <a:t>  "그래서 수익률, 주가, 매수·매도, 유망종목식 표현은 피해야 한다."</a:t>
+              <a:t>  "이 주제는 곧바로 특정 산업·기업·펀드 투자 판단처럼 보일 수…",</a:t>
+            </a:r>
+          </a:p>
+          <a:p>
+            <a:r>
+              <a:t>  "그래서 수익률"</a:t>
             </a:r>
           </a:p>
           <a:p>
@@ -5443,7 +5448,7 @@
           </a:p>
           <a:p>
             <a:r>
-              <a:t>proof_object_type: article_quote</a:t>
+              <a:t>proof_object_type: source_card</a:t>
             </a:r>
           </a:p>
           <a:p>
@@ -5479,7 +5484,7 @@
           </a:p>
           <a:p>
             <a:r>
-              <a:t>  "좋은 위험을 고르는 능력, 손실을 나누는 규칙, 금융권 건전성을 함께 설계할 수 있느냐는 질문이다."</a:t>
+              <a:t>  "좋은 위험을 고르는 능력"</a:t>
             </a:r>
           </a:p>
           <a:p>
@@ -5618,7 +5623,7 @@
           </a:p>
           <a:p>
             <a:r>
-              <a:t>  "type": "article_quote",</a:t>
+              <a:t>  "type": "source_card",</a:t>
             </a:r>
           </a:p>
           <a:p>
@@ -5633,7 +5638,7 @@
           </a:p>
           <a:p>
             <a:r>
-              <a:t>  "display_label": "[기사 인용]",</a:t>
+              <a:t>  "display_label": "[출처]",</a:t>
             </a:r>
           </a:p>
           <a:p>
@@ -5841,12 +5846,27 @@
           </a:p>
           <a:p>
             <a:r>
-              <a:t>  "방송 전 숫자 체크리스트: 150조 원 전체 규모, 2026년 30조 원 운용, 국민참여형 6000억 원, 재정 1200억 원, 손실 우선 부담 20% 범위.",</a:t>
-            </a:r>
-          </a:p>
-          <a:p>
-            <a:r>
-              <a:t>  "정책 효과가 아니라 구조를 설명하는 숫자로만 사용한다.",</a:t>
+              <a:t>  "방송 전 숫자 체크리스트: 150조 원 전체 규모",</a:t>
+            </a:r>
+          </a:p>
+          <a:p>
+            <a:r>
+              <a:t>  "정책 효과가 아니라 구조를 설명하는 숫자로만 사용한다."</a:t>
+            </a:r>
+          </a:p>
+          <a:p>
+            <a:r>
+              <a:t>]</a:t>
+            </a:r>
+          </a:p>
+          <a:p>
+            <a:r>
+              <a:t>overflow_body_lines:</a:t>
+            </a:r>
+          </a:p>
+          <a:p>
+            <a:r>
+              <a:t>[</a:t>
             </a:r>
           </a:p>
           <a:p>
@@ -5857,16 +5877,6 @@
           <a:p>
             <a:r>
               <a:t>]</a:t>
-            </a:r>
-          </a:p>
-          <a:p>
-            <a:r>
-              <a:t>overflow_body_lines:</a:t>
-            </a:r>
-          </a:p>
-          <a:p>
-            <a:r>
-              <a:t>[]</a:t>
             </a:r>
           </a:p>
           <a:p/>
@@ -6239,12 +6249,12 @@
           </a:p>
           <a:p>
             <a:r>
-              <a:t>  "방송 전 꼭 채워야 할 자료: 금융위/산은 공식 원문, 국민참여형 펀드 손실분담 구조, AI·반도체 장기 투자 규모, 관치금융/정책금융 실패 반론, 은행 건전성·위험가중자산 자료.",</a:t>
-            </a:r>
-          </a:p>
-          <a:p>
-            <a:r>
-              <a:t>  "지금 evidence pack은 enriched dry run에는 충분하지만, 방송용 완성본에는 추가 counterpoint가 필요하다."</a:t>
+              <a:t>  "방송 전 꼭 채워야 할 자료: 금융위/산은 공식 원문",</a:t>
+            </a:r>
+          </a:p>
+          <a:p>
+            <a:r>
+              <a:t>  "지금 evidence pack은 enriched dry run에는 충분"</a:t>
             </a:r>
           </a:p>
           <a:p>
@@ -6616,7 +6626,7 @@
           </a:p>
           <a:p>
             <a:r>
-              <a:t>proof_object_type: article_quote</a:t>
+              <a:t>proof_object_type: source_card</a:t>
             </a:r>
           </a:p>
           <a:p>
@@ -6652,7 +6662,7 @@
           </a:p>
           <a:p>
             <a:r>
-              <a:t>  "은행은 자본규제와 위험가중자산을 고려해야 하므로, 위험한 자산을 무한정 늘릴 수 없다."</a:t>
+              <a:t>  "은행은 자본규제와 위험가중자산을 고려해야 하므로"</a:t>
             </a:r>
           </a:p>
           <a:p>
@@ -6786,7 +6796,7 @@
           </a:p>
           <a:p>
             <a:r>
-              <a:t>  "type": "article_quote",</a:t>
+              <a:t>  "type": "source_card",</a:t>
             </a:r>
           </a:p>
           <a:p>
@@ -6801,7 +6811,7 @@
           </a:p>
           <a:p>
             <a:r>
-              <a:t>  "display_label": "[기사 인용]",</a:t>
+              <a:t>  "display_label": "[출처]",</a:t>
             </a:r>
           </a:p>
           <a:p>
@@ -7004,12 +7014,12 @@
           </a:p>
           <a:p>
             <a:r>
-              <a:t>  "AI와 반도체는 소프트웨어 개발비만의 문제가 아니라 설비, 전력, 공정, 인력, 공급망이 함께 필요한 산업이다.",</a:t>
-            </a:r>
-          </a:p>
-          <a:p>
-            <a:r>
-              <a:t>  "정책자료는 국민성장펀드가 AI·반도체 같은 첨단전략산업에 장기 자금을 공급하려는 틀이라고 설명한다."</a:t>
+              <a:t>  "AI와 반도체는 소프트웨어 개발비만의 문제가 아니라 설비",</a:t>
+            </a:r>
+          </a:p>
+          <a:p>
+            <a:r>
+              <a:t>  "그래서 이 이야기는 “대출을 늘리자”보다 “누가 긴 위험을 나눌…"</a:t>
             </a:r>
           </a:p>
           <a:p>
@@ -7979,7 +7989,7 @@
           </a:p>
           <a:p>
             <a:r>
-              <a:t>proof_object_type: article_quote</a:t>
+              <a:t>proof_object_type: source_card</a:t>
             </a:r>
           </a:p>
           <a:p>
@@ -8149,7 +8159,7 @@
           </a:p>
           <a:p>
             <a:r>
-              <a:t>  "type": "article_quote",</a:t>
+              <a:t>  "type": "source_card",</a:t>
             </a:r>
           </a:p>
           <a:p>
@@ -8164,7 +8174,7 @@
           </a:p>
           <a:p>
             <a:r>
-              <a:t>  "display_label": "[기사 인용]",</a:t>
+              <a:t>  "display_label": "[출처]",</a:t>
             </a:r>
           </a:p>
           <a:p>
@@ -8362,6 +8372,16 @@
           </a:p>
           <a:p>
             <a:r>
+              <a:t>[]</a:t>
+            </a:r>
+          </a:p>
+          <a:p>
+            <a:r>
+              <a:t>overflow_body_lines:</a:t>
+            </a:r>
+          </a:p>
+          <a:p>
+            <a:r>
               <a:t>[</a:t>
             </a:r>
           </a:p>
@@ -8383,16 +8403,6 @@
           <a:p>
             <a:r>
               <a:t>]</a:t>
-            </a:r>
-          </a:p>
-          <a:p>
-            <a:r>
-              <a:t>overflow_body_lines:</a:t>
-            </a:r>
-          </a:p>
-          <a:p>
-            <a:r>
-              <a:t>[]</a:t>
             </a:r>
           </a:p>
           <a:p/>
@@ -8724,7 +8734,7 @@
           </a:p>
           <a:p>
             <a:r>
-              <a:t>  "하지만 초기 기술, 인력, 데이터, 공정 노하우는 평가하기 어렵다."</a:t>
+              <a:t>  ""</a:t>
             </a:r>
           </a:p>
           <a:p>
@@ -12205,7 +12215,7 @@
                 </a:solidFill>
                 <a:latin typeface="Malgun Gothic"/>
               </a:rPr>
-              <a:t>정책금융의 명분은 민간이 감당하기 어려운 초기 위험을 나눠지는 것이다.</a:t>
+              <a:t>정책금융의 명분은 민간이 감당하기 어려운 초기 위험을 나눠지는…</a:t>
             </a:r>
           </a:p>
           <a:p>
@@ -12224,7 +12234,7 @@
                 </a:solidFill>
                 <a:latin typeface="Malgun Gothic"/>
               </a:rPr>
-              <a:t>하지만 정책자금이 늘 좋은 결과를 만든다고 단정할 수는 없다.</a:t>
+              <a:t>정책금융은 성장의 마중물일 수도, 손실의 통로일 수도 있다.</a:t>
             </a:r>
           </a:p>
         </p:txBody>
@@ -12787,7 +12797,7 @@
                 </a:solidFill>
                 <a:latin typeface="Malgun Gothic"/>
               </a:rPr>
-              <a:t>국민성장펀드는 민관합동 150조 원 규모로 첨단전략산업 생태계를 지원하겠다는 정책 틀이다.</a:t>
+              <a:t>국민성장펀드는 민관합동 150조 원 규모로 첨단전략산업 생태계를…</a:t>
             </a:r>
           </a:p>
           <a:p>
@@ -12806,7 +12816,7 @@
                 </a:solidFill>
                 <a:latin typeface="Malgun Gothic"/>
               </a:rPr>
-              <a:t>국민참여형 펀드는 일반 국민 자금도 일부 모아 자펀드에 투자하는 구조로 설계됐다.</a:t>
+              <a:t>국민참여형 펀드는 일반 국민 자금도 일부 모아 자펀드에 투자하는…</a:t>
             </a:r>
           </a:p>
         </p:txBody>
@@ -12860,7 +12870,7 @@
                 </a:solidFill>
                 <a:latin typeface="Malgun Gothic"/>
               </a:rPr>
-              <a:t>[기사 인용]</a:t>
+              <a:t>[출처]</a:t>
             </a:r>
           </a:p>
           <a:p>
@@ -12870,7 +12880,7 @@
               </a:spcBef>
             </a:pPr>
             <a:r>
-              <a:rPr sz="1800" b="1">
+              <a:rPr sz="2100" b="1">
                 <a:solidFill>
                   <a:srgbClr val="000000"/>
                 </a:solidFill>
@@ -12888,11 +12898,11 @@
             <a:r>
               <a:rPr sz="1400" b="0">
                 <a:solidFill>
-                  <a:srgbClr val="566070"/>
+                  <a:srgbClr val="373737"/>
                 </a:solidFill>
                 <a:latin typeface="Malgun Gothic"/>
               </a:rPr>
-              <a:t>국민성장펀드라는 이름이 붙으면 이야기는 더 어려워진다</a:t>
+              <a:t>needs_fact_check=true: claim must be manu…</a:t>
             </a:r>
           </a:p>
         </p:txBody>
@@ -13063,7 +13073,7 @@
                 </a:solidFill>
                 <a:latin typeface="Malgun Gothic"/>
               </a:rPr>
-              <a:t>국민참여형 펀드 자료는 재정이 각 자펀드에서 20% 범위의 손실을 우선 부담하는 구조를 설명한다.</a:t>
+              <a:t>이 장치는 투자자의 위험을 낮추려는 설계지만</a:t>
             </a:r>
           </a:p>
           <a:p>
@@ -13082,7 +13092,7 @@
                 </a:solidFill>
                 <a:latin typeface="Malgun Gothic"/>
               </a:rPr>
-              <a:t>이 장치는 투자자의 위험을 낮추려는 설계지만, 원금 손실 가능성이 사라진다는 뜻은 아니다.</a:t>
+              <a:t>손실을 누가, 어떤 순서로, 어디까지 부담하는지가 핵심 질문이다.</a:t>
             </a:r>
           </a:p>
         </p:txBody>
@@ -13136,7 +13146,7 @@
                 </a:solidFill>
                 <a:latin typeface="Malgun Gothic"/>
               </a:rPr>
-              <a:t>[기사 인용]</a:t>
+              <a:t>[출처]</a:t>
             </a:r>
           </a:p>
           <a:p>
@@ -13146,7 +13156,7 @@
               </a:spcBef>
             </a:pPr>
             <a:r>
-              <a:rPr sz="1800" b="1">
+              <a:rPr sz="2100" b="1">
                 <a:solidFill>
                   <a:srgbClr val="000000"/>
                 </a:solidFill>
@@ -13164,11 +13174,11 @@
             <a:r>
               <a:rPr sz="1400" b="0">
                 <a:solidFill>
-                  <a:srgbClr val="566070"/>
+                  <a:srgbClr val="373737"/>
                 </a:solidFill>
                 <a:latin typeface="Malgun Gothic"/>
               </a:rPr>
-              <a:t>위험을 나눈다는 말은 손실 가능성도 나눈다는 뜻이다</a:t>
+              <a:t>판매 구조와 카드뉴스. 투자 위험 표현은 반드시 보수적으로 유지</a:t>
             </a:r>
           </a:p>
         </p:txBody>
@@ -13384,26 +13394,7 @@
                 </a:solidFill>
                 <a:latin typeface="Malgun Gothic"/>
               </a:rPr>
-              <a:t>정책금융의 어려움은 “돈을 넣을 것인가”보다 “손실이 나면 누가 먼저 감당할 것인가”다.</a:t>
-            </a:r>
-          </a:p>
-          <a:p>
-            <a:pPr>
-              <a:lnSpc>
-                <a:spcPct val="150000"/>
-              </a:lnSpc>
-              <a:spcAft>
-                <a:spcPts val="800"/>
-              </a:spcAft>
-            </a:pPr>
-            <a:r>
-              <a:rPr sz="2000" b="0" u="none">
-                <a:solidFill>
-                  <a:srgbClr val="181C23"/>
-                </a:solidFill>
-                <a:latin typeface="Malgun Gothic"/>
-              </a:rPr>
-              <a:t>공식자료는 후순위 재정 보강을 설명하지만, 반대 관점은 손실 보전과 관제상품화 논란을 제기한다.</a:t>
+              <a:t>정책금융의 어려움은 “돈을 넣을 것인가”보다 “손실이 나면 누가…</a:t>
             </a:r>
           </a:p>
           <a:p>
@@ -13676,15 +13667,6 @@
                 <a:spcPts val="800"/>
               </a:spcAft>
             </a:pPr>
-            <a:r>
-              <a:rPr sz="1900" b="0" u="none">
-                <a:solidFill>
-                  <a:srgbClr val="181C23"/>
-                </a:solidFill>
-                <a:latin typeface="Malgun Gothic"/>
-              </a:rPr>
-              <a:t>공식자료는 AI, 반도체, 이차전지 등 첨단전략산업을 넓은 지원 대상으로 제시한다.</a:t>
-            </a:r>
           </a:p>
         </p:txBody>
       </p:sp>
@@ -13725,7 +13707,7 @@
                 </a:solidFill>
                 <a:latin typeface="Malgun Gothic"/>
               </a:rPr>
-              <a:t>하지만 방송에서는 이것이 특정 기업 성공 보장이나 특정 상품 추천처럼 들리면 안 된다.</a:t>
+              <a:t>성장산업 지원과 특정 기업 밀어주기는 구분해서 다뤄야 한다.</a:t>
             </a:r>
           </a:p>
         </p:txBody>
@@ -13986,7 +13968,7 @@
                 </a:solidFill>
                 <a:latin typeface="Malgun Gothic"/>
               </a:rPr>
-              <a:t>반대쪽 질문도 있다. 재정이 위험을 먼저 떠안으면 민간은 얼마나 책임 있게 투자할까.</a:t>
+              <a:t>반대쪽 질문도 있다</a:t>
             </a:r>
           </a:p>
         </p:txBody>
@@ -14028,7 +14010,7 @@
                 </a:solidFill>
                 <a:latin typeface="Malgun Gothic"/>
               </a:rPr>
-              <a:t>또 은행과 금융회사는 건전성 규제, 위험가중자산, 예금자 보호 논리 안에서 움직인다.</a:t>
+              <a:t>또 은행과 금융회사는 건전성 규제</a:t>
             </a:r>
           </a:p>
         </p:txBody>
@@ -14211,15 +14193,6 @@
                 <a:spcPts val="800"/>
               </a:spcAft>
             </a:pPr>
-            <a:r>
-              <a:rPr sz="2300" b="0" u="none">
-                <a:solidFill>
-                  <a:srgbClr val="181C23"/>
-                </a:solidFill>
-                <a:latin typeface="Malgun Gothic"/>
-              </a:rPr>
-              <a:t>하지만 위험도 함께 나눠야 한다면, 손실이 발생했을 때 재정·운용사·투자자·금융권의 책임선이 중요해진다.</a:t>
-            </a:r>
           </a:p>
         </p:txBody>
       </p:sp>
@@ -14591,26 +14564,7 @@
                 </a:solidFill>
                 <a:latin typeface="Malgun Gothic"/>
               </a:rPr>
-              <a:t>“담보 및 단기수익 중심 금융 경쟁은 앞서가기 어렵다”는 문제 제기가 나왔다.</a:t>
-            </a:r>
-          </a:p>
-          <a:p>
-            <a:pPr>
-              <a:lnSpc>
-                <a:spcPct val="150000"/>
-              </a:lnSpc>
-              <a:spcAft>
-                <a:spcPts val="800"/>
-              </a:spcAft>
-            </a:pPr>
-            <a:r>
-              <a:rPr sz="2400" b="0" u="none">
-                <a:solidFill>
-                  <a:srgbClr val="181C23"/>
-                </a:solidFill>
-                <a:latin typeface="Malgun Gothic"/>
-              </a:rPr>
-              <a:t>금융위원회 공식자료는 국민성장펀드가 5년간 150조 원, 2026년 30조 원 규모로 첨단산업 생태계에 자금을 공급하는 틀이라고 설명한다.</a:t>
+              <a:t>“담보 및 단기수익 중심 금융 경쟁은 앞서가기 어렵다”는 문제…</a:t>
             </a:r>
           </a:p>
         </p:txBody>
@@ -14664,7 +14618,7 @@
                 </a:solidFill>
                 <a:latin typeface="Malgun Gothic"/>
               </a:rPr>
-              <a:t>[기사 인용]</a:t>
+              <a:t>[출처]</a:t>
             </a:r>
           </a:p>
           <a:p>
@@ -14674,13 +14628,13 @@
               </a:spcBef>
             </a:pPr>
             <a:r>
-              <a:rPr sz="1800" b="1">
+              <a:rPr sz="2100" b="1">
                 <a:solidFill>
                   <a:srgbClr val="000000"/>
                 </a:solidFill>
                 <a:latin typeface="Malgun Gothic"/>
               </a:rPr>
-              <a:t>news.einfomax.co.kr</a:t>
+              <a:t>News</a:t>
             </a:r>
           </a:p>
           <a:p>
@@ -14692,11 +14646,11 @@
             <a:r>
               <a:rPr sz="1400" b="0">
                 <a:solidFill>
-                  <a:srgbClr val="566070"/>
+                  <a:srgbClr val="373737"/>
                 </a:solidFill>
                 <a:latin typeface="Malgun Gothic"/>
               </a:rPr>
-              <a:t>금융위원장이 던진 질문 하나</a:t>
+              <a:t>연합인포맥스 후보 기사 + 금융위원회 공식자료. 발언 원문 맥락은 방송 전…</a:t>
             </a:r>
           </a:p>
         </p:txBody>
@@ -14886,7 +14840,7 @@
                 </a:solidFill>
                 <a:latin typeface="Malgun Gothic"/>
               </a:rPr>
-              <a:t>위험가중자산이 커지면 자본 부담도 커질 수 있고, 예금자 보호 논리와도 충돌할 수 있다.</a:t>
+              <a:t>위험가중자산이 커지면 자본 부담도 커질 수 있고</a:t>
             </a:r>
           </a:p>
         </p:txBody>
@@ -14940,7 +14894,7 @@
                 </a:solidFill>
                 <a:latin typeface="Malgun Gothic"/>
               </a:rPr>
-              <a:t>[기사 인용]</a:t>
+              <a:t>[출처]</a:t>
             </a:r>
           </a:p>
           <a:p>
@@ -14950,7 +14904,7 @@
               </a:spcBef>
             </a:pPr>
             <a:r>
-              <a:rPr sz="1800" b="1">
+              <a:rPr sz="2100" b="1">
                 <a:solidFill>
                   <a:srgbClr val="000000"/>
                 </a:solidFill>
@@ -14968,11 +14922,11 @@
             <a:r>
               <a:rPr sz="1400" b="0">
                 <a:solidFill>
-                  <a:srgbClr val="566070"/>
+                  <a:srgbClr val="373737"/>
                 </a:solidFill>
                 <a:latin typeface="Malgun Gothic"/>
               </a:rPr>
-              <a:t>금융권에 “성장에 베팅하라”고 말하는 순간 생기는 문제</a:t>
+              <a:t>Basel III + 국내 인내자본 논의. 국내 감독자료 추가 확인 필요</a:t>
             </a:r>
           </a:p>
         </p:txBody>
@@ -15233,7 +15187,7 @@
                 </a:solidFill>
                 <a:latin typeface="Malgun Gothic"/>
               </a:rPr>
-              <a:t>이 주제는 곧바로 특정 산업·기업·펀드 투자 판단처럼 보일 수 있다.</a:t>
+              <a:t>이 주제는 곧바로 특정 산업·기업·펀드 투자 판단처럼 보일 수…</a:t>
             </a:r>
           </a:p>
         </p:txBody>
@@ -15275,7 +15229,7 @@
                 </a:solidFill>
                 <a:latin typeface="Malgun Gothic"/>
               </a:rPr>
-              <a:t>그래서 수익률, 주가, 매수·매도, 유망종목식 표현은 피해야 한다.</a:t>
+              <a:t>그래서 수익률</a:t>
             </a:r>
           </a:p>
         </p:txBody>
@@ -15465,7 +15419,7 @@
                 </a:solidFill>
                 <a:latin typeface="Malgun Gothic"/>
               </a:rPr>
-              <a:t>좋은 위험을 고르는 능력, 손실을 나누는 규칙, 금융권 건전성을 함께 설계할 수 있느냐는 질문이다.</a:t>
+              <a:t>좋은 위험을 고르는 능력</a:t>
             </a:r>
           </a:p>
         </p:txBody>
@@ -15636,7 +15590,7 @@
                 </a:solidFill>
                 <a:latin typeface="Malgun Gothic"/>
               </a:rPr>
-              <a:t>방송 전 숫자 체크리스트: 150조 원 전체 규모, 2026년 30조 원 운용, 국민참여형 6000억 원, 재정 1200억 원, 손실 우선 부담 20% 범위.</a:t>
+              <a:t>방송 전 숫자 체크리스트: 150조 원 전체 규모</a:t>
             </a:r>
           </a:p>
           <a:p>
@@ -15656,25 +15610,6 @@
                 <a:latin typeface="Malgun Gothic"/>
               </a:rPr>
               <a:t>정책 효과가 아니라 구조를 설명하는 숫자로만 사용한다.</a:t>
-            </a:r>
-          </a:p>
-          <a:p>
-            <a:pPr>
-              <a:lnSpc>
-                <a:spcPct val="150000"/>
-              </a:lnSpc>
-              <a:spcAft>
-                <a:spcPts val="800"/>
-              </a:spcAft>
-            </a:pPr>
-            <a:r>
-              <a:rPr sz="1800" b="0" u="none">
-                <a:solidFill>
-                  <a:srgbClr val="181C23"/>
-                </a:solidFill>
-                <a:latin typeface="Malgun Gothic"/>
-              </a:rPr>
-              <a:t>추가로 정책금융 실패 사례와 은행 건전성 자료를 더 확인하면 완성도가 올라간다.</a:t>
             </a:r>
           </a:p>
         </p:txBody>
@@ -15845,7 +15780,7 @@
                 </a:solidFill>
                 <a:latin typeface="Malgun Gothic"/>
               </a:rPr>
-              <a:t>방송 전 꼭 채워야 할 자료: 금융위/산은 공식 원문, 국민참여형 펀드 손실분담 구조, AI·반도체 장기 투자 규모, 관치금융/정책금융 실패 반론, 은행 건전성·위험가중자산 자료.</a:t>
+              <a:t>방송 전 꼭 채워야 할 자료: 금융위/산은 공식 원문</a:t>
             </a:r>
           </a:p>
           <a:p>
@@ -15864,7 +15799,7 @@
                 </a:solidFill>
                 <a:latin typeface="Malgun Gothic"/>
               </a:rPr>
-              <a:t>지금 evidence pack은 enriched dry run에는 충분하지만, 방송용 완성본에는 추가 counterpoint가 필요하다.</a:t>
+              <a:t>지금 evidence pack은 enriched dry run에는 충분</a:t>
             </a:r>
           </a:p>
         </p:txBody>
@@ -16054,7 +15989,7 @@
                 </a:solidFill>
                 <a:latin typeface="Malgun Gothic"/>
               </a:rPr>
-              <a:t>은행은 자본규제와 위험가중자산을 고려해야 하므로, 위험한 자산을 무한정 늘릴 수 없다.</a:t>
+              <a:t>은행은 자본규제와 위험가중자산을 고려해야 하므로</a:t>
             </a:r>
           </a:p>
         </p:txBody>
@@ -16108,7 +16043,7 @@
                 </a:solidFill>
                 <a:latin typeface="Malgun Gothic"/>
               </a:rPr>
-              <a:t>[기사 인용]</a:t>
+              <a:t>[출처]</a:t>
             </a:r>
           </a:p>
           <a:p>
@@ -16118,7 +16053,7 @@
               </a:spcBef>
             </a:pPr>
             <a:r>
-              <a:rPr sz="1800" b="1">
+              <a:rPr sz="2100" b="1">
                 <a:solidFill>
                   <a:srgbClr val="000000"/>
                 </a:solidFill>
@@ -16136,11 +16071,11 @@
             <a:r>
               <a:rPr sz="1400" b="0">
                 <a:solidFill>
-                  <a:srgbClr val="566070"/>
+                  <a:srgbClr val="373737"/>
                 </a:solidFill>
                 <a:latin typeface="Malgun Gothic"/>
               </a:rPr>
-              <a:t>은행 입장에서는 담보가 제일 편하다</a:t>
+              <a:t>Basel III 프레임워크 + 국내 인내자본/건전성 규제 논의. 국내 감…</a:t>
             </a:r>
           </a:p>
         </p:txBody>
@@ -16311,7 +16246,7 @@
                 </a:solidFill>
                 <a:latin typeface="Malgun Gothic"/>
               </a:rPr>
-              <a:t>AI와 반도체는 소프트웨어 개발비만의 문제가 아니라 설비, 전력, 공정, 인력, 공급망이 함께 필요한 산업이다.</a:t>
+              <a:t>AI와 반도체는 소프트웨어 개발비만의 문제가 아니라 설비</a:t>
             </a:r>
           </a:p>
           <a:p>
@@ -16330,7 +16265,7 @@
                 </a:solidFill>
                 <a:latin typeface="Malgun Gothic"/>
               </a:rPr>
-              <a:t>정책자료는 국민성장펀드가 AI·반도체 같은 첨단전략산업에 장기 자금을 공급하려는 틀이라고 설명한다.</a:t>
+              <a:t>그래서 이 이야기는 “대출을 늘리자”보다 “누가 긴 위험을 나눌…</a:t>
             </a:r>
           </a:p>
         </p:txBody>
@@ -16966,7 +16901,7 @@
                 </a:solidFill>
                 <a:latin typeface="Malgun Gothic"/>
               </a:rPr>
-              <a:t>[기사 인용]</a:t>
+              <a:t>[출처]</a:t>
             </a:r>
           </a:p>
           <a:p>
@@ -16976,7 +16911,7 @@
               </a:spcBef>
             </a:pPr>
             <a:r>
-              <a:rPr sz="1800" b="1">
+              <a:rPr sz="2100" b="1">
                 <a:solidFill>
                   <a:srgbClr val="000000"/>
                 </a:solidFill>
@@ -16994,11 +16929,11 @@
             <a:r>
               <a:rPr sz="1400" b="0">
                 <a:solidFill>
-                  <a:srgbClr val="566070"/>
+                  <a:srgbClr val="373737"/>
                 </a:solidFill>
                 <a:latin typeface="Malgun Gothic"/>
               </a:rPr>
-              <a:t>AI가 소프트웨어만의 문제가 아니게 된 순간</a:t>
+              <a:t>AI·반도체 장기 투자와 1차 메가프로젝트 자료. 세부 투자 규모는 방송…</a:t>
             </a:r>
           </a:p>
         </p:txBody>
@@ -17212,57 +17147,7 @@
               <a:lnSpc>
                 <a:spcPct val="150000"/>
               </a:lnSpc>
-              <a:spcAft>
-                <a:spcPts val="800"/>
-              </a:spcAft>
             </a:pPr>
-            <a:r>
-              <a:rPr sz="1700" b="0" u="none">
-                <a:solidFill>
-                  <a:srgbClr val="181C23"/>
-                </a:solidFill>
-                <a:latin typeface="Malgun Gothic"/>
-              </a:rPr>
-              <a:t>첨단산업 투자는 회수 기간이 길고 실패 가능성도 크다.</a:t>
-            </a:r>
-          </a:p>
-          <a:p>
-            <a:pPr>
-              <a:lnSpc>
-                <a:spcPct val="150000"/>
-              </a:lnSpc>
-              <a:spcAft>
-                <a:spcPts val="800"/>
-              </a:spcAft>
-            </a:pPr>
-            <a:r>
-              <a:rPr sz="1700" b="0" u="none">
-                <a:solidFill>
-                  <a:srgbClr val="181C23"/>
-                </a:solidFill>
-                <a:latin typeface="Malgun Gothic"/>
-              </a:rPr>
-              <a:t>정부는 국민성장펀드를 통해 장기 자금을 공급하겠다고 설명하지만, 그 자체가 수익을 보장한다는 말은 아니다.</a:t>
-            </a:r>
-          </a:p>
-          <a:p>
-            <a:pPr>
-              <a:lnSpc>
-                <a:spcPct val="150000"/>
-              </a:lnSpc>
-              <a:spcAft>
-                <a:spcPts val="800"/>
-              </a:spcAft>
-            </a:pPr>
-            <a:r>
-              <a:rPr sz="1700" b="0" u="none">
-                <a:solidFill>
-                  <a:srgbClr val="181C23"/>
-                </a:solidFill>
-                <a:latin typeface="Malgun Gothic"/>
-              </a:rPr>
-              <a:t>여기서 “장기 위험자본”이라는 말은 가능성과 손실 가능성을 함께 본다는 뜻이다.</a:t>
-            </a:r>
           </a:p>
         </p:txBody>
       </p:sp>
@@ -17557,15 +17442,6 @@
                 <a:spcPts val="800"/>
               </a:spcAft>
             </a:pPr>
-            <a:r>
-              <a:rPr sz="1900" b="0" u="none">
-                <a:solidFill>
-                  <a:srgbClr val="181C23"/>
-                </a:solidFill>
-                <a:latin typeface="Malgun Gothic"/>
-              </a:rPr>
-              <a:t>하지만 초기 기술, 인력, 데이터, 공정 노하우는 평가하기 어렵다.</a:t>
-            </a:r>
           </a:p>
         </p:txBody>
       </p:sp>

--- a/outputs/pptx/productive_finance_policy_draft.pptx
+++ b/outputs/pptx/productive_finance_policy_draft.pptx
@@ -918,32 +918,27 @@
           </a:p>
           <a:p>
             <a:r>
+              <a:t>[]</a:t>
+            </a:r>
+          </a:p>
+          <a:p>
+            <a:r>
+              <a:t>overflow_body_lines:</a:t>
+            </a:r>
+          </a:p>
+          <a:p>
+            <a:r>
               <a:t>[</a:t>
             </a:r>
           </a:p>
           <a:p>
             <a:r>
-              <a:t>  "정책금융의 명분은 민간이 감당하기 어려운 초기 위험을 나눠지는…",</a:t>
-            </a:r>
-          </a:p>
-          <a:p>
-            <a:r>
-              <a:t>  "정책금융은 성장의 마중물일 수도, 손실의 통로일 수도 있다."</a:t>
-            </a:r>
-          </a:p>
-          <a:p>
-            <a:r>
-              <a:t>]</a:t>
-            </a:r>
-          </a:p>
-          <a:p>
-            <a:r>
-              <a:t>overflow_body_lines:</a:t>
-            </a:r>
-          </a:p>
-          <a:p>
-            <a:r>
-              <a:t>[</a:t>
+              <a:t>  "정책금융의 명분은 민간이 감당하기 어려운 초기 위험을 나눠지는 것이다.",</a:t>
+            </a:r>
+          </a:p>
+          <a:p>
+            <a:r>
+              <a:t>  "하지만 정책자금이 늘 좋은 결과를 만든다고 단정할 수는 없다.",</a:t>
             </a:r>
           </a:p>
           <a:p>
@@ -1275,6 +1270,16 @@
           </a:p>
           <a:p>
             <a:r>
+              <a:t>[]</a:t>
+            </a:r>
+          </a:p>
+          <a:p>
+            <a:r>
+              <a:t>overflow_body_lines:</a:t>
+            </a:r>
+          </a:p>
+          <a:p>
+            <a:r>
               <a:t>[</a:t>
             </a:r>
           </a:p>
@@ -1285,22 +1290,7 @@
           </a:p>
           <a:p>
             <a:r>
-              <a:t>  "기업은 긴 투자금을 원한다."</a:t>
-            </a:r>
-          </a:p>
-          <a:p>
-            <a:r>
-              <a:t>]</a:t>
-            </a:r>
-          </a:p>
-          <a:p>
-            <a:r>
-              <a:t>overflow_body_lines:</a:t>
-            </a:r>
-          </a:p>
-          <a:p>
-            <a:r>
-              <a:t>[</a:t>
+              <a:t>  "기업은 긴 투자금을 원한다.",</a:t>
             </a:r>
           </a:p>
           <a:p>
@@ -1934,12 +1924,7 @@
           </a:p>
           <a:p>
             <a:r>
-              <a:t>  "국민성장펀드는 민관합동 150조 원 규모로 첨단전략산업 생태계를…",</a:t>
-            </a:r>
-          </a:p>
-          <a:p>
-            <a:r>
-              <a:t>  "국민참여형 펀드는 일반 국민 자금도 일부 모아 자펀드에 투자하는…"</a:t>
+              <a:t>  "국민성장펀드는 민관합동 150조 원 규모로 첨단전략산업 생태계를…"</a:t>
             </a:r>
           </a:p>
           <a:p>
@@ -1955,6 +1940,11 @@
           <a:p>
             <a:r>
               <a:t>[</a:t>
+            </a:r>
+          </a:p>
+          <a:p>
+            <a:r>
+              <a:t>  "국민참여형 펀드는 일반 국민 자금도 일부 모아 자펀드에 투자하는 구조로 설계됐다.",</a:t>
             </a:r>
           </a:p>
           <a:p>
@@ -2301,12 +2291,12 @@
           </a:p>
           <a:p>
             <a:r>
-              <a:t>  "이 장치는 투자자의 위험을 낮추려는 설계지만",</a:t>
-            </a:r>
-          </a:p>
-          <a:p>
-            <a:r>
-              <a:t>  "손실을 누가, 어떤 순서로, 어디까지 부담하는지가 핵심 질문이다."</a:t>
+              <a:t>  "돈이 필요한 곳은 길고",</a:t>
+            </a:r>
+          </a:p>
+          <a:p>
+            <a:r>
+              <a:t>  "위험은 누가 나눌 것인가"</a:t>
             </a:r>
           </a:p>
           <a:p>
@@ -3020,32 +3010,27 @@
           </a:p>
           <a:p>
             <a:r>
+              <a:t>[]</a:t>
+            </a:r>
+          </a:p>
+          <a:p>
+            <a:r>
+              <a:t>overflow_body_lines:</a:t>
+            </a:r>
+          </a:p>
+          <a:p>
+            <a:r>
               <a:t>[</a:t>
             </a:r>
           </a:p>
           <a:p>
             <a:r>
-              <a:t>  "",</a:t>
-            </a:r>
-          </a:p>
-          <a:p>
-            <a:r>
-              <a:t>  "성장산업 지원과 특정 기업 밀어주기는 구분해서 다뤄야 한다."</a:t>
-            </a:r>
-          </a:p>
-          <a:p>
-            <a:r>
-              <a:t>]</a:t>
-            </a:r>
-          </a:p>
-          <a:p>
-            <a:r>
-              <a:t>overflow_body_lines:</a:t>
-            </a:r>
-          </a:p>
-          <a:p>
-            <a:r>
-              <a:t>[</a:t>
+              <a:t>  "공식자료는 AI, 반도체, 이차전지 등 첨단전략산업을 넓은 지원 대상으로 제시한다.",</a:t>
+            </a:r>
+          </a:p>
+          <a:p>
+            <a:r>
+              <a:t>  "하지만 방송에서는 이것이 특정 기업 성공 보장이나 특정 상품 추천처럼 들리면 안 된다.",</a:t>
             </a:r>
           </a:p>
           <a:p>
@@ -3387,32 +3372,27 @@
           </a:p>
           <a:p>
             <a:r>
+              <a:t>[]</a:t>
+            </a:r>
+          </a:p>
+          <a:p>
+            <a:r>
+              <a:t>overflow_body_lines:</a:t>
+            </a:r>
+          </a:p>
+          <a:p>
+            <a:r>
               <a:t>[</a:t>
             </a:r>
           </a:p>
           <a:p>
             <a:r>
-              <a:t>  "반대쪽 질문도 있다",</a:t>
-            </a:r>
-          </a:p>
-          <a:p>
-            <a:r>
-              <a:t>  "또 은행과 금융회사는 건전성 규제"</a:t>
-            </a:r>
-          </a:p>
-          <a:p>
-            <a:r>
-              <a:t>]</a:t>
-            </a:r>
-          </a:p>
-          <a:p>
-            <a:r>
-              <a:t>overflow_body_lines:</a:t>
-            </a:r>
-          </a:p>
-          <a:p>
-            <a:r>
-              <a:t>[</a:t>
+              <a:t>  "반대쪽 질문도 있다. 재정이 위험을 먼저 떠안으면 민간은 얼마나 책임 있게 투자할까.",</a:t>
+            </a:r>
+          </a:p>
+          <a:p>
+            <a:r>
+              <a:t>  "또 은행과 금융회사는 건전성 규제, 위험가중자산, 예금자 보호 논리 안에서 움직인다.",</a:t>
             </a:r>
           </a:p>
           <a:p>
@@ -3754,6 +3734,16 @@
           </a:p>
           <a:p>
             <a:r>
+              <a:t>[]</a:t>
+            </a:r>
+          </a:p>
+          <a:p>
+            <a:r>
+              <a:t>overflow_body_lines:</a:t>
+            </a:r>
+          </a:p>
+          <a:p>
+            <a:r>
               <a:t>[</a:t>
             </a:r>
           </a:p>
@@ -3764,22 +3754,7 @@
           </a:p>
           <a:p>
             <a:r>
-              <a:t>  ""</a:t>
-            </a:r>
-          </a:p>
-          <a:p>
-            <a:r>
-              <a:t>]</a:t>
-            </a:r>
-          </a:p>
-          <a:p>
-            <a:r>
-              <a:t>overflow_body_lines:</a:t>
-            </a:r>
-          </a:p>
-          <a:p>
-            <a:r>
-              <a:t>[</a:t>
+              <a:t>  "하지만 위험도 함께 나눠야 한다면, 손실이 발생했을 때 재정·운용사·투자자·금융권의 책임선이 중요해진다.",</a:t>
             </a:r>
           </a:p>
           <a:p>
@@ -4433,7 +4408,12 @@
           </a:p>
           <a:p>
             <a:r>
-              <a:t>  "“담보 및 단기수익 중심 금융 경쟁은 앞서가기 어렵다”는 문제…"</a:t>
+              <a:t>  "안전한 대출은 쉽지만",</a:t>
+            </a:r>
+          </a:p>
+          <a:p>
+            <a:r>
+              <a:t>  "긴 위험은 잘 담기 어렵다"</a:t>
             </a:r>
           </a:p>
           <a:p>
@@ -4449,11 +4429,6 @@
           <a:p>
             <a:r>
               <a:t>[</a:t>
-            </a:r>
-          </a:p>
-          <a:p>
-            <a:r>
-              <a:t>  "금융위원회 공식자료는 국민성장펀드가 5년간 150조 원, 2026년 30조 원 규모로 첨단산업 생태계에 자금을 공급하는 틀이라고 설명한다.",</a:t>
             </a:r>
           </a:p>
           <a:p>
@@ -4790,12 +4765,12 @@
           </a:p>
           <a:p>
             <a:r>
-              <a:t>  "금융권에 성장산업 투자를 요구하면 곧바로 건전성 문제가 따라온다.",</a:t>
-            </a:r>
-          </a:p>
-          <a:p>
-            <a:r>
-              <a:t>  "위험가중자산이 커지면 자본 부담도 커질 수 있고"</a:t>
+              <a:t>  "돈이 필요한 곳은 길고",</a:t>
+            </a:r>
+          </a:p>
+          <a:p>
+            <a:r>
+              <a:t>  "위험은 누가 나눌 것인가"</a:t>
             </a:r>
           </a:p>
           <a:p>
@@ -5142,32 +5117,27 @@
           </a:p>
           <a:p>
             <a:r>
+              <a:t>[]</a:t>
+            </a:r>
+          </a:p>
+          <a:p>
+            <a:r>
+              <a:t>overflow_body_lines:</a:t>
+            </a:r>
+          </a:p>
+          <a:p>
+            <a:r>
               <a:t>[</a:t>
             </a:r>
           </a:p>
           <a:p>
             <a:r>
-              <a:t>  "이 주제는 곧바로 특정 산업·기업·펀드 투자 판단처럼 보일 수…",</a:t>
-            </a:r>
-          </a:p>
-          <a:p>
-            <a:r>
-              <a:t>  "그래서 수익률"</a:t>
-            </a:r>
-          </a:p>
-          <a:p>
-            <a:r>
-              <a:t>]</a:t>
-            </a:r>
-          </a:p>
-          <a:p>
-            <a:r>
-              <a:t>overflow_body_lines:</a:t>
-            </a:r>
-          </a:p>
-          <a:p>
-            <a:r>
-              <a:t>[</a:t>
+              <a:t>  "이 주제는 곧바로 특정 산업·기업·펀드 투자 판단처럼 보일 수 있다.",</a:t>
+            </a:r>
+          </a:p>
+          <a:p>
+            <a:r>
+              <a:t>  "그래서 수익률, 주가, 매수·매도, 유망종목식 표현은 피해야 한다.",</a:t>
             </a:r>
           </a:p>
           <a:p>
@@ -5479,12 +5449,12 @@
           </a:p>
           <a:p>
             <a:r>
-              <a:t>  "생산적 금융의 질문은 “정부 정책이 맞다/틀리다”가 아니다.",</a:t>
-            </a:r>
-          </a:p>
-          <a:p>
-            <a:r>
-              <a:t>  "좋은 위험을 고르는 능력"</a:t>
+              <a:t>  "돈이 필요한 곳은 길고",</a:t>
+            </a:r>
+          </a:p>
+          <a:p>
+            <a:r>
+              <a:t>  "위험은 누가 나눌 것인가"</a:t>
             </a:r>
           </a:p>
           <a:p>
@@ -6249,12 +6219,12 @@
           </a:p>
           <a:p>
             <a:r>
-              <a:t>  "방송 전 꼭 채워야 할 자료: 금융위/산은 공식 원문",</a:t>
-            </a:r>
-          </a:p>
-          <a:p>
-            <a:r>
-              <a:t>  "지금 evidence pack은 enriched dry run에는 충분"</a:t>
+              <a:t>  "돈이 필요한 곳은 길고",</a:t>
+            </a:r>
+          </a:p>
+          <a:p>
+            <a:r>
+              <a:t>  "위험은 누가 나눌 것인가"</a:t>
             </a:r>
           </a:p>
           <a:p>
@@ -6657,12 +6627,7 @@
           </a:p>
           <a:p>
             <a:r>
-              <a:t>  "돈을 빌려줄 때 가장 쉬운 질문은 “담보가 있나?”다.",</a:t>
-            </a:r>
-          </a:p>
-          <a:p>
-            <a:r>
-              <a:t>  "은행은 자본규제와 위험가중자산을 고려해야 하므로"</a:t>
+              <a:t>  "돈을 빌려줄 때 가장 쉬운 질문은 “담보가 있나?”다."</a:t>
             </a:r>
           </a:p>
           <a:p>
@@ -6678,6 +6643,11 @@
           <a:p>
             <a:r>
               <a:t>[</a:t>
+            </a:r>
+          </a:p>
+          <a:p>
+            <a:r>
+              <a:t>  "은행은 자본규제와 위험가중자산을 고려해야 하므로, 위험한 자산을 무한정 늘릴 수 없다.",</a:t>
             </a:r>
           </a:p>
           <a:p>
@@ -7009,32 +6979,27 @@
           </a:p>
           <a:p>
             <a:r>
+              <a:t>[]</a:t>
+            </a:r>
+          </a:p>
+          <a:p>
+            <a:r>
+              <a:t>overflow_body_lines:</a:t>
+            </a:r>
+          </a:p>
+          <a:p>
+            <a:r>
               <a:t>[</a:t>
             </a:r>
           </a:p>
           <a:p>
             <a:r>
-              <a:t>  "AI와 반도체는 소프트웨어 개발비만의 문제가 아니라 설비",</a:t>
-            </a:r>
-          </a:p>
-          <a:p>
-            <a:r>
-              <a:t>  "그래서 이 이야기는 “대출을 늘리자”보다 “누가 긴 위험을 나눌…"</a:t>
-            </a:r>
-          </a:p>
-          <a:p>
-            <a:r>
-              <a:t>]</a:t>
-            </a:r>
-          </a:p>
-          <a:p>
-            <a:r>
-              <a:t>overflow_body_lines:</a:t>
-            </a:r>
-          </a:p>
-          <a:p>
-            <a:r>
-              <a:t>[</a:t>
+              <a:t>  "AI와 반도체는 소프트웨어 개발비만의 문제가 아니라 설비, 전력, 공정, 인력, 공급망이 함께 필요한 산업이다.",</a:t>
+            </a:r>
+          </a:p>
+          <a:p>
+            <a:r>
+              <a:t>  "정책자료는 국민성장펀드가 AI·반도체 같은 첨단전략산업에 장기 자금을 공급하려는 틀이라고 설명한다.",</a:t>
             </a:r>
           </a:p>
           <a:p>
@@ -7376,6 +7341,16 @@
           </a:p>
           <a:p>
             <a:r>
+              <a:t>[]</a:t>
+            </a:r>
+          </a:p>
+          <a:p>
+            <a:r>
+              <a:t>overflow_body_lines:</a:t>
+            </a:r>
+          </a:p>
+          <a:p>
+            <a:r>
               <a:t>[</a:t>
             </a:r>
           </a:p>
@@ -7386,22 +7361,7 @@
           </a:p>
           <a:p>
             <a:r>
-              <a:t>  "너무 위험하면 결국 손실을 누가 떠안느냐는 문제가 생긴다."</a:t>
-            </a:r>
-          </a:p>
-          <a:p>
-            <a:r>
-              <a:t>]</a:t>
-            </a:r>
-          </a:p>
-          <a:p>
-            <a:r>
-              <a:t>overflow_body_lines:</a:t>
-            </a:r>
-          </a:p>
-          <a:p>
-            <a:r>
-              <a:t>[</a:t>
+              <a:t>  "너무 위험하면 결국 손실을 누가 떠안느냐는 문제가 생긴다.",</a:t>
             </a:r>
           </a:p>
           <a:p>
@@ -8020,12 +7980,7 @@
           </a:p>
           <a:p>
             <a:r>
-              <a:t>  "AI는 모델만으로 돌아가지 않는다.",</a:t>
-            </a:r>
-          </a:p>
-          <a:p>
-            <a:r>
-              <a:t>  "반도체, 전력망, 데이터센터, 장비, 소재가 함께 필요하다."</a:t>
+              <a:t>  "AI는 모델만으로 돌아가지 않는다."</a:t>
             </a:r>
           </a:p>
           <a:p>
@@ -8041,6 +7996,11 @@
           <a:p>
             <a:r>
               <a:t>[</a:t>
+            </a:r>
+          </a:p>
+          <a:p>
+            <a:r>
+              <a:t>  "반도체, 전력망, 데이터센터, 장비, 소재가 함께 필요하다.",</a:t>
             </a:r>
           </a:p>
           <a:p>
@@ -8724,6 +8684,16 @@
           </a:p>
           <a:p>
             <a:r>
+              <a:t>[]</a:t>
+            </a:r>
+          </a:p>
+          <a:p>
+            <a:r>
+              <a:t>overflow_body_lines:</a:t>
+            </a:r>
+          </a:p>
+          <a:p>
+            <a:r>
               <a:t>[</a:t>
             </a:r>
           </a:p>
@@ -8734,22 +8704,7 @@
           </a:p>
           <a:p>
             <a:r>
-              <a:t>  ""</a:t>
-            </a:r>
-          </a:p>
-          <a:p>
-            <a:r>
-              <a:t>]</a:t>
-            </a:r>
-          </a:p>
-          <a:p>
-            <a:r>
-              <a:t>overflow_body_lines:</a:t>
-            </a:r>
-          </a:p>
-          <a:p>
-            <a:r>
-              <a:t>[</a:t>
+              <a:t>  "하지만 초기 기술, 인력, 데이터, 공정 노하우는 평가하기 어렵다.",</a:t>
             </a:r>
           </a:p>
           <a:p>
@@ -12204,38 +12159,7 @@
               <a:lnSpc>
                 <a:spcPct val="150000"/>
               </a:lnSpc>
-              <a:spcAft>
-                <a:spcPts val="800"/>
-              </a:spcAft>
             </a:pPr>
-            <a:r>
-              <a:rPr sz="2300" b="0" u="none">
-                <a:solidFill>
-                  <a:srgbClr val="181C23"/>
-                </a:solidFill>
-                <a:latin typeface="Malgun Gothic"/>
-              </a:rPr>
-              <a:t>정책금융의 명분은 민간이 감당하기 어려운 초기 위험을 나눠지는…</a:t>
-            </a:r>
-          </a:p>
-          <a:p>
-            <a:pPr>
-              <a:lnSpc>
-                <a:spcPct val="150000"/>
-              </a:lnSpc>
-              <a:spcAft>
-                <a:spcPts val="800"/>
-              </a:spcAft>
-            </a:pPr>
-            <a:r>
-              <a:rPr sz="2300" b="0" u="none">
-                <a:solidFill>
-                  <a:srgbClr val="181C23"/>
-                </a:solidFill>
-                <a:latin typeface="Malgun Gothic"/>
-              </a:rPr>
-              <a:t>정책금융은 성장의 마중물일 수도, 손실의 통로일 수도 있다.</a:t>
-            </a:r>
           </a:p>
         </p:txBody>
       </p:sp>
@@ -12394,38 +12318,7 @@
               <a:lnSpc>
                 <a:spcPct val="150000"/>
               </a:lnSpc>
-              <a:spcAft>
-                <a:spcPts val="800"/>
-              </a:spcAft>
             </a:pPr>
-            <a:r>
-              <a:rPr sz="2300" b="0" u="none">
-                <a:solidFill>
-                  <a:srgbClr val="181C23"/>
-                </a:solidFill>
-                <a:latin typeface="Malgun Gothic"/>
-              </a:rPr>
-              <a:t>은행은 예금자의 돈을 지켜야 한다.</a:t>
-            </a:r>
-          </a:p>
-          <a:p>
-            <a:pPr>
-              <a:lnSpc>
-                <a:spcPct val="150000"/>
-              </a:lnSpc>
-              <a:spcAft>
-                <a:spcPts val="800"/>
-              </a:spcAft>
-            </a:pPr>
-            <a:r>
-              <a:rPr sz="2300" b="0" u="none">
-                <a:solidFill>
-                  <a:srgbClr val="181C23"/>
-                </a:solidFill>
-                <a:latin typeface="Malgun Gothic"/>
-              </a:rPr>
-              <a:t>기업은 긴 투자금을 원한다.</a:t>
-            </a:r>
           </a:p>
         </p:txBody>
       </p:sp>
@@ -12798,25 +12691,6 @@
                 <a:latin typeface="Malgun Gothic"/>
               </a:rPr>
               <a:t>국민성장펀드는 민관합동 150조 원 규모로 첨단전략산업 생태계를…</a:t>
-            </a:r>
-          </a:p>
-          <a:p>
-            <a:pPr>
-              <a:lnSpc>
-                <a:spcPct val="150000"/>
-              </a:lnSpc>
-              <a:spcAft>
-                <a:spcPts val="800"/>
-              </a:spcAft>
-            </a:pPr>
-            <a:r>
-              <a:rPr sz="2400" b="0" u="none">
-                <a:solidFill>
-                  <a:srgbClr val="181C23"/>
-                </a:solidFill>
-                <a:latin typeface="Malgun Gothic"/>
-              </a:rPr>
-              <a:t>국민참여형 펀드는 일반 국민 자금도 일부 모아 자펀드에 투자하는…</a:t>
             </a:r>
           </a:p>
         </p:txBody>
@@ -12864,22 +12738,6 @@
           <a:p>
             <a:pPr algn="ctr"/>
             <a:r>
-              <a:rPr sz="1600" b="0">
-                <a:solidFill>
-                  <a:srgbClr val="566070"/>
-                </a:solidFill>
-                <a:latin typeface="Malgun Gothic"/>
-              </a:rPr>
-              <a:t>[출처]</a:t>
-            </a:r>
-          </a:p>
-          <a:p>
-            <a:pPr algn="ctr">
-              <a:spcBef>
-                <a:spcPts val="800"/>
-              </a:spcBef>
-            </a:pPr>
-            <a:r>
               <a:rPr sz="2100" b="1">
                 <a:solidFill>
                   <a:srgbClr val="000000"/>
@@ -13073,7 +12931,7 @@
                 </a:solidFill>
                 <a:latin typeface="Malgun Gothic"/>
               </a:rPr>
-              <a:t>이 장치는 투자자의 위험을 낮추려는 설계지만</a:t>
+              <a:t>돈이 필요한 곳은 길고</a:t>
             </a:r>
           </a:p>
           <a:p>
@@ -13092,7 +12950,7 @@
                 </a:solidFill>
                 <a:latin typeface="Malgun Gothic"/>
               </a:rPr>
-              <a:t>손실을 누가, 어떤 순서로, 어디까지 부담하는지가 핵심 질문이다.</a:t>
+              <a:t>위험은 누가 나눌 것인가</a:t>
             </a:r>
           </a:p>
         </p:txBody>
@@ -13140,22 +12998,6 @@
           <a:p>
             <a:pPr algn="ctr"/>
             <a:r>
-              <a:rPr sz="1600" b="0">
-                <a:solidFill>
-                  <a:srgbClr val="566070"/>
-                </a:solidFill>
-                <a:latin typeface="Malgun Gothic"/>
-              </a:rPr>
-              <a:t>[출처]</a:t>
-            </a:r>
-          </a:p>
-          <a:p>
-            <a:pPr algn="ctr">
-              <a:spcBef>
-                <a:spcPts val="800"/>
-              </a:spcBef>
-            </a:pPr>
-            <a:r>
               <a:rPr sz="2100" b="1">
                 <a:solidFill>
                   <a:srgbClr val="000000"/>
@@ -13663,9 +13505,6 @@
               <a:lnSpc>
                 <a:spcPct val="150000"/>
               </a:lnSpc>
-              <a:spcAft>
-                <a:spcPts val="800"/>
-              </a:spcAft>
             </a:pPr>
           </a:p>
         </p:txBody>
@@ -13696,19 +13535,7 @@
               <a:lnSpc>
                 <a:spcPct val="150000"/>
               </a:lnSpc>
-              <a:spcAft>
-                <a:spcPts val="800"/>
-              </a:spcAft>
             </a:pPr>
-            <a:r>
-              <a:rPr sz="1900" b="0" u="none">
-                <a:solidFill>
-                  <a:srgbClr val="181C23"/>
-                </a:solidFill>
-                <a:latin typeface="Malgun Gothic"/>
-              </a:rPr>
-              <a:t>성장산업 지원과 특정 기업 밀어주기는 구분해서 다뤄야 한다.</a:t>
-            </a:r>
           </a:p>
         </p:txBody>
       </p:sp>
@@ -13957,19 +13784,7 @@
               <a:lnSpc>
                 <a:spcPct val="150000"/>
               </a:lnSpc>
-              <a:spcAft>
-                <a:spcPts val="800"/>
-              </a:spcAft>
             </a:pPr>
-            <a:r>
-              <a:rPr sz="1900" b="0" u="none">
-                <a:solidFill>
-                  <a:srgbClr val="181C23"/>
-                </a:solidFill>
-                <a:latin typeface="Malgun Gothic"/>
-              </a:rPr>
-              <a:t>반대쪽 질문도 있다</a:t>
-            </a:r>
           </a:p>
         </p:txBody>
       </p:sp>
@@ -13999,19 +13814,7 @@
               <a:lnSpc>
                 <a:spcPct val="150000"/>
               </a:lnSpc>
-              <a:spcAft>
-                <a:spcPts val="800"/>
-              </a:spcAft>
             </a:pPr>
-            <a:r>
-              <a:rPr sz="1900" b="0" u="none">
-                <a:solidFill>
-                  <a:srgbClr val="181C23"/>
-                </a:solidFill>
-                <a:latin typeface="Malgun Gothic"/>
-              </a:rPr>
-              <a:t>또 은행과 금융회사는 건전성 규제</a:t>
-            </a:r>
           </a:p>
         </p:txBody>
       </p:sp>
@@ -14170,28 +13973,6 @@
               <a:lnSpc>
                 <a:spcPct val="150000"/>
               </a:lnSpc>
-              <a:spcAft>
-                <a:spcPts val="800"/>
-              </a:spcAft>
-            </a:pPr>
-            <a:r>
-              <a:rPr sz="2300" b="0" u="none">
-                <a:solidFill>
-                  <a:srgbClr val="181C23"/>
-                </a:solidFill>
-                <a:latin typeface="Malgun Gothic"/>
-              </a:rPr>
-              <a:t>성장의 과실을 함께 나누자는 말은 듣기 좋다.</a:t>
-            </a:r>
-          </a:p>
-          <a:p>
-            <a:pPr>
-              <a:lnSpc>
-                <a:spcPct val="150000"/>
-              </a:lnSpc>
-              <a:spcAft>
-                <a:spcPts val="800"/>
-              </a:spcAft>
             </a:pPr>
           </a:p>
         </p:txBody>
@@ -14564,7 +14345,26 @@
                 </a:solidFill>
                 <a:latin typeface="Malgun Gothic"/>
               </a:rPr>
-              <a:t>“담보 및 단기수익 중심 금융 경쟁은 앞서가기 어렵다”는 문제…</a:t>
+              <a:t>안전한 대출은 쉽지만</a:t>
+            </a:r>
+          </a:p>
+          <a:p>
+            <a:pPr>
+              <a:lnSpc>
+                <a:spcPct val="150000"/>
+              </a:lnSpc>
+              <a:spcAft>
+                <a:spcPts val="800"/>
+              </a:spcAft>
+            </a:pPr>
+            <a:r>
+              <a:rPr sz="2400" b="0" u="none">
+                <a:solidFill>
+                  <a:srgbClr val="181C23"/>
+                </a:solidFill>
+                <a:latin typeface="Malgun Gothic"/>
+              </a:rPr>
+              <a:t>긴 위험은 잘 담기 어렵다</a:t>
             </a:r>
           </a:p>
         </p:txBody>
@@ -14612,22 +14412,6 @@
           <a:p>
             <a:pPr algn="ctr"/>
             <a:r>
-              <a:rPr sz="1600" b="0">
-                <a:solidFill>
-                  <a:srgbClr val="566070"/>
-                </a:solidFill>
-                <a:latin typeface="Malgun Gothic"/>
-              </a:rPr>
-              <a:t>[출처]</a:t>
-            </a:r>
-          </a:p>
-          <a:p>
-            <a:pPr algn="ctr">
-              <a:spcBef>
-                <a:spcPts val="800"/>
-              </a:spcBef>
-            </a:pPr>
-            <a:r>
               <a:rPr sz="2100" b="1">
                 <a:solidFill>
                   <a:srgbClr val="000000"/>
@@ -14821,7 +14605,7 @@
                 </a:solidFill>
                 <a:latin typeface="Malgun Gothic"/>
               </a:rPr>
-              <a:t>금융권에 성장산업 투자를 요구하면 곧바로 건전성 문제가 따라온다.</a:t>
+              <a:t>돈이 필요한 곳은 길고</a:t>
             </a:r>
           </a:p>
           <a:p>
@@ -14840,7 +14624,7 @@
                 </a:solidFill>
                 <a:latin typeface="Malgun Gothic"/>
               </a:rPr>
-              <a:t>위험가중자산이 커지면 자본 부담도 커질 수 있고</a:t>
+              <a:t>위험은 누가 나눌 것인가</a:t>
             </a:r>
           </a:p>
         </p:txBody>
@@ -14888,22 +14672,6 @@
           <a:p>
             <a:pPr algn="ctr"/>
             <a:r>
-              <a:rPr sz="1600" b="0">
-                <a:solidFill>
-                  <a:srgbClr val="566070"/>
-                </a:solidFill>
-                <a:latin typeface="Malgun Gothic"/>
-              </a:rPr>
-              <a:t>[출처]</a:t>
-            </a:r>
-          </a:p>
-          <a:p>
-            <a:pPr algn="ctr">
-              <a:spcBef>
-                <a:spcPts val="800"/>
-              </a:spcBef>
-            </a:pPr>
-            <a:r>
               <a:rPr sz="2100" b="1">
                 <a:solidFill>
                   <a:srgbClr val="000000"/>
@@ -15176,19 +14944,7 @@
               <a:lnSpc>
                 <a:spcPct val="150000"/>
               </a:lnSpc>
-              <a:spcAft>
-                <a:spcPts val="800"/>
-              </a:spcAft>
             </a:pPr>
-            <a:r>
-              <a:rPr sz="1900" b="0" u="none">
-                <a:solidFill>
-                  <a:srgbClr val="181C23"/>
-                </a:solidFill>
-                <a:latin typeface="Malgun Gothic"/>
-              </a:rPr>
-              <a:t>이 주제는 곧바로 특정 산업·기업·펀드 투자 판단처럼 보일 수…</a:t>
-            </a:r>
           </a:p>
         </p:txBody>
       </p:sp>
@@ -15218,19 +14974,7 @@
               <a:lnSpc>
                 <a:spcPct val="150000"/>
               </a:lnSpc>
-              <a:spcAft>
-                <a:spcPts val="800"/>
-              </a:spcAft>
             </a:pPr>
-            <a:r>
-              <a:rPr sz="1900" b="0" u="none">
-                <a:solidFill>
-                  <a:srgbClr val="181C23"/>
-                </a:solidFill>
-                <a:latin typeface="Malgun Gothic"/>
-              </a:rPr>
-              <a:t>그래서 수익률</a:t>
-            </a:r>
           </a:p>
         </p:txBody>
       </p:sp>
@@ -15400,7 +15144,7 @@
                 </a:solidFill>
                 <a:latin typeface="Malgun Gothic"/>
               </a:rPr>
-              <a:t>생산적 금융의 질문은 “정부 정책이 맞다/틀리다”가 아니다.</a:t>
+              <a:t>돈이 필요한 곳은 길고</a:t>
             </a:r>
           </a:p>
           <a:p>
@@ -15419,7 +15163,7 @@
                 </a:solidFill>
                 <a:latin typeface="Malgun Gothic"/>
               </a:rPr>
-              <a:t>좋은 위험을 고르는 능력</a:t>
+              <a:t>위험은 누가 나눌 것인가</a:t>
             </a:r>
           </a:p>
         </p:txBody>
@@ -15780,7 +15524,7 @@
                 </a:solidFill>
                 <a:latin typeface="Malgun Gothic"/>
               </a:rPr>
-              <a:t>방송 전 꼭 채워야 할 자료: 금융위/산은 공식 원문</a:t>
+              <a:t>돈이 필요한 곳은 길고</a:t>
             </a:r>
           </a:p>
           <a:p>
@@ -15799,7 +15543,7 @@
                 </a:solidFill>
                 <a:latin typeface="Malgun Gothic"/>
               </a:rPr>
-              <a:t>지금 evidence pack은 enriched dry run에는 충분</a:t>
+              <a:t>위험은 누가 나눌 것인가</a:t>
             </a:r>
           </a:p>
         </p:txBody>
@@ -15971,25 +15715,6 @@
                 <a:latin typeface="Malgun Gothic"/>
               </a:rPr>
               <a:t>돈을 빌려줄 때 가장 쉬운 질문은 “담보가 있나?”다.</a:t>
-            </a:r>
-          </a:p>
-          <a:p>
-            <a:pPr>
-              <a:lnSpc>
-                <a:spcPct val="150000"/>
-              </a:lnSpc>
-              <a:spcAft>
-                <a:spcPts val="800"/>
-              </a:spcAft>
-            </a:pPr>
-            <a:r>
-              <a:rPr sz="2000" b="0" u="none">
-                <a:solidFill>
-                  <a:srgbClr val="181C23"/>
-                </a:solidFill>
-                <a:latin typeface="Malgun Gothic"/>
-              </a:rPr>
-              <a:t>은행은 자본규제와 위험가중자산을 고려해야 하므로</a:t>
             </a:r>
           </a:p>
         </p:txBody>
@@ -16037,22 +15762,6 @@
           <a:p>
             <a:pPr algn="ctr"/>
             <a:r>
-              <a:rPr sz="1600" b="0">
-                <a:solidFill>
-                  <a:srgbClr val="566070"/>
-                </a:solidFill>
-                <a:latin typeface="Malgun Gothic"/>
-              </a:rPr>
-              <a:t>[출처]</a:t>
-            </a:r>
-          </a:p>
-          <a:p>
-            <a:pPr algn="ctr">
-              <a:spcBef>
-                <a:spcPts val="800"/>
-              </a:spcBef>
-            </a:pPr>
-            <a:r>
               <a:rPr sz="2100" b="1">
                 <a:solidFill>
                   <a:srgbClr val="000000"/>
@@ -16235,38 +15944,7 @@
               <a:lnSpc>
                 <a:spcPct val="150000"/>
               </a:lnSpc>
-              <a:spcAft>
-                <a:spcPts val="800"/>
-              </a:spcAft>
             </a:pPr>
-            <a:r>
-              <a:rPr sz="2300" b="0" u="none">
-                <a:solidFill>
-                  <a:srgbClr val="181C23"/>
-                </a:solidFill>
-                <a:latin typeface="Malgun Gothic"/>
-              </a:rPr>
-              <a:t>AI와 반도체는 소프트웨어 개발비만의 문제가 아니라 설비</a:t>
-            </a:r>
-          </a:p>
-          <a:p>
-            <a:pPr>
-              <a:lnSpc>
-                <a:spcPct val="150000"/>
-              </a:lnSpc>
-              <a:spcAft>
-                <a:spcPts val="800"/>
-              </a:spcAft>
-            </a:pPr>
-            <a:r>
-              <a:rPr sz="2300" b="0" u="none">
-                <a:solidFill>
-                  <a:srgbClr val="181C23"/>
-                </a:solidFill>
-                <a:latin typeface="Malgun Gothic"/>
-              </a:rPr>
-              <a:t>그래서 이 이야기는 “대출을 늘리자”보다 “누가 긴 위험을 나눌…</a:t>
-            </a:r>
           </a:p>
         </p:txBody>
       </p:sp>
@@ -16425,38 +16103,7 @@
               <a:lnSpc>
                 <a:spcPct val="150000"/>
               </a:lnSpc>
-              <a:spcAft>
-                <a:spcPts val="800"/>
-              </a:spcAft>
             </a:pPr>
-            <a:r>
-              <a:rPr sz="2300" b="0" u="none">
-                <a:solidFill>
-                  <a:srgbClr val="181C23"/>
-                </a:solidFill>
-                <a:latin typeface="Malgun Gothic"/>
-              </a:rPr>
-              <a:t>너무 안전하면 성장산업이 돈을 못 받는다.</a:t>
-            </a:r>
-          </a:p>
-          <a:p>
-            <a:pPr>
-              <a:lnSpc>
-                <a:spcPct val="150000"/>
-              </a:lnSpc>
-              <a:spcAft>
-                <a:spcPts val="800"/>
-              </a:spcAft>
-            </a:pPr>
-            <a:r>
-              <a:rPr sz="2300" b="0" u="none">
-                <a:solidFill>
-                  <a:srgbClr val="181C23"/>
-                </a:solidFill>
-                <a:latin typeface="Malgun Gothic"/>
-              </a:rPr>
-              <a:t>너무 위험하면 결국 손실을 누가 떠안느냐는 문제가 생긴다.</a:t>
-            </a:r>
           </a:p>
         </p:txBody>
       </p:sp>
@@ -16829,25 +16476,6 @@
                 <a:latin typeface="Malgun Gothic"/>
               </a:rPr>
               <a:t>AI는 모델만으로 돌아가지 않는다.</a:t>
-            </a:r>
-          </a:p>
-          <a:p>
-            <a:pPr>
-              <a:lnSpc>
-                <a:spcPct val="150000"/>
-              </a:lnSpc>
-              <a:spcAft>
-                <a:spcPts val="800"/>
-              </a:spcAft>
-            </a:pPr>
-            <a:r>
-              <a:rPr sz="2000" b="0" u="none">
-                <a:solidFill>
-                  <a:srgbClr val="181C23"/>
-                </a:solidFill>
-                <a:latin typeface="Malgun Gothic"/>
-              </a:rPr>
-              <a:t>반도체, 전력망, 데이터센터, 장비, 소재가 함께 필요하다.</a:t>
             </a:r>
           </a:p>
         </p:txBody>
@@ -16895,22 +16523,6 @@
           <a:p>
             <a:pPr algn="ctr"/>
             <a:r>
-              <a:rPr sz="1600" b="0">
-                <a:solidFill>
-                  <a:srgbClr val="566070"/>
-                </a:solidFill>
-                <a:latin typeface="Malgun Gothic"/>
-              </a:rPr>
-              <a:t>[출처]</a:t>
-            </a:r>
-          </a:p>
-          <a:p>
-            <a:pPr algn="ctr">
-              <a:spcBef>
-                <a:spcPts val="800"/>
-              </a:spcBef>
-            </a:pPr>
-            <a:r>
               <a:rPr sz="2100" b="1">
                 <a:solidFill>
                   <a:srgbClr val="000000"/>
@@ -17396,19 +17008,7 @@
               <a:lnSpc>
                 <a:spcPct val="150000"/>
               </a:lnSpc>
-              <a:spcAft>
-                <a:spcPts val="800"/>
-              </a:spcAft>
             </a:pPr>
-            <a:r>
-              <a:rPr sz="1900" b="0" u="none">
-                <a:solidFill>
-                  <a:srgbClr val="181C23"/>
-                </a:solidFill>
-                <a:latin typeface="Malgun Gothic"/>
-              </a:rPr>
-              <a:t>공장, 토지, 건물은 담보로 잡기 쉽다.</a:t>
-            </a:r>
           </a:p>
         </p:txBody>
       </p:sp>
@@ -17438,9 +17038,6 @@
               <a:lnSpc>
                 <a:spcPct val="150000"/>
               </a:lnSpc>
-              <a:spcAft>
-                <a:spcPts val="800"/>
-              </a:spcAft>
             </a:pPr>
           </a:p>
         </p:txBody>
